--- a/Inventory layout.pptx
+++ b/Inventory layout.pptx
@@ -6,6 +6,7 @@
   </p:sldMasterIdLst>
   <p:sldIdLst>
     <p:sldId id="256" r:id="rId2"/>
+    <p:sldId id="257" r:id="rId3"/>
   </p:sldIdLst>
   <p:sldSz cx="12192000" cy="6858000"/>
   <p:notesSz cx="6858000" cy="9144000"/>
@@ -3321,94 +3322,12 @@
           <a:chExt cx="0" cy="0"/>
         </a:xfrm>
       </p:grpSpPr>
-      <p:sp>
-        <p:nvSpPr>
-          <p:cNvPr id="4" name="Rectangle 3">
-            <a:extLst>
-              <a:ext uri="{FF2B5EF4-FFF2-40B4-BE49-F238E27FC236}">
-                <a16:creationId xmlns:a16="http://schemas.microsoft.com/office/drawing/2014/main" id="{C3C0F8FC-4E5A-70EF-ACF6-05447A84E106}"/>
-              </a:ext>
-            </a:extLst>
-          </p:cNvPr>
-          <p:cNvSpPr/>
-          <p:nvPr/>
-        </p:nvSpPr>
-        <p:spPr>
-          <a:xfrm>
-            <a:off x="1173193" y="1397479"/>
-            <a:ext cx="3010618" cy="1449238"/>
-          </a:xfrm>
-          <a:prstGeom prst="rect">
-            <a:avLst/>
-          </a:prstGeom>
-          <a:noFill/>
-        </p:spPr>
-        <p:style>
-          <a:lnRef idx="2">
-            <a:schemeClr val="accent1">
-              <a:shade val="15000"/>
-            </a:schemeClr>
-          </a:lnRef>
-          <a:fillRef idx="1">
-            <a:schemeClr val="accent1"/>
-          </a:fillRef>
-          <a:effectRef idx="0">
-            <a:schemeClr val="accent1"/>
-          </a:effectRef>
-          <a:fontRef idx="minor">
-            <a:schemeClr val="lt1"/>
-          </a:fontRef>
-        </p:style>
-        <p:txBody>
-          <a:bodyPr rtlCol="0" anchor="ctr"/>
-          <a:lstStyle/>
-          <a:p>
-            <a:pPr algn="ctr"/>
-            <a:endParaRPr lang="en-US"/>
-          </a:p>
-        </p:txBody>
-      </p:sp>
-      <p:sp>
-        <p:nvSpPr>
-          <p:cNvPr id="6" name="TextBox 5">
-            <a:extLst>
-              <a:ext uri="{FF2B5EF4-FFF2-40B4-BE49-F238E27FC236}">
-                <a16:creationId xmlns:a16="http://schemas.microsoft.com/office/drawing/2014/main" id="{D168BF6F-1EF5-FD9F-5356-B5398842E4A7}"/>
-              </a:ext>
-            </a:extLst>
-          </p:cNvPr>
-          <p:cNvSpPr txBox="1"/>
-          <p:nvPr/>
-        </p:nvSpPr>
-        <p:spPr>
-          <a:xfrm>
-            <a:off x="1816241" y="1445726"/>
-            <a:ext cx="1791452" cy="369332"/>
-          </a:xfrm>
-          <a:prstGeom prst="rect">
-            <a:avLst/>
-          </a:prstGeom>
-          <a:noFill/>
-        </p:spPr>
-        <p:txBody>
-          <a:bodyPr wrap="none" rtlCol="0">
-            <a:spAutoFit/>
-          </a:bodyPr>
-          <a:lstStyle/>
-          <a:p>
-            <a:r>
-              <a:rPr lang="en-US" dirty="0"/>
-              <a:t>Primary weapon</a:t>
-            </a:r>
-          </a:p>
-        </p:txBody>
-      </p:sp>
       <p:grpSp>
         <p:nvGrpSpPr>
-          <p:cNvPr id="8" name="Group 7">
-            <a:extLst>
-              <a:ext uri="{FF2B5EF4-FFF2-40B4-BE49-F238E27FC236}">
-                <a16:creationId xmlns:a16="http://schemas.microsoft.com/office/drawing/2014/main" id="{D383622E-B1DC-7213-A78F-0BE6378A7974}"/>
+          <p:cNvPr id="44" name="Group 43">
+            <a:extLst>
+              <a:ext uri="{FF2B5EF4-FFF2-40B4-BE49-F238E27FC236}">
+                <a16:creationId xmlns:a16="http://schemas.microsoft.com/office/drawing/2014/main" id="{457AF761-46A9-607E-50C6-DE33919C3613}"/>
               </a:ext>
             </a:extLst>
           </p:cNvPr>
@@ -3417,18 +3336,18 @@
         </p:nvGrpSpPr>
         <p:grpSpPr>
           <a:xfrm>
-            <a:off x="7364084" y="1397479"/>
-            <a:ext cx="3010618" cy="1449238"/>
-            <a:chOff x="7614249" y="1397479"/>
-            <a:chExt cx="3010618" cy="1449238"/>
+            <a:off x="983412" y="155885"/>
+            <a:ext cx="9201509" cy="6685473"/>
+            <a:chOff x="1173193" y="172527"/>
+            <a:chExt cx="9201509" cy="6685473"/>
           </a:xfrm>
         </p:grpSpPr>
         <p:sp>
           <p:nvSpPr>
-            <p:cNvPr id="5" name="Rectangle 4">
+            <p:cNvPr id="4" name="Rectangle 3">
               <a:extLst>
                 <a:ext uri="{FF2B5EF4-FFF2-40B4-BE49-F238E27FC236}">
-                  <a16:creationId xmlns:a16="http://schemas.microsoft.com/office/drawing/2014/main" id="{9BF3BD1D-A6E1-8E3A-5E3A-CB9B6E73BA1B}"/>
+                  <a16:creationId xmlns:a16="http://schemas.microsoft.com/office/drawing/2014/main" id="{C3C0F8FC-4E5A-70EF-ACF6-05447A84E106}"/>
                 </a:ext>
               </a:extLst>
             </p:cNvPr>
@@ -3437,7 +3356,7 @@
           </p:nvSpPr>
           <p:spPr>
             <a:xfrm>
-              <a:off x="7614249" y="1397479"/>
+              <a:off x="1173193" y="1397479"/>
               <a:ext cx="3010618" cy="1449238"/>
             </a:xfrm>
             <a:prstGeom prst="rect">
@@ -3472,10 +3391,10 @@
         </p:sp>
         <p:sp>
           <p:nvSpPr>
-            <p:cNvPr id="7" name="TextBox 6">
+            <p:cNvPr id="6" name="TextBox 5">
               <a:extLst>
                 <a:ext uri="{FF2B5EF4-FFF2-40B4-BE49-F238E27FC236}">
-                  <a16:creationId xmlns:a16="http://schemas.microsoft.com/office/drawing/2014/main" id="{1495AC75-4C9B-9651-2E11-66E33BBC76CE}"/>
+                  <a16:creationId xmlns:a16="http://schemas.microsoft.com/office/drawing/2014/main" id="{D168BF6F-1EF5-FD9F-5356-B5398842E4A7}"/>
                 </a:ext>
               </a:extLst>
             </p:cNvPr>
@@ -3484,8 +3403,8 @@
           </p:nvSpPr>
           <p:spPr>
             <a:xfrm>
-              <a:off x="8226725" y="1437099"/>
-              <a:ext cx="2088649" cy="369332"/>
+              <a:off x="1816241" y="1445726"/>
+              <a:ext cx="1791452" cy="369332"/>
             </a:xfrm>
             <a:prstGeom prst="rect">
               <a:avLst/>
@@ -3500,919 +3419,1082 @@
             <a:p>
               <a:r>
                 <a:rPr lang="en-US" dirty="0"/>
-                <a:t>Secondary weapon</a:t>
+                <a:t>Primary weapon</a:t>
               </a:r>
             </a:p>
           </p:txBody>
         </p:sp>
-      </p:grpSp>
-      <p:grpSp>
-        <p:nvGrpSpPr>
-          <p:cNvPr id="10" name="Group 9">
-            <a:extLst>
-              <a:ext uri="{FF2B5EF4-FFF2-40B4-BE49-F238E27FC236}">
-                <a16:creationId xmlns:a16="http://schemas.microsoft.com/office/drawing/2014/main" id="{C668D24A-FB0B-201B-5785-B0B2BFFC2204}"/>
-              </a:ext>
-            </a:extLst>
-          </p:cNvPr>
-          <p:cNvGrpSpPr/>
-          <p:nvPr/>
-        </p:nvGrpSpPr>
-        <p:grpSpPr>
-          <a:xfrm>
-            <a:off x="4796287" y="172527"/>
-            <a:ext cx="1955321" cy="1449238"/>
-            <a:chOff x="7583857" y="1371598"/>
-            <a:chExt cx="3010618" cy="1449238"/>
-          </a:xfrm>
-        </p:grpSpPr>
-        <p:sp>
-          <p:nvSpPr>
-            <p:cNvPr id="11" name="Rectangle 10">
+        <p:grpSp>
+          <p:nvGrpSpPr>
+            <p:cNvPr id="8" name="Group 7">
               <a:extLst>
                 <a:ext uri="{FF2B5EF4-FFF2-40B4-BE49-F238E27FC236}">
-                  <a16:creationId xmlns:a16="http://schemas.microsoft.com/office/drawing/2014/main" id="{DB33D683-FF92-1846-4CB4-ADFA2579EF96}"/>
+                  <a16:creationId xmlns:a16="http://schemas.microsoft.com/office/drawing/2014/main" id="{D383622E-B1DC-7213-A78F-0BE6378A7974}"/>
                 </a:ext>
               </a:extLst>
             </p:cNvPr>
-            <p:cNvSpPr/>
+            <p:cNvGrpSpPr/>
             <p:nvPr/>
-          </p:nvSpPr>
+          </p:nvGrpSpPr>
+          <p:grpSpPr>
+            <a:xfrm>
+              <a:off x="7364084" y="1397479"/>
+              <a:ext cx="3010618" cy="1449238"/>
+              <a:chOff x="7614249" y="1397479"/>
+              <a:chExt cx="3010618" cy="1449238"/>
+            </a:xfrm>
+          </p:grpSpPr>
+          <p:sp>
+            <p:nvSpPr>
+              <p:cNvPr id="5" name="Rectangle 4">
+                <a:extLst>
+                  <a:ext uri="{FF2B5EF4-FFF2-40B4-BE49-F238E27FC236}">
+                    <a16:creationId xmlns:a16="http://schemas.microsoft.com/office/drawing/2014/main" id="{9BF3BD1D-A6E1-8E3A-5E3A-CB9B6E73BA1B}"/>
+                  </a:ext>
+                </a:extLst>
+              </p:cNvPr>
+              <p:cNvSpPr/>
+              <p:nvPr/>
+            </p:nvSpPr>
+            <p:spPr>
+              <a:xfrm>
+                <a:off x="7614249" y="1397479"/>
+                <a:ext cx="3010618" cy="1449238"/>
+              </a:xfrm>
+              <a:prstGeom prst="rect">
+                <a:avLst/>
+              </a:prstGeom>
+              <a:noFill/>
+            </p:spPr>
+            <p:style>
+              <a:lnRef idx="2">
+                <a:schemeClr val="accent1">
+                  <a:shade val="15000"/>
+                </a:schemeClr>
+              </a:lnRef>
+              <a:fillRef idx="1">
+                <a:schemeClr val="accent1"/>
+              </a:fillRef>
+              <a:effectRef idx="0">
+                <a:schemeClr val="accent1"/>
+              </a:effectRef>
+              <a:fontRef idx="minor">
+                <a:schemeClr val="lt1"/>
+              </a:fontRef>
+            </p:style>
+            <p:txBody>
+              <a:bodyPr rtlCol="0" anchor="ctr"/>
+              <a:lstStyle/>
+              <a:p>
+                <a:pPr algn="ctr"/>
+                <a:endParaRPr lang="en-US"/>
+              </a:p>
+            </p:txBody>
+          </p:sp>
+          <p:sp>
+            <p:nvSpPr>
+              <p:cNvPr id="7" name="TextBox 6">
+                <a:extLst>
+                  <a:ext uri="{FF2B5EF4-FFF2-40B4-BE49-F238E27FC236}">
+                    <a16:creationId xmlns:a16="http://schemas.microsoft.com/office/drawing/2014/main" id="{1495AC75-4C9B-9651-2E11-66E33BBC76CE}"/>
+                  </a:ext>
+                </a:extLst>
+              </p:cNvPr>
+              <p:cNvSpPr txBox="1"/>
+              <p:nvPr/>
+            </p:nvSpPr>
+            <p:spPr>
+              <a:xfrm>
+                <a:off x="8226725" y="1437099"/>
+                <a:ext cx="2088649" cy="369332"/>
+              </a:xfrm>
+              <a:prstGeom prst="rect">
+                <a:avLst/>
+              </a:prstGeom>
+              <a:noFill/>
+            </p:spPr>
+            <p:txBody>
+              <a:bodyPr wrap="none" rtlCol="0">
+                <a:spAutoFit/>
+              </a:bodyPr>
+              <a:lstStyle/>
+              <a:p>
+                <a:r>
+                  <a:rPr lang="en-US" dirty="0"/>
+                  <a:t>Secondary weapon</a:t>
+                </a:r>
+              </a:p>
+            </p:txBody>
+          </p:sp>
+        </p:grpSp>
+        <p:grpSp>
+          <p:nvGrpSpPr>
+            <p:cNvPr id="10" name="Group 9">
+              <a:extLst>
+                <a:ext uri="{FF2B5EF4-FFF2-40B4-BE49-F238E27FC236}">
+                  <a16:creationId xmlns:a16="http://schemas.microsoft.com/office/drawing/2014/main" id="{C668D24A-FB0B-201B-5785-B0B2BFFC2204}"/>
+                </a:ext>
+              </a:extLst>
+            </p:cNvPr>
+            <p:cNvGrpSpPr/>
+            <p:nvPr/>
+          </p:nvGrpSpPr>
+          <p:grpSpPr>
+            <a:xfrm>
+              <a:off x="4796287" y="172527"/>
+              <a:ext cx="1955321" cy="1449238"/>
+              <a:chOff x="7583857" y="1371598"/>
+              <a:chExt cx="3010618" cy="1449238"/>
+            </a:xfrm>
+          </p:grpSpPr>
+          <p:sp>
+            <p:nvSpPr>
+              <p:cNvPr id="11" name="Rectangle 10">
+                <a:extLst>
+                  <a:ext uri="{FF2B5EF4-FFF2-40B4-BE49-F238E27FC236}">
+                    <a16:creationId xmlns:a16="http://schemas.microsoft.com/office/drawing/2014/main" id="{DB33D683-FF92-1846-4CB4-ADFA2579EF96}"/>
+                  </a:ext>
+                </a:extLst>
+              </p:cNvPr>
+              <p:cNvSpPr/>
+              <p:nvPr/>
+            </p:nvSpPr>
+            <p:spPr>
+              <a:xfrm>
+                <a:off x="7583857" y="1371598"/>
+                <a:ext cx="3010618" cy="1449238"/>
+              </a:xfrm>
+              <a:prstGeom prst="rect">
+                <a:avLst/>
+              </a:prstGeom>
+              <a:noFill/>
+            </p:spPr>
+            <p:style>
+              <a:lnRef idx="2">
+                <a:schemeClr val="accent1">
+                  <a:shade val="15000"/>
+                </a:schemeClr>
+              </a:lnRef>
+              <a:fillRef idx="1">
+                <a:schemeClr val="accent1"/>
+              </a:fillRef>
+              <a:effectRef idx="0">
+                <a:schemeClr val="accent1"/>
+              </a:effectRef>
+              <a:fontRef idx="minor">
+                <a:schemeClr val="lt1"/>
+              </a:fontRef>
+            </p:style>
+            <p:txBody>
+              <a:bodyPr rtlCol="0" anchor="ctr"/>
+              <a:lstStyle/>
+              <a:p>
+                <a:pPr algn="ctr"/>
+                <a:endParaRPr lang="en-US"/>
+              </a:p>
+            </p:txBody>
+          </p:sp>
+          <p:sp>
+            <p:nvSpPr>
+              <p:cNvPr id="12" name="TextBox 11">
+                <a:extLst>
+                  <a:ext uri="{FF2B5EF4-FFF2-40B4-BE49-F238E27FC236}">
+                    <a16:creationId xmlns:a16="http://schemas.microsoft.com/office/drawing/2014/main" id="{AF4FE8B7-84B8-F65E-9677-2775CB9BA07A}"/>
+                  </a:ext>
+                </a:extLst>
+              </p:cNvPr>
+              <p:cNvSpPr txBox="1"/>
+              <p:nvPr/>
+            </p:nvSpPr>
+            <p:spPr>
+              <a:xfrm>
+                <a:off x="7614249" y="1566495"/>
+                <a:ext cx="2949836" cy="369332"/>
+              </a:xfrm>
+              <a:prstGeom prst="rect">
+                <a:avLst/>
+              </a:prstGeom>
+              <a:noFill/>
+            </p:spPr>
+            <p:txBody>
+              <a:bodyPr wrap="none" rtlCol="0">
+                <a:spAutoFit/>
+              </a:bodyPr>
+              <a:lstStyle/>
+              <a:p>
+                <a:r>
+                  <a:rPr lang="en-US" dirty="0"/>
+                  <a:t>Command bridge</a:t>
+                </a:r>
+              </a:p>
+            </p:txBody>
+          </p:sp>
+        </p:grpSp>
+        <p:grpSp>
+          <p:nvGrpSpPr>
+            <p:cNvPr id="13" name="Group 12">
+              <a:extLst>
+                <a:ext uri="{FF2B5EF4-FFF2-40B4-BE49-F238E27FC236}">
+                  <a16:creationId xmlns:a16="http://schemas.microsoft.com/office/drawing/2014/main" id="{C3D4FF44-F924-9C1A-2CC4-40B6A0638398}"/>
+                </a:ext>
+              </a:extLst>
+            </p:cNvPr>
+            <p:cNvGrpSpPr/>
+            <p:nvPr/>
+          </p:nvGrpSpPr>
+          <p:grpSpPr>
+            <a:xfrm>
+              <a:off x="4945093" y="1792816"/>
+              <a:ext cx="1657709" cy="2398144"/>
+              <a:chOff x="8226725" y="1397479"/>
+              <a:chExt cx="1657709" cy="1449238"/>
+            </a:xfrm>
+          </p:grpSpPr>
+          <p:sp>
+            <p:nvSpPr>
+              <p:cNvPr id="14" name="Rectangle 13">
+                <a:extLst>
+                  <a:ext uri="{FF2B5EF4-FFF2-40B4-BE49-F238E27FC236}">
+                    <a16:creationId xmlns:a16="http://schemas.microsoft.com/office/drawing/2014/main" id="{80084728-EA7E-6187-BC31-C33BC6024726}"/>
+                  </a:ext>
+                </a:extLst>
+              </p:cNvPr>
+              <p:cNvSpPr/>
+              <p:nvPr/>
+            </p:nvSpPr>
+            <p:spPr>
+              <a:xfrm>
+                <a:off x="8226725" y="1397479"/>
+                <a:ext cx="1657709" cy="1449238"/>
+              </a:xfrm>
+              <a:prstGeom prst="rect">
+                <a:avLst/>
+              </a:prstGeom>
+              <a:noFill/>
+            </p:spPr>
+            <p:style>
+              <a:lnRef idx="2">
+                <a:schemeClr val="accent1">
+                  <a:shade val="15000"/>
+                </a:schemeClr>
+              </a:lnRef>
+              <a:fillRef idx="1">
+                <a:schemeClr val="accent1"/>
+              </a:fillRef>
+              <a:effectRef idx="0">
+                <a:schemeClr val="accent1"/>
+              </a:effectRef>
+              <a:fontRef idx="minor">
+                <a:schemeClr val="lt1"/>
+              </a:fontRef>
+            </p:style>
+            <p:txBody>
+              <a:bodyPr rtlCol="0" anchor="ctr"/>
+              <a:lstStyle/>
+              <a:p>
+                <a:pPr algn="ctr"/>
+                <a:endParaRPr lang="en-US"/>
+              </a:p>
+            </p:txBody>
+          </p:sp>
+          <p:sp>
+            <p:nvSpPr>
+              <p:cNvPr id="15" name="TextBox 14">
+                <a:extLst>
+                  <a:ext uri="{FF2B5EF4-FFF2-40B4-BE49-F238E27FC236}">
+                    <a16:creationId xmlns:a16="http://schemas.microsoft.com/office/drawing/2014/main" id="{8634C2B0-310F-A093-A2D8-6E127997417C}"/>
+                  </a:ext>
+                </a:extLst>
+              </p:cNvPr>
+              <p:cNvSpPr txBox="1"/>
+              <p:nvPr/>
+            </p:nvSpPr>
+            <p:spPr>
+              <a:xfrm>
+                <a:off x="8758061" y="1480231"/>
+                <a:ext cx="595035" cy="369332"/>
+              </a:xfrm>
+              <a:prstGeom prst="rect">
+                <a:avLst/>
+              </a:prstGeom>
+              <a:noFill/>
+            </p:spPr>
+            <p:txBody>
+              <a:bodyPr wrap="none" rtlCol="0">
+                <a:spAutoFit/>
+              </a:bodyPr>
+              <a:lstStyle/>
+              <a:p>
+                <a:r>
+                  <a:rPr lang="en-US" dirty="0"/>
+                  <a:t>Hull</a:t>
+                </a:r>
+              </a:p>
+            </p:txBody>
+          </p:sp>
+        </p:grpSp>
+        <p:grpSp>
+          <p:nvGrpSpPr>
+            <p:cNvPr id="17" name="Group 16">
+              <a:extLst>
+                <a:ext uri="{FF2B5EF4-FFF2-40B4-BE49-F238E27FC236}">
+                  <a16:creationId xmlns:a16="http://schemas.microsoft.com/office/drawing/2014/main" id="{BC535F67-637D-540C-1BD7-30CD66EB98D7}"/>
+                </a:ext>
+              </a:extLst>
+            </p:cNvPr>
+            <p:cNvGrpSpPr/>
+            <p:nvPr/>
+          </p:nvGrpSpPr>
+          <p:grpSpPr>
+            <a:xfrm>
+              <a:off x="4268636" y="4244019"/>
+              <a:ext cx="3010618" cy="1449238"/>
+              <a:chOff x="7529419" y="1291361"/>
+              <a:chExt cx="3010618" cy="1449238"/>
+            </a:xfrm>
+          </p:grpSpPr>
+          <p:sp>
+            <p:nvSpPr>
+              <p:cNvPr id="18" name="Rectangle 17">
+                <a:extLst>
+                  <a:ext uri="{FF2B5EF4-FFF2-40B4-BE49-F238E27FC236}">
+                    <a16:creationId xmlns:a16="http://schemas.microsoft.com/office/drawing/2014/main" id="{C14F1CB8-8261-6DCE-5A2C-0EC607B2B4A3}"/>
+                  </a:ext>
+                </a:extLst>
+              </p:cNvPr>
+              <p:cNvSpPr/>
+              <p:nvPr/>
+            </p:nvSpPr>
+            <p:spPr>
+              <a:xfrm>
+                <a:off x="7529419" y="1291361"/>
+                <a:ext cx="3010618" cy="1449238"/>
+              </a:xfrm>
+              <a:prstGeom prst="rect">
+                <a:avLst/>
+              </a:prstGeom>
+              <a:noFill/>
+            </p:spPr>
+            <p:style>
+              <a:lnRef idx="2">
+                <a:schemeClr val="accent1">
+                  <a:shade val="15000"/>
+                </a:schemeClr>
+              </a:lnRef>
+              <a:fillRef idx="1">
+                <a:schemeClr val="accent1"/>
+              </a:fillRef>
+              <a:effectRef idx="0">
+                <a:schemeClr val="accent1"/>
+              </a:effectRef>
+              <a:fontRef idx="minor">
+                <a:schemeClr val="lt1"/>
+              </a:fontRef>
+            </p:style>
+            <p:txBody>
+              <a:bodyPr rtlCol="0" anchor="ctr"/>
+              <a:lstStyle/>
+              <a:p>
+                <a:pPr algn="ctr"/>
+                <a:endParaRPr lang="en-US" dirty="0"/>
+              </a:p>
+            </p:txBody>
+          </p:sp>
+          <p:sp>
+            <p:nvSpPr>
+              <p:cNvPr id="19" name="TextBox 18">
+                <a:extLst>
+                  <a:ext uri="{FF2B5EF4-FFF2-40B4-BE49-F238E27FC236}">
+                    <a16:creationId xmlns:a16="http://schemas.microsoft.com/office/drawing/2014/main" id="{A377DB3F-B098-A5B1-8F79-09425D747053}"/>
+                  </a:ext>
+                </a:extLst>
+              </p:cNvPr>
+              <p:cNvSpPr txBox="1"/>
+              <p:nvPr/>
+            </p:nvSpPr>
+            <p:spPr>
+              <a:xfrm>
+                <a:off x="8737211" y="1397479"/>
+                <a:ext cx="795411" cy="369332"/>
+              </a:xfrm>
+              <a:prstGeom prst="rect">
+                <a:avLst/>
+              </a:prstGeom>
+              <a:noFill/>
+            </p:spPr>
+            <p:txBody>
+              <a:bodyPr wrap="none" rtlCol="0">
+                <a:spAutoFit/>
+              </a:bodyPr>
+              <a:lstStyle/>
+              <a:p>
+                <a:r>
+                  <a:rPr lang="en-US" dirty="0"/>
+                  <a:t>Wings</a:t>
+                </a:r>
+              </a:p>
+            </p:txBody>
+          </p:sp>
+        </p:grpSp>
+        <p:grpSp>
+          <p:nvGrpSpPr>
+            <p:cNvPr id="21" name="Group 20">
+              <a:extLst>
+                <a:ext uri="{FF2B5EF4-FFF2-40B4-BE49-F238E27FC236}">
+                  <a16:creationId xmlns:a16="http://schemas.microsoft.com/office/drawing/2014/main" id="{53ED03D2-E715-7734-6DDD-B03371178A02}"/>
+                </a:ext>
+              </a:extLst>
+            </p:cNvPr>
+            <p:cNvGrpSpPr/>
+            <p:nvPr/>
+          </p:nvGrpSpPr>
+          <p:grpSpPr>
+            <a:xfrm>
+              <a:off x="4912417" y="5730765"/>
+              <a:ext cx="1819454" cy="1127235"/>
+              <a:chOff x="7614249" y="1397479"/>
+              <a:chExt cx="3010618" cy="1449238"/>
+            </a:xfrm>
+          </p:grpSpPr>
+          <p:sp>
+            <p:nvSpPr>
+              <p:cNvPr id="22" name="Rectangle 21">
+                <a:extLst>
+                  <a:ext uri="{FF2B5EF4-FFF2-40B4-BE49-F238E27FC236}">
+                    <a16:creationId xmlns:a16="http://schemas.microsoft.com/office/drawing/2014/main" id="{C071C6A7-BA0E-AC5E-3749-A200A3A56914}"/>
+                  </a:ext>
+                </a:extLst>
+              </p:cNvPr>
+              <p:cNvSpPr/>
+              <p:nvPr/>
+            </p:nvSpPr>
+            <p:spPr>
+              <a:xfrm>
+                <a:off x="7614249" y="1397479"/>
+                <a:ext cx="3010618" cy="1449238"/>
+              </a:xfrm>
+              <a:prstGeom prst="rect">
+                <a:avLst/>
+              </a:prstGeom>
+              <a:noFill/>
+            </p:spPr>
+            <p:style>
+              <a:lnRef idx="2">
+                <a:schemeClr val="accent1">
+                  <a:shade val="15000"/>
+                </a:schemeClr>
+              </a:lnRef>
+              <a:fillRef idx="1">
+                <a:schemeClr val="accent1"/>
+              </a:fillRef>
+              <a:effectRef idx="0">
+                <a:schemeClr val="accent1"/>
+              </a:effectRef>
+              <a:fontRef idx="minor">
+                <a:schemeClr val="lt1"/>
+              </a:fontRef>
+            </p:style>
+            <p:txBody>
+              <a:bodyPr rtlCol="0" anchor="ctr"/>
+              <a:lstStyle/>
+              <a:p>
+                <a:pPr algn="ctr"/>
+                <a:endParaRPr lang="en-US"/>
+              </a:p>
+            </p:txBody>
+          </p:sp>
+          <p:sp>
+            <p:nvSpPr>
+              <p:cNvPr id="23" name="TextBox 22">
+                <a:extLst>
+                  <a:ext uri="{FF2B5EF4-FFF2-40B4-BE49-F238E27FC236}">
+                    <a16:creationId xmlns:a16="http://schemas.microsoft.com/office/drawing/2014/main" id="{9E8FC88F-7565-6A54-BB42-274DFEF38D30}"/>
+                  </a:ext>
+                </a:extLst>
+              </p:cNvPr>
+              <p:cNvSpPr txBox="1"/>
+              <p:nvPr/>
+            </p:nvSpPr>
+            <p:spPr>
+              <a:xfrm>
+                <a:off x="8283184" y="1433867"/>
+                <a:ext cx="1672748" cy="474834"/>
+              </a:xfrm>
+              <a:prstGeom prst="rect">
+                <a:avLst/>
+              </a:prstGeom>
+              <a:noFill/>
+            </p:spPr>
+            <p:txBody>
+              <a:bodyPr wrap="none" rtlCol="0">
+                <a:spAutoFit/>
+              </a:bodyPr>
+              <a:lstStyle/>
+              <a:p>
+                <a:r>
+                  <a:rPr lang="en-US" dirty="0"/>
+                  <a:t>Thruster</a:t>
+                </a:r>
+              </a:p>
+            </p:txBody>
+          </p:sp>
+        </p:grpSp>
+        <p:grpSp>
+          <p:nvGrpSpPr>
+            <p:cNvPr id="24" name="Group 23">
+              <a:extLst>
+                <a:ext uri="{FF2B5EF4-FFF2-40B4-BE49-F238E27FC236}">
+                  <a16:creationId xmlns:a16="http://schemas.microsoft.com/office/drawing/2014/main" id="{7C6E0B41-08C9-1225-C612-573039AAD3C7}"/>
+                </a:ext>
+              </a:extLst>
+            </p:cNvPr>
+            <p:cNvGrpSpPr/>
+            <p:nvPr/>
+          </p:nvGrpSpPr>
+          <p:grpSpPr>
+            <a:xfrm>
+              <a:off x="7906187" y="3114270"/>
+              <a:ext cx="1819454" cy="1127235"/>
+              <a:chOff x="7573931" y="1257815"/>
+              <a:chExt cx="3010618" cy="1449238"/>
+            </a:xfrm>
+          </p:grpSpPr>
+          <p:sp>
+            <p:nvSpPr>
+              <p:cNvPr id="25" name="Rectangle 24">
+                <a:extLst>
+                  <a:ext uri="{FF2B5EF4-FFF2-40B4-BE49-F238E27FC236}">
+                    <a16:creationId xmlns:a16="http://schemas.microsoft.com/office/drawing/2014/main" id="{CED98CBD-3A85-A0B1-8A62-37FFB4C705B0}"/>
+                  </a:ext>
+                </a:extLst>
+              </p:cNvPr>
+              <p:cNvSpPr/>
+              <p:nvPr/>
+            </p:nvSpPr>
+            <p:spPr>
+              <a:xfrm>
+                <a:off x="7573931" y="1257815"/>
+                <a:ext cx="3010618" cy="1449238"/>
+              </a:xfrm>
+              <a:prstGeom prst="rect">
+                <a:avLst/>
+              </a:prstGeom>
+              <a:noFill/>
+            </p:spPr>
+            <p:style>
+              <a:lnRef idx="2">
+                <a:schemeClr val="accent1">
+                  <a:shade val="15000"/>
+                </a:schemeClr>
+              </a:lnRef>
+              <a:fillRef idx="1">
+                <a:schemeClr val="accent1"/>
+              </a:fillRef>
+              <a:effectRef idx="0">
+                <a:schemeClr val="accent1"/>
+              </a:effectRef>
+              <a:fontRef idx="minor">
+                <a:schemeClr val="lt1"/>
+              </a:fontRef>
+            </p:style>
+            <p:txBody>
+              <a:bodyPr rtlCol="0" anchor="ctr"/>
+              <a:lstStyle/>
+              <a:p>
+                <a:pPr algn="ctr"/>
+                <a:endParaRPr lang="en-US" dirty="0"/>
+              </a:p>
+            </p:txBody>
+          </p:sp>
+          <p:sp>
+            <p:nvSpPr>
+              <p:cNvPr id="26" name="TextBox 25">
+                <a:extLst>
+                  <a:ext uri="{FF2B5EF4-FFF2-40B4-BE49-F238E27FC236}">
+                    <a16:creationId xmlns:a16="http://schemas.microsoft.com/office/drawing/2014/main" id="{C31CD00A-7E5F-78F0-D22D-64D03B62C779}"/>
+                  </a:ext>
+                </a:extLst>
+              </p:cNvPr>
+              <p:cNvSpPr txBox="1"/>
+              <p:nvPr/>
+            </p:nvSpPr>
+            <p:spPr>
+              <a:xfrm>
+                <a:off x="8283184" y="1270476"/>
+                <a:ext cx="1592112" cy="474834"/>
+              </a:xfrm>
+              <a:prstGeom prst="rect">
+                <a:avLst/>
+              </a:prstGeom>
+              <a:noFill/>
+            </p:spPr>
+            <p:txBody>
+              <a:bodyPr wrap="none" rtlCol="0">
+                <a:spAutoFit/>
+              </a:bodyPr>
+              <a:lstStyle/>
+              <a:p>
+                <a:r>
+                  <a:rPr lang="en-US" dirty="0"/>
+                  <a:t>Drone 1</a:t>
+                </a:r>
+              </a:p>
+            </p:txBody>
+          </p:sp>
+        </p:grpSp>
+        <p:grpSp>
+          <p:nvGrpSpPr>
+            <p:cNvPr id="27" name="Group 26">
+              <a:extLst>
+                <a:ext uri="{FF2B5EF4-FFF2-40B4-BE49-F238E27FC236}">
+                  <a16:creationId xmlns:a16="http://schemas.microsoft.com/office/drawing/2014/main" id="{8BCD4AA6-6327-65C6-04FC-26CDC8D43FB4}"/>
+                </a:ext>
+              </a:extLst>
+            </p:cNvPr>
+            <p:cNvGrpSpPr/>
+            <p:nvPr/>
+          </p:nvGrpSpPr>
+          <p:grpSpPr>
+            <a:xfrm>
+              <a:off x="1768775" y="3085967"/>
+              <a:ext cx="1819454" cy="1127235"/>
+              <a:chOff x="7614249" y="1397479"/>
+              <a:chExt cx="3010618" cy="1449238"/>
+            </a:xfrm>
+          </p:grpSpPr>
+          <p:sp>
+            <p:nvSpPr>
+              <p:cNvPr id="28" name="Rectangle 27">
+                <a:extLst>
+                  <a:ext uri="{FF2B5EF4-FFF2-40B4-BE49-F238E27FC236}">
+                    <a16:creationId xmlns:a16="http://schemas.microsoft.com/office/drawing/2014/main" id="{E0055768-A096-0909-6298-E7FA71D5D46F}"/>
+                  </a:ext>
+                </a:extLst>
+              </p:cNvPr>
+              <p:cNvSpPr/>
+              <p:nvPr/>
+            </p:nvSpPr>
+            <p:spPr>
+              <a:xfrm>
+                <a:off x="7614249" y="1397479"/>
+                <a:ext cx="3010618" cy="1449238"/>
+              </a:xfrm>
+              <a:prstGeom prst="rect">
+                <a:avLst/>
+              </a:prstGeom>
+              <a:noFill/>
+            </p:spPr>
+            <p:style>
+              <a:lnRef idx="2">
+                <a:schemeClr val="accent1">
+                  <a:shade val="15000"/>
+                </a:schemeClr>
+              </a:lnRef>
+              <a:fillRef idx="1">
+                <a:schemeClr val="accent1"/>
+              </a:fillRef>
+              <a:effectRef idx="0">
+                <a:schemeClr val="accent1"/>
+              </a:effectRef>
+              <a:fontRef idx="minor">
+                <a:schemeClr val="lt1"/>
+              </a:fontRef>
+            </p:style>
+            <p:txBody>
+              <a:bodyPr rtlCol="0" anchor="ctr"/>
+              <a:lstStyle/>
+              <a:p>
+                <a:pPr algn="ctr"/>
+                <a:endParaRPr lang="en-US"/>
+              </a:p>
+            </p:txBody>
+          </p:sp>
+          <p:sp>
+            <p:nvSpPr>
+              <p:cNvPr id="29" name="TextBox 28">
+                <a:extLst>
+                  <a:ext uri="{FF2B5EF4-FFF2-40B4-BE49-F238E27FC236}">
+                    <a16:creationId xmlns:a16="http://schemas.microsoft.com/office/drawing/2014/main" id="{C17EBA89-85A8-DA44-44C1-1D58262D4BCC}"/>
+                  </a:ext>
+                </a:extLst>
+              </p:cNvPr>
+              <p:cNvSpPr txBox="1"/>
+              <p:nvPr/>
+            </p:nvSpPr>
+            <p:spPr>
+              <a:xfrm>
+                <a:off x="8283184" y="1433867"/>
+                <a:ext cx="1592112" cy="474834"/>
+              </a:xfrm>
+              <a:prstGeom prst="rect">
+                <a:avLst/>
+              </a:prstGeom>
+              <a:noFill/>
+            </p:spPr>
+            <p:txBody>
+              <a:bodyPr wrap="none" rtlCol="0">
+                <a:spAutoFit/>
+              </a:bodyPr>
+              <a:lstStyle/>
+              <a:p>
+                <a:r>
+                  <a:rPr lang="en-US" dirty="0"/>
+                  <a:t>Drone 2</a:t>
+                </a:r>
+              </a:p>
+            </p:txBody>
+          </p:sp>
+        </p:grpSp>
+        <p:grpSp>
+          <p:nvGrpSpPr>
+            <p:cNvPr id="31" name="Group 30">
+              <a:extLst>
+                <a:ext uri="{FF2B5EF4-FFF2-40B4-BE49-F238E27FC236}">
+                  <a16:creationId xmlns:a16="http://schemas.microsoft.com/office/drawing/2014/main" id="{0E4CB660-CE98-6193-A4B6-F8D13D0D5405}"/>
+                </a:ext>
+              </a:extLst>
+            </p:cNvPr>
+            <p:cNvGrpSpPr/>
+            <p:nvPr/>
+          </p:nvGrpSpPr>
+          <p:grpSpPr>
+            <a:xfrm>
+              <a:off x="1768415" y="4494248"/>
+              <a:ext cx="1819454" cy="1134641"/>
+              <a:chOff x="7614249" y="1387958"/>
+              <a:chExt cx="3010618" cy="1458759"/>
+            </a:xfrm>
+          </p:grpSpPr>
+          <p:sp>
+            <p:nvSpPr>
+              <p:cNvPr id="32" name="Rectangle 31">
+                <a:extLst>
+                  <a:ext uri="{FF2B5EF4-FFF2-40B4-BE49-F238E27FC236}">
+                    <a16:creationId xmlns:a16="http://schemas.microsoft.com/office/drawing/2014/main" id="{F6E972A9-CF29-C245-EC1F-6780B31C4701}"/>
+                  </a:ext>
+                </a:extLst>
+              </p:cNvPr>
+              <p:cNvSpPr/>
+              <p:nvPr/>
+            </p:nvSpPr>
+            <p:spPr>
+              <a:xfrm>
+                <a:off x="7614249" y="1397479"/>
+                <a:ext cx="3010618" cy="1449238"/>
+              </a:xfrm>
+              <a:prstGeom prst="rect">
+                <a:avLst/>
+              </a:prstGeom>
+              <a:noFill/>
+            </p:spPr>
+            <p:style>
+              <a:lnRef idx="2">
+                <a:schemeClr val="accent1">
+                  <a:shade val="15000"/>
+                </a:schemeClr>
+              </a:lnRef>
+              <a:fillRef idx="1">
+                <a:schemeClr val="accent1"/>
+              </a:fillRef>
+              <a:effectRef idx="0">
+                <a:schemeClr val="accent1"/>
+              </a:effectRef>
+              <a:fontRef idx="minor">
+                <a:schemeClr val="lt1"/>
+              </a:fontRef>
+            </p:style>
+            <p:txBody>
+              <a:bodyPr rtlCol="0" anchor="ctr"/>
+              <a:lstStyle/>
+              <a:p>
+                <a:pPr algn="ctr"/>
+                <a:endParaRPr lang="en-US"/>
+              </a:p>
+            </p:txBody>
+          </p:sp>
+          <p:sp>
+            <p:nvSpPr>
+              <p:cNvPr id="33" name="TextBox 32">
+                <a:extLst>
+                  <a:ext uri="{FF2B5EF4-FFF2-40B4-BE49-F238E27FC236}">
+                    <a16:creationId xmlns:a16="http://schemas.microsoft.com/office/drawing/2014/main" id="{4F1FADB1-4BBE-DD78-8D2D-C28C8E5967A3}"/>
+                  </a:ext>
+                </a:extLst>
+              </p:cNvPr>
+              <p:cNvSpPr txBox="1"/>
+              <p:nvPr/>
+            </p:nvSpPr>
+            <p:spPr>
+              <a:xfrm>
+                <a:off x="7971151" y="1387958"/>
+                <a:ext cx="2408754" cy="474834"/>
+              </a:xfrm>
+              <a:prstGeom prst="rect">
+                <a:avLst/>
+              </a:prstGeom>
+              <a:noFill/>
+            </p:spPr>
+            <p:txBody>
+              <a:bodyPr wrap="none" rtlCol="0">
+                <a:spAutoFit/>
+              </a:bodyPr>
+              <a:lstStyle/>
+              <a:p>
+                <a:r>
+                  <a:rPr lang="en-US" dirty="0"/>
+                  <a:t>Energy cores</a:t>
+                </a:r>
+              </a:p>
+            </p:txBody>
+          </p:sp>
+        </p:grpSp>
+        <p:grpSp>
+          <p:nvGrpSpPr>
+            <p:cNvPr id="34" name="Group 33">
+              <a:extLst>
+                <a:ext uri="{FF2B5EF4-FFF2-40B4-BE49-F238E27FC236}">
+                  <a16:creationId xmlns:a16="http://schemas.microsoft.com/office/drawing/2014/main" id="{C2780D05-5F87-B0B8-7B75-E8706FFA9B72}"/>
+                </a:ext>
+              </a:extLst>
+            </p:cNvPr>
+            <p:cNvGrpSpPr/>
+            <p:nvPr/>
+          </p:nvGrpSpPr>
+          <p:grpSpPr>
+            <a:xfrm>
+              <a:off x="7906187" y="4501652"/>
+              <a:ext cx="1819454" cy="1127235"/>
+              <a:chOff x="7573931" y="1257815"/>
+              <a:chExt cx="3010618" cy="1449238"/>
+            </a:xfrm>
+          </p:grpSpPr>
+          <p:sp>
+            <p:nvSpPr>
+              <p:cNvPr id="35" name="Rectangle 34">
+                <a:extLst>
+                  <a:ext uri="{FF2B5EF4-FFF2-40B4-BE49-F238E27FC236}">
+                    <a16:creationId xmlns:a16="http://schemas.microsoft.com/office/drawing/2014/main" id="{BEEC565E-D254-DCD3-C3D2-F52EE2FFCA37}"/>
+                  </a:ext>
+                </a:extLst>
+              </p:cNvPr>
+              <p:cNvSpPr/>
+              <p:nvPr/>
+            </p:nvSpPr>
+            <p:spPr>
+              <a:xfrm>
+                <a:off x="7573931" y="1257815"/>
+                <a:ext cx="3010618" cy="1449238"/>
+              </a:xfrm>
+              <a:prstGeom prst="rect">
+                <a:avLst/>
+              </a:prstGeom>
+              <a:noFill/>
+            </p:spPr>
+            <p:style>
+              <a:lnRef idx="2">
+                <a:schemeClr val="accent1">
+                  <a:shade val="15000"/>
+                </a:schemeClr>
+              </a:lnRef>
+              <a:fillRef idx="1">
+                <a:schemeClr val="accent1"/>
+              </a:fillRef>
+              <a:effectRef idx="0">
+                <a:schemeClr val="accent1"/>
+              </a:effectRef>
+              <a:fontRef idx="minor">
+                <a:schemeClr val="lt1"/>
+              </a:fontRef>
+            </p:style>
+            <p:txBody>
+              <a:bodyPr rtlCol="0" anchor="ctr"/>
+              <a:lstStyle/>
+              <a:p>
+                <a:pPr algn="ctr"/>
+                <a:endParaRPr lang="en-US" dirty="0"/>
+              </a:p>
+            </p:txBody>
+          </p:sp>
+          <p:sp>
+            <p:nvSpPr>
+              <p:cNvPr id="36" name="TextBox 35">
+                <a:extLst>
+                  <a:ext uri="{FF2B5EF4-FFF2-40B4-BE49-F238E27FC236}">
+                    <a16:creationId xmlns:a16="http://schemas.microsoft.com/office/drawing/2014/main" id="{7325E4D3-9C68-575C-AC1C-8E6FDB9F6936}"/>
+                  </a:ext>
+                </a:extLst>
+              </p:cNvPr>
+              <p:cNvSpPr txBox="1"/>
+              <p:nvPr/>
+            </p:nvSpPr>
+            <p:spPr>
+              <a:xfrm>
+                <a:off x="8523129" y="1267337"/>
+                <a:ext cx="1510417" cy="474834"/>
+              </a:xfrm>
+              <a:prstGeom prst="rect">
+                <a:avLst/>
+              </a:prstGeom>
+              <a:noFill/>
+            </p:spPr>
+            <p:txBody>
+              <a:bodyPr wrap="none" rtlCol="0">
+                <a:spAutoFit/>
+              </a:bodyPr>
+              <a:lstStyle/>
+              <a:p>
+                <a:r>
+                  <a:rPr lang="en-US" dirty="0"/>
+                  <a:t>Artifact</a:t>
+                </a:r>
+              </a:p>
+            </p:txBody>
+          </p:sp>
+        </p:grpSp>
+        <p:cxnSp>
+          <p:nvCxnSpPr>
+            <p:cNvPr id="38" name="Straight Connector 37">
+              <a:extLst>
+                <a:ext uri="{FF2B5EF4-FFF2-40B4-BE49-F238E27FC236}">
+                  <a16:creationId xmlns:a16="http://schemas.microsoft.com/office/drawing/2014/main" id="{42C26F8B-9F43-1BA4-E6D4-555D8C4ADA0B}"/>
+                </a:ext>
+              </a:extLst>
+            </p:cNvPr>
+            <p:cNvCxnSpPr>
+              <a:cxnSpLocks/>
+              <a:stCxn id="33" idx="0"/>
+            </p:cNvCxnSpPr>
+            <p:nvPr/>
+          </p:nvCxnSpPr>
           <p:spPr>
             <a:xfrm>
-              <a:off x="7583857" y="1371598"/>
-              <a:ext cx="3010618" cy="1449238"/>
+              <a:off x="2711967" y="4494248"/>
+              <a:ext cx="0" cy="1134641"/>
             </a:xfrm>
-            <a:prstGeom prst="rect">
+            <a:prstGeom prst="line">
               <a:avLst/>
             </a:prstGeom>
-            <a:noFill/>
           </p:spPr>
           <p:style>
             <a:lnRef idx="2">
-              <a:schemeClr val="accent1">
-                <a:shade val="15000"/>
-              </a:schemeClr>
+              <a:schemeClr val="accent1"/>
             </a:lnRef>
-            <a:fillRef idx="1">
+            <a:fillRef idx="0">
               <a:schemeClr val="accent1"/>
             </a:fillRef>
-            <a:effectRef idx="0">
+            <a:effectRef idx="1">
               <a:schemeClr val="accent1"/>
             </a:effectRef>
             <a:fontRef idx="minor">
-              <a:schemeClr val="lt1"/>
+              <a:schemeClr val="tx1"/>
             </a:fontRef>
           </p:style>
-          <p:txBody>
-            <a:bodyPr rtlCol="0" anchor="ctr"/>
-            <a:lstStyle/>
-            <a:p>
-              <a:pPr algn="ctr"/>
-              <a:endParaRPr lang="en-US"/>
-            </a:p>
-          </p:txBody>
-        </p:sp>
-        <p:sp>
-          <p:nvSpPr>
-            <p:cNvPr id="12" name="TextBox 11">
+        </p:cxnSp>
+        <p:cxnSp>
+          <p:nvCxnSpPr>
+            <p:cNvPr id="41" name="Straight Connector 40">
               <a:extLst>
                 <a:ext uri="{FF2B5EF4-FFF2-40B4-BE49-F238E27FC236}">
-                  <a16:creationId xmlns:a16="http://schemas.microsoft.com/office/drawing/2014/main" id="{AF4FE8B7-84B8-F65E-9677-2775CB9BA07A}"/>
+                  <a16:creationId xmlns:a16="http://schemas.microsoft.com/office/drawing/2014/main" id="{7300123D-3AA2-20B2-9DC5-EBAEE78FEA56}"/>
                 </a:ext>
               </a:extLst>
             </p:cNvPr>
-            <p:cNvSpPr txBox="1"/>
+            <p:cNvCxnSpPr>
+              <a:cxnSpLocks/>
+              <a:stCxn id="32" idx="1"/>
+              <a:endCxn id="32" idx="3"/>
+            </p:cNvCxnSpPr>
             <p:nvPr/>
-          </p:nvSpPr>
+          </p:nvCxnSpPr>
           <p:spPr>
             <a:xfrm>
-              <a:off x="7614249" y="1566495"/>
-              <a:ext cx="2949836" cy="369332"/>
+              <a:off x="1768415" y="5065272"/>
+              <a:ext cx="1819454" cy="0"/>
             </a:xfrm>
-            <a:prstGeom prst="rect">
+            <a:prstGeom prst="line">
               <a:avLst/>
             </a:prstGeom>
-            <a:noFill/>
-          </p:spPr>
-          <p:txBody>
-            <a:bodyPr wrap="none" rtlCol="0">
-              <a:spAutoFit/>
-            </a:bodyPr>
-            <a:lstStyle/>
-            <a:p>
-              <a:r>
-                <a:rPr lang="en-US" dirty="0"/>
-                <a:t>Command bridge</a:t>
-              </a:r>
-            </a:p>
-          </p:txBody>
-        </p:sp>
-      </p:grpSp>
-      <p:grpSp>
-        <p:nvGrpSpPr>
-          <p:cNvPr id="13" name="Group 12">
-            <a:extLst>
-              <a:ext uri="{FF2B5EF4-FFF2-40B4-BE49-F238E27FC236}">
-                <a16:creationId xmlns:a16="http://schemas.microsoft.com/office/drawing/2014/main" id="{C3D4FF44-F924-9C1A-2CC4-40B6A0638398}"/>
-              </a:ext>
-            </a:extLst>
-          </p:cNvPr>
-          <p:cNvGrpSpPr/>
-          <p:nvPr/>
-        </p:nvGrpSpPr>
-        <p:grpSpPr>
-          <a:xfrm>
-            <a:off x="4945093" y="1792816"/>
-            <a:ext cx="1657709" cy="2398144"/>
-            <a:chOff x="8226725" y="1397479"/>
-            <a:chExt cx="1657709" cy="1449238"/>
-          </a:xfrm>
-        </p:grpSpPr>
-        <p:sp>
-          <p:nvSpPr>
-            <p:cNvPr id="14" name="Rectangle 13">
-              <a:extLst>
-                <a:ext uri="{FF2B5EF4-FFF2-40B4-BE49-F238E27FC236}">
-                  <a16:creationId xmlns:a16="http://schemas.microsoft.com/office/drawing/2014/main" id="{80084728-EA7E-6187-BC31-C33BC6024726}"/>
-                </a:ext>
-              </a:extLst>
-            </p:cNvPr>
-            <p:cNvSpPr/>
-            <p:nvPr/>
-          </p:nvSpPr>
-          <p:spPr>
-            <a:xfrm>
-              <a:off x="8226725" y="1397479"/>
-              <a:ext cx="1657709" cy="1449238"/>
-            </a:xfrm>
-            <a:prstGeom prst="rect">
-              <a:avLst/>
-            </a:prstGeom>
-            <a:noFill/>
           </p:spPr>
           <p:style>
             <a:lnRef idx="2">
-              <a:schemeClr val="accent1">
-                <a:shade val="15000"/>
-              </a:schemeClr>
+              <a:schemeClr val="accent1"/>
             </a:lnRef>
-            <a:fillRef idx="1">
+            <a:fillRef idx="0">
               <a:schemeClr val="accent1"/>
             </a:fillRef>
-            <a:effectRef idx="0">
+            <a:effectRef idx="1">
               <a:schemeClr val="accent1"/>
             </a:effectRef>
             <a:fontRef idx="minor">
-              <a:schemeClr val="lt1"/>
+              <a:schemeClr val="tx1"/>
             </a:fontRef>
           </p:style>
-          <p:txBody>
-            <a:bodyPr rtlCol="0" anchor="ctr"/>
-            <a:lstStyle/>
-            <a:p>
-              <a:pPr algn="ctr"/>
-              <a:endParaRPr lang="en-US"/>
-            </a:p>
-          </p:txBody>
-        </p:sp>
-        <p:sp>
-          <p:nvSpPr>
-            <p:cNvPr id="15" name="TextBox 14">
-              <a:extLst>
-                <a:ext uri="{FF2B5EF4-FFF2-40B4-BE49-F238E27FC236}">
-                  <a16:creationId xmlns:a16="http://schemas.microsoft.com/office/drawing/2014/main" id="{8634C2B0-310F-A093-A2D8-6E127997417C}"/>
-                </a:ext>
-              </a:extLst>
-            </p:cNvPr>
-            <p:cNvSpPr txBox="1"/>
-            <p:nvPr/>
-          </p:nvSpPr>
-          <p:spPr>
-            <a:xfrm>
-              <a:off x="8758061" y="1480231"/>
-              <a:ext cx="595035" cy="369332"/>
-            </a:xfrm>
-            <a:prstGeom prst="rect">
-              <a:avLst/>
-            </a:prstGeom>
-            <a:noFill/>
-          </p:spPr>
-          <p:txBody>
-            <a:bodyPr wrap="none" rtlCol="0">
-              <a:spAutoFit/>
-            </a:bodyPr>
-            <a:lstStyle/>
-            <a:p>
-              <a:r>
-                <a:rPr lang="en-US" dirty="0"/>
-                <a:t>Hull</a:t>
-              </a:r>
-            </a:p>
-          </p:txBody>
-        </p:sp>
+        </p:cxnSp>
       </p:grpSp>
-      <p:grpSp>
-        <p:nvGrpSpPr>
-          <p:cNvPr id="17" name="Group 16">
-            <a:extLst>
-              <a:ext uri="{FF2B5EF4-FFF2-40B4-BE49-F238E27FC236}">
-                <a16:creationId xmlns:a16="http://schemas.microsoft.com/office/drawing/2014/main" id="{BC535F67-637D-540C-1BD7-30CD66EB98D7}"/>
-              </a:ext>
-            </a:extLst>
-          </p:cNvPr>
-          <p:cNvGrpSpPr/>
-          <p:nvPr/>
-        </p:nvGrpSpPr>
-        <p:grpSpPr>
-          <a:xfrm>
-            <a:off x="4268636" y="4244019"/>
-            <a:ext cx="3010618" cy="1449238"/>
-            <a:chOff x="7529419" y="1291361"/>
-            <a:chExt cx="3010618" cy="1449238"/>
-          </a:xfrm>
-        </p:grpSpPr>
-        <p:sp>
-          <p:nvSpPr>
-            <p:cNvPr id="18" name="Rectangle 17">
-              <a:extLst>
-                <a:ext uri="{FF2B5EF4-FFF2-40B4-BE49-F238E27FC236}">
-                  <a16:creationId xmlns:a16="http://schemas.microsoft.com/office/drawing/2014/main" id="{C14F1CB8-8261-6DCE-5A2C-0EC607B2B4A3}"/>
-                </a:ext>
-              </a:extLst>
-            </p:cNvPr>
-            <p:cNvSpPr/>
-            <p:nvPr/>
-          </p:nvSpPr>
-          <p:spPr>
-            <a:xfrm>
-              <a:off x="7529419" y="1291361"/>
-              <a:ext cx="3010618" cy="1449238"/>
-            </a:xfrm>
-            <a:prstGeom prst="rect">
-              <a:avLst/>
-            </a:prstGeom>
-            <a:noFill/>
-          </p:spPr>
-          <p:style>
-            <a:lnRef idx="2">
-              <a:schemeClr val="accent1">
-                <a:shade val="15000"/>
-              </a:schemeClr>
-            </a:lnRef>
-            <a:fillRef idx="1">
-              <a:schemeClr val="accent1"/>
-            </a:fillRef>
-            <a:effectRef idx="0">
-              <a:schemeClr val="accent1"/>
-            </a:effectRef>
-            <a:fontRef idx="minor">
-              <a:schemeClr val="lt1"/>
-            </a:fontRef>
-          </p:style>
-          <p:txBody>
-            <a:bodyPr rtlCol="0" anchor="ctr"/>
-            <a:lstStyle/>
-            <a:p>
-              <a:pPr algn="ctr"/>
-              <a:endParaRPr lang="en-US" dirty="0"/>
-            </a:p>
-          </p:txBody>
-        </p:sp>
-        <p:sp>
-          <p:nvSpPr>
-            <p:cNvPr id="19" name="TextBox 18">
-              <a:extLst>
-                <a:ext uri="{FF2B5EF4-FFF2-40B4-BE49-F238E27FC236}">
-                  <a16:creationId xmlns:a16="http://schemas.microsoft.com/office/drawing/2014/main" id="{A377DB3F-B098-A5B1-8F79-09425D747053}"/>
-                </a:ext>
-              </a:extLst>
-            </p:cNvPr>
-            <p:cNvSpPr txBox="1"/>
-            <p:nvPr/>
-          </p:nvSpPr>
-          <p:spPr>
-            <a:xfrm>
-              <a:off x="8737211" y="1397479"/>
-              <a:ext cx="795411" cy="369332"/>
-            </a:xfrm>
-            <a:prstGeom prst="rect">
-              <a:avLst/>
-            </a:prstGeom>
-            <a:noFill/>
-          </p:spPr>
-          <p:txBody>
-            <a:bodyPr wrap="none" rtlCol="0">
-              <a:spAutoFit/>
-            </a:bodyPr>
-            <a:lstStyle/>
-            <a:p>
-              <a:r>
-                <a:rPr lang="en-US" dirty="0"/>
-                <a:t>Wings</a:t>
-              </a:r>
-            </a:p>
-          </p:txBody>
-        </p:sp>
-      </p:grpSp>
-      <p:grpSp>
-        <p:nvGrpSpPr>
-          <p:cNvPr id="21" name="Group 20">
-            <a:extLst>
-              <a:ext uri="{FF2B5EF4-FFF2-40B4-BE49-F238E27FC236}">
-                <a16:creationId xmlns:a16="http://schemas.microsoft.com/office/drawing/2014/main" id="{53ED03D2-E715-7734-6DDD-B03371178A02}"/>
-              </a:ext>
-            </a:extLst>
-          </p:cNvPr>
-          <p:cNvGrpSpPr/>
-          <p:nvPr/>
-        </p:nvGrpSpPr>
-        <p:grpSpPr>
-          <a:xfrm>
-            <a:off x="4912417" y="5730765"/>
-            <a:ext cx="1819454" cy="1127235"/>
-            <a:chOff x="7614249" y="1397479"/>
-            <a:chExt cx="3010618" cy="1449238"/>
-          </a:xfrm>
-        </p:grpSpPr>
-        <p:sp>
-          <p:nvSpPr>
-            <p:cNvPr id="22" name="Rectangle 21">
-              <a:extLst>
-                <a:ext uri="{FF2B5EF4-FFF2-40B4-BE49-F238E27FC236}">
-                  <a16:creationId xmlns:a16="http://schemas.microsoft.com/office/drawing/2014/main" id="{C071C6A7-BA0E-AC5E-3749-A200A3A56914}"/>
-                </a:ext>
-              </a:extLst>
-            </p:cNvPr>
-            <p:cNvSpPr/>
-            <p:nvPr/>
-          </p:nvSpPr>
-          <p:spPr>
-            <a:xfrm>
-              <a:off x="7614249" y="1397479"/>
-              <a:ext cx="3010618" cy="1449238"/>
-            </a:xfrm>
-            <a:prstGeom prst="rect">
-              <a:avLst/>
-            </a:prstGeom>
-            <a:noFill/>
-          </p:spPr>
-          <p:style>
-            <a:lnRef idx="2">
-              <a:schemeClr val="accent1">
-                <a:shade val="15000"/>
-              </a:schemeClr>
-            </a:lnRef>
-            <a:fillRef idx="1">
-              <a:schemeClr val="accent1"/>
-            </a:fillRef>
-            <a:effectRef idx="0">
-              <a:schemeClr val="accent1"/>
-            </a:effectRef>
-            <a:fontRef idx="minor">
-              <a:schemeClr val="lt1"/>
-            </a:fontRef>
-          </p:style>
-          <p:txBody>
-            <a:bodyPr rtlCol="0" anchor="ctr"/>
-            <a:lstStyle/>
-            <a:p>
-              <a:pPr algn="ctr"/>
-              <a:endParaRPr lang="en-US"/>
-            </a:p>
-          </p:txBody>
-        </p:sp>
-        <p:sp>
-          <p:nvSpPr>
-            <p:cNvPr id="23" name="TextBox 22">
-              <a:extLst>
-                <a:ext uri="{FF2B5EF4-FFF2-40B4-BE49-F238E27FC236}">
-                  <a16:creationId xmlns:a16="http://schemas.microsoft.com/office/drawing/2014/main" id="{9E8FC88F-7565-6A54-BB42-274DFEF38D30}"/>
-                </a:ext>
-              </a:extLst>
-            </p:cNvPr>
-            <p:cNvSpPr txBox="1"/>
-            <p:nvPr/>
-          </p:nvSpPr>
-          <p:spPr>
-            <a:xfrm>
-              <a:off x="8283184" y="1433867"/>
-              <a:ext cx="1672748" cy="474834"/>
-            </a:xfrm>
-            <a:prstGeom prst="rect">
-              <a:avLst/>
-            </a:prstGeom>
-            <a:noFill/>
-          </p:spPr>
-          <p:txBody>
-            <a:bodyPr wrap="none" rtlCol="0">
-              <a:spAutoFit/>
-            </a:bodyPr>
-            <a:lstStyle/>
-            <a:p>
-              <a:r>
-                <a:rPr lang="en-US" dirty="0"/>
-                <a:t>Thruster</a:t>
-              </a:r>
-            </a:p>
-          </p:txBody>
-        </p:sp>
-      </p:grpSp>
-      <p:grpSp>
-        <p:nvGrpSpPr>
-          <p:cNvPr id="24" name="Group 23">
-            <a:extLst>
-              <a:ext uri="{FF2B5EF4-FFF2-40B4-BE49-F238E27FC236}">
-                <a16:creationId xmlns:a16="http://schemas.microsoft.com/office/drawing/2014/main" id="{7C6E0B41-08C9-1225-C612-573039AAD3C7}"/>
-              </a:ext>
-            </a:extLst>
-          </p:cNvPr>
-          <p:cNvGrpSpPr/>
-          <p:nvPr/>
-        </p:nvGrpSpPr>
-        <p:grpSpPr>
-          <a:xfrm>
-            <a:off x="7906187" y="3114270"/>
-            <a:ext cx="1819454" cy="1127235"/>
-            <a:chOff x="7573931" y="1257815"/>
-            <a:chExt cx="3010618" cy="1449238"/>
-          </a:xfrm>
-        </p:grpSpPr>
-        <p:sp>
-          <p:nvSpPr>
-            <p:cNvPr id="25" name="Rectangle 24">
-              <a:extLst>
-                <a:ext uri="{FF2B5EF4-FFF2-40B4-BE49-F238E27FC236}">
-                  <a16:creationId xmlns:a16="http://schemas.microsoft.com/office/drawing/2014/main" id="{CED98CBD-3A85-A0B1-8A62-37FFB4C705B0}"/>
-                </a:ext>
-              </a:extLst>
-            </p:cNvPr>
-            <p:cNvSpPr/>
-            <p:nvPr/>
-          </p:nvSpPr>
-          <p:spPr>
-            <a:xfrm>
-              <a:off x="7573931" y="1257815"/>
-              <a:ext cx="3010618" cy="1449238"/>
-            </a:xfrm>
-            <a:prstGeom prst="rect">
-              <a:avLst/>
-            </a:prstGeom>
-            <a:noFill/>
-          </p:spPr>
-          <p:style>
-            <a:lnRef idx="2">
-              <a:schemeClr val="accent1">
-                <a:shade val="15000"/>
-              </a:schemeClr>
-            </a:lnRef>
-            <a:fillRef idx="1">
-              <a:schemeClr val="accent1"/>
-            </a:fillRef>
-            <a:effectRef idx="0">
-              <a:schemeClr val="accent1"/>
-            </a:effectRef>
-            <a:fontRef idx="minor">
-              <a:schemeClr val="lt1"/>
-            </a:fontRef>
-          </p:style>
-          <p:txBody>
-            <a:bodyPr rtlCol="0" anchor="ctr"/>
-            <a:lstStyle/>
-            <a:p>
-              <a:pPr algn="ctr"/>
-              <a:endParaRPr lang="en-US" dirty="0"/>
-            </a:p>
-          </p:txBody>
-        </p:sp>
-        <p:sp>
-          <p:nvSpPr>
-            <p:cNvPr id="26" name="TextBox 25">
-              <a:extLst>
-                <a:ext uri="{FF2B5EF4-FFF2-40B4-BE49-F238E27FC236}">
-                  <a16:creationId xmlns:a16="http://schemas.microsoft.com/office/drawing/2014/main" id="{C31CD00A-7E5F-78F0-D22D-64D03B62C779}"/>
-                </a:ext>
-              </a:extLst>
-            </p:cNvPr>
-            <p:cNvSpPr txBox="1"/>
-            <p:nvPr/>
-          </p:nvSpPr>
-          <p:spPr>
-            <a:xfrm>
-              <a:off x="8283184" y="1270476"/>
-              <a:ext cx="1592112" cy="474834"/>
-            </a:xfrm>
-            <a:prstGeom prst="rect">
-              <a:avLst/>
-            </a:prstGeom>
-            <a:noFill/>
-          </p:spPr>
-          <p:txBody>
-            <a:bodyPr wrap="none" rtlCol="0">
-              <a:spAutoFit/>
-            </a:bodyPr>
-            <a:lstStyle/>
-            <a:p>
-              <a:r>
-                <a:rPr lang="en-US" dirty="0"/>
-                <a:t>Drone 1</a:t>
-              </a:r>
-            </a:p>
-          </p:txBody>
-        </p:sp>
-      </p:grpSp>
-      <p:grpSp>
-        <p:nvGrpSpPr>
-          <p:cNvPr id="27" name="Group 26">
-            <a:extLst>
-              <a:ext uri="{FF2B5EF4-FFF2-40B4-BE49-F238E27FC236}">
-                <a16:creationId xmlns:a16="http://schemas.microsoft.com/office/drawing/2014/main" id="{8BCD4AA6-6327-65C6-04FC-26CDC8D43FB4}"/>
-              </a:ext>
-            </a:extLst>
-          </p:cNvPr>
-          <p:cNvGrpSpPr/>
-          <p:nvPr/>
-        </p:nvGrpSpPr>
-        <p:grpSpPr>
-          <a:xfrm>
-            <a:off x="1768775" y="3085967"/>
-            <a:ext cx="1819454" cy="1127235"/>
-            <a:chOff x="7614249" y="1397479"/>
-            <a:chExt cx="3010618" cy="1449238"/>
-          </a:xfrm>
-        </p:grpSpPr>
-        <p:sp>
-          <p:nvSpPr>
-            <p:cNvPr id="28" name="Rectangle 27">
-              <a:extLst>
-                <a:ext uri="{FF2B5EF4-FFF2-40B4-BE49-F238E27FC236}">
-                  <a16:creationId xmlns:a16="http://schemas.microsoft.com/office/drawing/2014/main" id="{E0055768-A096-0909-6298-E7FA71D5D46F}"/>
-                </a:ext>
-              </a:extLst>
-            </p:cNvPr>
-            <p:cNvSpPr/>
-            <p:nvPr/>
-          </p:nvSpPr>
-          <p:spPr>
-            <a:xfrm>
-              <a:off x="7614249" y="1397479"/>
-              <a:ext cx="3010618" cy="1449238"/>
-            </a:xfrm>
-            <a:prstGeom prst="rect">
-              <a:avLst/>
-            </a:prstGeom>
-            <a:noFill/>
-          </p:spPr>
-          <p:style>
-            <a:lnRef idx="2">
-              <a:schemeClr val="accent1">
-                <a:shade val="15000"/>
-              </a:schemeClr>
-            </a:lnRef>
-            <a:fillRef idx="1">
-              <a:schemeClr val="accent1"/>
-            </a:fillRef>
-            <a:effectRef idx="0">
-              <a:schemeClr val="accent1"/>
-            </a:effectRef>
-            <a:fontRef idx="minor">
-              <a:schemeClr val="lt1"/>
-            </a:fontRef>
-          </p:style>
-          <p:txBody>
-            <a:bodyPr rtlCol="0" anchor="ctr"/>
-            <a:lstStyle/>
-            <a:p>
-              <a:pPr algn="ctr"/>
-              <a:endParaRPr lang="en-US"/>
-            </a:p>
-          </p:txBody>
-        </p:sp>
-        <p:sp>
-          <p:nvSpPr>
-            <p:cNvPr id="29" name="TextBox 28">
-              <a:extLst>
-                <a:ext uri="{FF2B5EF4-FFF2-40B4-BE49-F238E27FC236}">
-                  <a16:creationId xmlns:a16="http://schemas.microsoft.com/office/drawing/2014/main" id="{C17EBA89-85A8-DA44-44C1-1D58262D4BCC}"/>
-                </a:ext>
-              </a:extLst>
-            </p:cNvPr>
-            <p:cNvSpPr txBox="1"/>
-            <p:nvPr/>
-          </p:nvSpPr>
-          <p:spPr>
-            <a:xfrm>
-              <a:off x="8283184" y="1433867"/>
-              <a:ext cx="1592112" cy="474834"/>
-            </a:xfrm>
-            <a:prstGeom prst="rect">
-              <a:avLst/>
-            </a:prstGeom>
-            <a:noFill/>
-          </p:spPr>
-          <p:txBody>
-            <a:bodyPr wrap="none" rtlCol="0">
-              <a:spAutoFit/>
-            </a:bodyPr>
-            <a:lstStyle/>
-            <a:p>
-              <a:r>
-                <a:rPr lang="en-US" dirty="0"/>
-                <a:t>Drone 2</a:t>
-              </a:r>
-            </a:p>
-          </p:txBody>
-        </p:sp>
-      </p:grpSp>
-      <p:grpSp>
-        <p:nvGrpSpPr>
-          <p:cNvPr id="31" name="Group 30">
-            <a:extLst>
-              <a:ext uri="{FF2B5EF4-FFF2-40B4-BE49-F238E27FC236}">
-                <a16:creationId xmlns:a16="http://schemas.microsoft.com/office/drawing/2014/main" id="{0E4CB660-CE98-6193-A4B6-F8D13D0D5405}"/>
-              </a:ext>
-            </a:extLst>
-          </p:cNvPr>
-          <p:cNvGrpSpPr/>
-          <p:nvPr/>
-        </p:nvGrpSpPr>
-        <p:grpSpPr>
-          <a:xfrm>
-            <a:off x="1768415" y="4494248"/>
-            <a:ext cx="1819454" cy="1134641"/>
-            <a:chOff x="7614249" y="1387958"/>
-            <a:chExt cx="3010618" cy="1458759"/>
-          </a:xfrm>
-        </p:grpSpPr>
-        <p:sp>
-          <p:nvSpPr>
-            <p:cNvPr id="32" name="Rectangle 31">
-              <a:extLst>
-                <a:ext uri="{FF2B5EF4-FFF2-40B4-BE49-F238E27FC236}">
-                  <a16:creationId xmlns:a16="http://schemas.microsoft.com/office/drawing/2014/main" id="{F6E972A9-CF29-C245-EC1F-6780B31C4701}"/>
-                </a:ext>
-              </a:extLst>
-            </p:cNvPr>
-            <p:cNvSpPr/>
-            <p:nvPr/>
-          </p:nvSpPr>
-          <p:spPr>
-            <a:xfrm>
-              <a:off x="7614249" y="1397479"/>
-              <a:ext cx="3010618" cy="1449238"/>
-            </a:xfrm>
-            <a:prstGeom prst="rect">
-              <a:avLst/>
-            </a:prstGeom>
-            <a:noFill/>
-          </p:spPr>
-          <p:style>
-            <a:lnRef idx="2">
-              <a:schemeClr val="accent1">
-                <a:shade val="15000"/>
-              </a:schemeClr>
-            </a:lnRef>
-            <a:fillRef idx="1">
-              <a:schemeClr val="accent1"/>
-            </a:fillRef>
-            <a:effectRef idx="0">
-              <a:schemeClr val="accent1"/>
-            </a:effectRef>
-            <a:fontRef idx="minor">
-              <a:schemeClr val="lt1"/>
-            </a:fontRef>
-          </p:style>
-          <p:txBody>
-            <a:bodyPr rtlCol="0" anchor="ctr"/>
-            <a:lstStyle/>
-            <a:p>
-              <a:pPr algn="ctr"/>
-              <a:endParaRPr lang="en-US"/>
-            </a:p>
-          </p:txBody>
-        </p:sp>
-        <p:sp>
-          <p:nvSpPr>
-            <p:cNvPr id="33" name="TextBox 32">
-              <a:extLst>
-                <a:ext uri="{FF2B5EF4-FFF2-40B4-BE49-F238E27FC236}">
-                  <a16:creationId xmlns:a16="http://schemas.microsoft.com/office/drawing/2014/main" id="{4F1FADB1-4BBE-DD78-8D2D-C28C8E5967A3}"/>
-                </a:ext>
-              </a:extLst>
-            </p:cNvPr>
-            <p:cNvSpPr txBox="1"/>
-            <p:nvPr/>
-          </p:nvSpPr>
-          <p:spPr>
-            <a:xfrm>
-              <a:off x="7971151" y="1387958"/>
-              <a:ext cx="2408754" cy="474834"/>
-            </a:xfrm>
-            <a:prstGeom prst="rect">
-              <a:avLst/>
-            </a:prstGeom>
-            <a:noFill/>
-          </p:spPr>
-          <p:txBody>
-            <a:bodyPr wrap="none" rtlCol="0">
-              <a:spAutoFit/>
-            </a:bodyPr>
-            <a:lstStyle/>
-            <a:p>
-              <a:r>
-                <a:rPr lang="en-US" dirty="0"/>
-                <a:t>Energy cores</a:t>
-              </a:r>
-            </a:p>
-          </p:txBody>
-        </p:sp>
-      </p:grpSp>
-      <p:grpSp>
-        <p:nvGrpSpPr>
-          <p:cNvPr id="34" name="Group 33">
-            <a:extLst>
-              <a:ext uri="{FF2B5EF4-FFF2-40B4-BE49-F238E27FC236}">
-                <a16:creationId xmlns:a16="http://schemas.microsoft.com/office/drawing/2014/main" id="{C2780D05-5F87-B0B8-7B75-E8706FFA9B72}"/>
-              </a:ext>
-            </a:extLst>
-          </p:cNvPr>
-          <p:cNvGrpSpPr/>
-          <p:nvPr/>
-        </p:nvGrpSpPr>
-        <p:grpSpPr>
-          <a:xfrm>
-            <a:off x="7906187" y="4501652"/>
-            <a:ext cx="1819454" cy="1127235"/>
-            <a:chOff x="7573931" y="1257815"/>
-            <a:chExt cx="3010618" cy="1449238"/>
-          </a:xfrm>
-        </p:grpSpPr>
-        <p:sp>
-          <p:nvSpPr>
-            <p:cNvPr id="35" name="Rectangle 34">
-              <a:extLst>
-                <a:ext uri="{FF2B5EF4-FFF2-40B4-BE49-F238E27FC236}">
-                  <a16:creationId xmlns:a16="http://schemas.microsoft.com/office/drawing/2014/main" id="{BEEC565E-D254-DCD3-C3D2-F52EE2FFCA37}"/>
-                </a:ext>
-              </a:extLst>
-            </p:cNvPr>
-            <p:cNvSpPr/>
-            <p:nvPr/>
-          </p:nvSpPr>
-          <p:spPr>
-            <a:xfrm>
-              <a:off x="7573931" y="1257815"/>
-              <a:ext cx="3010618" cy="1449238"/>
-            </a:xfrm>
-            <a:prstGeom prst="rect">
-              <a:avLst/>
-            </a:prstGeom>
-            <a:noFill/>
-          </p:spPr>
-          <p:style>
-            <a:lnRef idx="2">
-              <a:schemeClr val="accent1">
-                <a:shade val="15000"/>
-              </a:schemeClr>
-            </a:lnRef>
-            <a:fillRef idx="1">
-              <a:schemeClr val="accent1"/>
-            </a:fillRef>
-            <a:effectRef idx="0">
-              <a:schemeClr val="accent1"/>
-            </a:effectRef>
-            <a:fontRef idx="minor">
-              <a:schemeClr val="lt1"/>
-            </a:fontRef>
-          </p:style>
-          <p:txBody>
-            <a:bodyPr rtlCol="0" anchor="ctr"/>
-            <a:lstStyle/>
-            <a:p>
-              <a:pPr algn="ctr"/>
-              <a:endParaRPr lang="en-US" dirty="0"/>
-            </a:p>
-          </p:txBody>
-        </p:sp>
-        <p:sp>
-          <p:nvSpPr>
-            <p:cNvPr id="36" name="TextBox 35">
-              <a:extLst>
-                <a:ext uri="{FF2B5EF4-FFF2-40B4-BE49-F238E27FC236}">
-                  <a16:creationId xmlns:a16="http://schemas.microsoft.com/office/drawing/2014/main" id="{7325E4D3-9C68-575C-AC1C-8E6FDB9F6936}"/>
-                </a:ext>
-              </a:extLst>
-            </p:cNvPr>
-            <p:cNvSpPr txBox="1"/>
-            <p:nvPr/>
-          </p:nvSpPr>
-          <p:spPr>
-            <a:xfrm>
-              <a:off x="8523129" y="1267337"/>
-              <a:ext cx="1510417" cy="474834"/>
-            </a:xfrm>
-            <a:prstGeom prst="rect">
-              <a:avLst/>
-            </a:prstGeom>
-            <a:noFill/>
-          </p:spPr>
-          <p:txBody>
-            <a:bodyPr wrap="none" rtlCol="0">
-              <a:spAutoFit/>
-            </a:bodyPr>
-            <a:lstStyle/>
-            <a:p>
-              <a:r>
-                <a:rPr lang="en-US" dirty="0"/>
-                <a:t>Artifact</a:t>
-              </a:r>
-            </a:p>
-          </p:txBody>
-        </p:sp>
-      </p:grpSp>
-      <p:cxnSp>
-        <p:nvCxnSpPr>
-          <p:cNvPr id="38" name="Straight Connector 37">
-            <a:extLst>
-              <a:ext uri="{FF2B5EF4-FFF2-40B4-BE49-F238E27FC236}">
-                <a16:creationId xmlns:a16="http://schemas.microsoft.com/office/drawing/2014/main" id="{42C26F8B-9F43-1BA4-E6D4-555D8C4ADA0B}"/>
-              </a:ext>
-            </a:extLst>
-          </p:cNvPr>
-          <p:cNvCxnSpPr>
-            <a:cxnSpLocks/>
-            <a:stCxn id="33" idx="0"/>
-          </p:cNvCxnSpPr>
-          <p:nvPr/>
-        </p:nvCxnSpPr>
-        <p:spPr>
-          <a:xfrm>
-            <a:off x="2711967" y="4494248"/>
-            <a:ext cx="0" cy="1134641"/>
-          </a:xfrm>
-          <a:prstGeom prst="line">
-            <a:avLst/>
-          </a:prstGeom>
-        </p:spPr>
-        <p:style>
-          <a:lnRef idx="2">
-            <a:schemeClr val="accent1"/>
-          </a:lnRef>
-          <a:fillRef idx="0">
-            <a:schemeClr val="accent1"/>
-          </a:fillRef>
-          <a:effectRef idx="1">
-            <a:schemeClr val="accent1"/>
-          </a:effectRef>
-          <a:fontRef idx="minor">
-            <a:schemeClr val="tx1"/>
-          </a:fontRef>
-        </p:style>
-      </p:cxnSp>
-      <p:cxnSp>
-        <p:nvCxnSpPr>
-          <p:cNvPr id="41" name="Straight Connector 40">
-            <a:extLst>
-              <a:ext uri="{FF2B5EF4-FFF2-40B4-BE49-F238E27FC236}">
-                <a16:creationId xmlns:a16="http://schemas.microsoft.com/office/drawing/2014/main" id="{7300123D-3AA2-20B2-9DC5-EBAEE78FEA56}"/>
-              </a:ext>
-            </a:extLst>
-          </p:cNvPr>
-          <p:cNvCxnSpPr>
-            <a:cxnSpLocks/>
-            <a:stCxn id="32" idx="1"/>
-            <a:endCxn id="32" idx="3"/>
-          </p:cNvCxnSpPr>
-          <p:nvPr/>
-        </p:nvCxnSpPr>
-        <p:spPr>
-          <a:xfrm>
-            <a:off x="1768415" y="5065272"/>
-            <a:ext cx="1819454" cy="0"/>
-          </a:xfrm>
-          <a:prstGeom prst="line">
-            <a:avLst/>
-          </a:prstGeom>
-        </p:spPr>
-        <p:style>
-          <a:lnRef idx="2">
-            <a:schemeClr val="accent1"/>
-          </a:lnRef>
-          <a:fillRef idx="0">
-            <a:schemeClr val="accent1"/>
-          </a:fillRef>
-          <a:effectRef idx="1">
-            <a:schemeClr val="accent1"/>
-          </a:effectRef>
-          <a:fontRef idx="minor">
-            <a:schemeClr val="tx1"/>
-          </a:fontRef>
-        </p:style>
-      </p:cxnSp>
     </p:spTree>
     <p:extLst>
       <p:ext uri="{BB962C8B-B14F-4D97-AF65-F5344CB8AC3E}">
         <p14:creationId xmlns:p14="http://schemas.microsoft.com/office/powerpoint/2010/main" val="1191410734"/>
+      </p:ext>
+    </p:extLst>
+  </p:cSld>
+  <p:clrMapOvr>
+    <a:masterClrMapping/>
+  </p:clrMapOvr>
+</p:sld>
+</file>
+
+<file path=ppt/slides/slide2.xml><?xml version="1.0" encoding="utf-8"?>
+<p:sld xmlns:a="http://schemas.openxmlformats.org/drawingml/2006/main" xmlns:r="http://schemas.openxmlformats.org/officeDocument/2006/relationships" xmlns:p="http://schemas.openxmlformats.org/presentationml/2006/main">
+  <p:cSld>
+    <p:spTree>
+      <p:nvGrpSpPr>
+        <p:cNvPr id="1" name=""/>
+        <p:cNvGrpSpPr/>
+        <p:nvPr/>
+      </p:nvGrpSpPr>
+      <p:grpSpPr>
+        <a:xfrm>
+          <a:off x="0" y="0"/>
+          <a:ext cx="0" cy="0"/>
+          <a:chOff x="0" y="0"/>
+          <a:chExt cx="0" cy="0"/>
+        </a:xfrm>
+      </p:grpSpPr>
+      <p:pic>
+        <p:nvPicPr>
+          <p:cNvPr id="5" name="Picture 4">
+            <a:extLst>
+              <a:ext uri="{FF2B5EF4-FFF2-40B4-BE49-F238E27FC236}">
+                <a16:creationId xmlns:a16="http://schemas.microsoft.com/office/drawing/2014/main" id="{63B18E5C-86C5-8FF5-152A-A4C81573AD68}"/>
+              </a:ext>
+            </a:extLst>
+          </p:cNvPr>
+          <p:cNvPicPr>
+            <a:picLocks noChangeAspect="1"/>
+          </p:cNvPicPr>
+          <p:nvPr/>
+        </p:nvPicPr>
+        <p:blipFill>
+          <a:blip r:embed="rId2"/>
+          <a:stretch>
+            <a:fillRect/>
+          </a:stretch>
+        </p:blipFill>
+        <p:spPr>
+          <a:xfrm>
+            <a:off x="1483976" y="78957"/>
+            <a:ext cx="9224047" cy="6700085"/>
+          </a:xfrm>
+          <a:prstGeom prst="rect">
+            <a:avLst/>
+          </a:prstGeom>
+        </p:spPr>
+      </p:pic>
+    </p:spTree>
+    <p:extLst>
+      <p:ext uri="{BB962C8B-B14F-4D97-AF65-F5344CB8AC3E}">
+        <p14:creationId xmlns:p14="http://schemas.microsoft.com/office/powerpoint/2010/main" val="631270394"/>
       </p:ext>
     </p:extLst>
   </p:cSld>

--- a/Inventory layout.pptx
+++ b/Inventory layout.pptx
@@ -105,6 +105,11 @@
       </a:defRPr>
     </a:lvl9pPr>
   </p:defaultTextStyle>
+  <p:extLst>
+    <p:ext uri="{EFAFB233-063F-42B5-8137-9DF3F51BA10A}">
+      <p15:sldGuideLst xmlns:p15="http://schemas.microsoft.com/office/powerpoint/2012/main"/>
+    </p:ext>
+  </p:extLst>
 </p:presentation>
 </file>
 
@@ -255,7 +260,7 @@
           <a:p>
             <a:fld id="{E73BF3D3-EBD1-455C-84C1-7FFD7CFDB72E}" type="datetimeFigureOut">
               <a:rPr lang="en-US" smtClean="0"/>
-              <a:t>6/6/2026</a:t>
+              <a:t>6/21/2026</a:t>
             </a:fld>
             <a:endParaRPr lang="en-US"/>
           </a:p>
@@ -453,7 +458,7 @@
           <a:p>
             <a:fld id="{E73BF3D3-EBD1-455C-84C1-7FFD7CFDB72E}" type="datetimeFigureOut">
               <a:rPr lang="en-US" smtClean="0"/>
-              <a:t>6/6/2026</a:t>
+              <a:t>6/21/2026</a:t>
             </a:fld>
             <a:endParaRPr lang="en-US"/>
           </a:p>
@@ -661,7 +666,7 @@
           <a:p>
             <a:fld id="{E73BF3D3-EBD1-455C-84C1-7FFD7CFDB72E}" type="datetimeFigureOut">
               <a:rPr lang="en-US" smtClean="0"/>
-              <a:t>6/6/2026</a:t>
+              <a:t>6/21/2026</a:t>
             </a:fld>
             <a:endParaRPr lang="en-US"/>
           </a:p>
@@ -859,7 +864,7 @@
           <a:p>
             <a:fld id="{E73BF3D3-EBD1-455C-84C1-7FFD7CFDB72E}" type="datetimeFigureOut">
               <a:rPr lang="en-US" smtClean="0"/>
-              <a:t>6/6/2026</a:t>
+              <a:t>6/21/2026</a:t>
             </a:fld>
             <a:endParaRPr lang="en-US"/>
           </a:p>
@@ -1134,7 +1139,7 @@
           <a:p>
             <a:fld id="{E73BF3D3-EBD1-455C-84C1-7FFD7CFDB72E}" type="datetimeFigureOut">
               <a:rPr lang="en-US" smtClean="0"/>
-              <a:t>6/6/2026</a:t>
+              <a:t>6/21/2026</a:t>
             </a:fld>
             <a:endParaRPr lang="en-US"/>
           </a:p>
@@ -1399,7 +1404,7 @@
           <a:p>
             <a:fld id="{E73BF3D3-EBD1-455C-84C1-7FFD7CFDB72E}" type="datetimeFigureOut">
               <a:rPr lang="en-US" smtClean="0"/>
-              <a:t>6/6/2026</a:t>
+              <a:t>6/21/2026</a:t>
             </a:fld>
             <a:endParaRPr lang="en-US"/>
           </a:p>
@@ -1811,7 +1816,7 @@
           <a:p>
             <a:fld id="{E73BF3D3-EBD1-455C-84C1-7FFD7CFDB72E}" type="datetimeFigureOut">
               <a:rPr lang="en-US" smtClean="0"/>
-              <a:t>6/6/2026</a:t>
+              <a:t>6/21/2026</a:t>
             </a:fld>
             <a:endParaRPr lang="en-US"/>
           </a:p>
@@ -1952,7 +1957,7 @@
           <a:p>
             <a:fld id="{E73BF3D3-EBD1-455C-84C1-7FFD7CFDB72E}" type="datetimeFigureOut">
               <a:rPr lang="en-US" smtClean="0"/>
-              <a:t>6/6/2026</a:t>
+              <a:t>6/21/2026</a:t>
             </a:fld>
             <a:endParaRPr lang="en-US"/>
           </a:p>
@@ -2065,7 +2070,7 @@
           <a:p>
             <a:fld id="{E73BF3D3-EBD1-455C-84C1-7FFD7CFDB72E}" type="datetimeFigureOut">
               <a:rPr lang="en-US" smtClean="0"/>
-              <a:t>6/6/2026</a:t>
+              <a:t>6/21/2026</a:t>
             </a:fld>
             <a:endParaRPr lang="en-US"/>
           </a:p>
@@ -2376,7 +2381,7 @@
           <a:p>
             <a:fld id="{E73BF3D3-EBD1-455C-84C1-7FFD7CFDB72E}" type="datetimeFigureOut">
               <a:rPr lang="en-US" smtClean="0"/>
-              <a:t>6/6/2026</a:t>
+              <a:t>6/21/2026</a:t>
             </a:fld>
             <a:endParaRPr lang="en-US"/>
           </a:p>
@@ -2664,7 +2669,7 @@
           <a:p>
             <a:fld id="{E73BF3D3-EBD1-455C-84C1-7FFD7CFDB72E}" type="datetimeFigureOut">
               <a:rPr lang="en-US" smtClean="0"/>
-              <a:t>6/6/2026</a:t>
+              <a:t>6/21/2026</a:t>
             </a:fld>
             <a:endParaRPr lang="en-US"/>
           </a:p>
@@ -2905,7 +2910,7 @@
           <a:p>
             <a:fld id="{E73BF3D3-EBD1-455C-84C1-7FFD7CFDB72E}" type="datetimeFigureOut">
               <a:rPr lang="en-US" smtClean="0"/>
-              <a:t>6/6/2026</a:t>
+              <a:t>6/21/2026</a:t>
             </a:fld>
             <a:endParaRPr lang="en-US"/>
           </a:p>
@@ -3324,10 +3329,10 @@
       </p:grpSpPr>
       <p:grpSp>
         <p:nvGrpSpPr>
-          <p:cNvPr id="44" name="Group 43">
-            <a:extLst>
-              <a:ext uri="{FF2B5EF4-FFF2-40B4-BE49-F238E27FC236}">
-                <a16:creationId xmlns:a16="http://schemas.microsoft.com/office/drawing/2014/main" id="{457AF761-46A9-607E-50C6-DE33919C3613}"/>
+          <p:cNvPr id="10" name="Group 9">
+            <a:extLst>
+              <a:ext uri="{FF2B5EF4-FFF2-40B4-BE49-F238E27FC236}">
+                <a16:creationId xmlns:a16="http://schemas.microsoft.com/office/drawing/2014/main" id="{C668D24A-FB0B-201B-5785-B0B2BFFC2204}"/>
               </a:ext>
             </a:extLst>
           </p:cNvPr>
@@ -3336,18 +3341,18 @@
         </p:nvGrpSpPr>
         <p:grpSpPr>
           <a:xfrm>
-            <a:off x="983412" y="155885"/>
-            <a:ext cx="9201509" cy="6685473"/>
-            <a:chOff x="1173193" y="172527"/>
-            <a:chExt cx="9201509" cy="6685473"/>
+            <a:off x="4606506" y="155885"/>
+            <a:ext cx="1955321" cy="1449238"/>
+            <a:chOff x="7583857" y="1371598"/>
+            <a:chExt cx="3010618" cy="1449238"/>
           </a:xfrm>
         </p:grpSpPr>
         <p:sp>
           <p:nvSpPr>
-            <p:cNvPr id="4" name="Rectangle 3">
+            <p:cNvPr id="11" name="Rectangle 10">
               <a:extLst>
                 <a:ext uri="{FF2B5EF4-FFF2-40B4-BE49-F238E27FC236}">
-                  <a16:creationId xmlns:a16="http://schemas.microsoft.com/office/drawing/2014/main" id="{C3C0F8FC-4E5A-70EF-ACF6-05447A84E106}"/>
+                  <a16:creationId xmlns:a16="http://schemas.microsoft.com/office/drawing/2014/main" id="{DB33D683-FF92-1846-4CB4-ADFA2579EF96}"/>
                 </a:ext>
               </a:extLst>
             </p:cNvPr>
@@ -3356,7 +3361,7 @@
           </p:nvSpPr>
           <p:spPr>
             <a:xfrm>
-              <a:off x="1173193" y="1397479"/>
+              <a:off x="7583857" y="1371598"/>
               <a:ext cx="3010618" cy="1449238"/>
             </a:xfrm>
             <a:prstGeom prst="rect">
@@ -3391,10 +3396,10 @@
         </p:sp>
         <p:sp>
           <p:nvSpPr>
-            <p:cNvPr id="6" name="TextBox 5">
+            <p:cNvPr id="12" name="TextBox 11">
               <a:extLst>
                 <a:ext uri="{FF2B5EF4-FFF2-40B4-BE49-F238E27FC236}">
-                  <a16:creationId xmlns:a16="http://schemas.microsoft.com/office/drawing/2014/main" id="{D168BF6F-1EF5-FD9F-5356-B5398842E4A7}"/>
+                  <a16:creationId xmlns:a16="http://schemas.microsoft.com/office/drawing/2014/main" id="{AF4FE8B7-84B8-F65E-9677-2775CB9BA07A}"/>
                 </a:ext>
               </a:extLst>
             </p:cNvPr>
@@ -3403,8 +3408,8 @@
           </p:nvSpPr>
           <p:spPr>
             <a:xfrm>
-              <a:off x="1816241" y="1445726"/>
-              <a:ext cx="1791452" cy="369332"/>
+              <a:off x="7614249" y="1566495"/>
+              <a:ext cx="2949836" cy="369332"/>
             </a:xfrm>
             <a:prstGeom prst="rect">
               <a:avLst/>
@@ -3419,1017 +3424,629 @@
             <a:p>
               <a:r>
                 <a:rPr lang="en-US" dirty="0"/>
-                <a:t>Primary weapon</a:t>
+                <a:t>Command bridge</a:t>
               </a:r>
             </a:p>
           </p:txBody>
         </p:sp>
-        <p:grpSp>
-          <p:nvGrpSpPr>
-            <p:cNvPr id="8" name="Group 7">
+      </p:grpSp>
+      <p:grpSp>
+        <p:nvGrpSpPr>
+          <p:cNvPr id="13" name="Group 12">
+            <a:extLst>
+              <a:ext uri="{FF2B5EF4-FFF2-40B4-BE49-F238E27FC236}">
+                <a16:creationId xmlns:a16="http://schemas.microsoft.com/office/drawing/2014/main" id="{C3D4FF44-F924-9C1A-2CC4-40B6A0638398}"/>
+              </a:ext>
+            </a:extLst>
+          </p:cNvPr>
+          <p:cNvGrpSpPr/>
+          <p:nvPr/>
+        </p:nvGrpSpPr>
+        <p:grpSpPr>
+          <a:xfrm>
+            <a:off x="4803508" y="1735923"/>
+            <a:ext cx="1657709" cy="2398144"/>
+            <a:chOff x="8226725" y="1397479"/>
+            <a:chExt cx="1657709" cy="1449238"/>
+          </a:xfrm>
+        </p:grpSpPr>
+        <p:sp>
+          <p:nvSpPr>
+            <p:cNvPr id="14" name="Rectangle 13">
               <a:extLst>
                 <a:ext uri="{FF2B5EF4-FFF2-40B4-BE49-F238E27FC236}">
-                  <a16:creationId xmlns:a16="http://schemas.microsoft.com/office/drawing/2014/main" id="{D383622E-B1DC-7213-A78F-0BE6378A7974}"/>
+                  <a16:creationId xmlns:a16="http://schemas.microsoft.com/office/drawing/2014/main" id="{80084728-EA7E-6187-BC31-C33BC6024726}"/>
                 </a:ext>
               </a:extLst>
             </p:cNvPr>
-            <p:cNvGrpSpPr/>
+            <p:cNvSpPr/>
             <p:nvPr/>
-          </p:nvGrpSpPr>
-          <p:grpSpPr>
+          </p:nvSpPr>
+          <p:spPr>
             <a:xfrm>
-              <a:off x="7364084" y="1397479"/>
-              <a:ext cx="3010618" cy="1449238"/>
-              <a:chOff x="7614249" y="1397479"/>
-              <a:chExt cx="3010618" cy="1449238"/>
+              <a:off x="8226725" y="1397479"/>
+              <a:ext cx="1657709" cy="1449238"/>
             </a:xfrm>
-          </p:grpSpPr>
-          <p:sp>
-            <p:nvSpPr>
-              <p:cNvPr id="5" name="Rectangle 4">
-                <a:extLst>
-                  <a:ext uri="{FF2B5EF4-FFF2-40B4-BE49-F238E27FC236}">
-                    <a16:creationId xmlns:a16="http://schemas.microsoft.com/office/drawing/2014/main" id="{9BF3BD1D-A6E1-8E3A-5E3A-CB9B6E73BA1B}"/>
-                  </a:ext>
-                </a:extLst>
-              </p:cNvPr>
-              <p:cNvSpPr/>
-              <p:nvPr/>
-            </p:nvSpPr>
-            <p:spPr>
-              <a:xfrm>
-                <a:off x="7614249" y="1397479"/>
-                <a:ext cx="3010618" cy="1449238"/>
-              </a:xfrm>
-              <a:prstGeom prst="rect">
-                <a:avLst/>
-              </a:prstGeom>
-              <a:noFill/>
-            </p:spPr>
-            <p:style>
-              <a:lnRef idx="2">
-                <a:schemeClr val="accent1">
-                  <a:shade val="15000"/>
-                </a:schemeClr>
-              </a:lnRef>
-              <a:fillRef idx="1">
-                <a:schemeClr val="accent1"/>
-              </a:fillRef>
-              <a:effectRef idx="0">
-                <a:schemeClr val="accent1"/>
-              </a:effectRef>
-              <a:fontRef idx="minor">
-                <a:schemeClr val="lt1"/>
-              </a:fontRef>
-            </p:style>
-            <p:txBody>
-              <a:bodyPr rtlCol="0" anchor="ctr"/>
-              <a:lstStyle/>
-              <a:p>
-                <a:pPr algn="ctr"/>
-                <a:endParaRPr lang="en-US"/>
-              </a:p>
-            </p:txBody>
-          </p:sp>
-          <p:sp>
-            <p:nvSpPr>
-              <p:cNvPr id="7" name="TextBox 6">
-                <a:extLst>
-                  <a:ext uri="{FF2B5EF4-FFF2-40B4-BE49-F238E27FC236}">
-                    <a16:creationId xmlns:a16="http://schemas.microsoft.com/office/drawing/2014/main" id="{1495AC75-4C9B-9651-2E11-66E33BBC76CE}"/>
-                  </a:ext>
-                </a:extLst>
-              </p:cNvPr>
-              <p:cNvSpPr txBox="1"/>
-              <p:nvPr/>
-            </p:nvSpPr>
-            <p:spPr>
-              <a:xfrm>
-                <a:off x="8226725" y="1437099"/>
-                <a:ext cx="2088649" cy="369332"/>
-              </a:xfrm>
-              <a:prstGeom prst="rect">
-                <a:avLst/>
-              </a:prstGeom>
-              <a:noFill/>
-            </p:spPr>
-            <p:txBody>
-              <a:bodyPr wrap="none" rtlCol="0">
-                <a:spAutoFit/>
-              </a:bodyPr>
-              <a:lstStyle/>
-              <a:p>
-                <a:r>
-                  <a:rPr lang="en-US" dirty="0"/>
-                  <a:t>Secondary weapon</a:t>
-                </a:r>
-              </a:p>
-            </p:txBody>
-          </p:sp>
-        </p:grpSp>
-        <p:grpSp>
-          <p:nvGrpSpPr>
-            <p:cNvPr id="10" name="Group 9">
+            <a:prstGeom prst="rect">
+              <a:avLst/>
+            </a:prstGeom>
+            <a:noFill/>
+          </p:spPr>
+          <p:style>
+            <a:lnRef idx="2">
+              <a:schemeClr val="accent1">
+                <a:shade val="15000"/>
+              </a:schemeClr>
+            </a:lnRef>
+            <a:fillRef idx="1">
+              <a:schemeClr val="accent1"/>
+            </a:fillRef>
+            <a:effectRef idx="0">
+              <a:schemeClr val="accent1"/>
+            </a:effectRef>
+            <a:fontRef idx="minor">
+              <a:schemeClr val="lt1"/>
+            </a:fontRef>
+          </p:style>
+          <p:txBody>
+            <a:bodyPr rtlCol="0" anchor="ctr"/>
+            <a:lstStyle/>
+            <a:p>
+              <a:pPr algn="ctr"/>
+              <a:endParaRPr lang="en-US"/>
+            </a:p>
+          </p:txBody>
+        </p:sp>
+        <p:sp>
+          <p:nvSpPr>
+            <p:cNvPr id="15" name="TextBox 14">
               <a:extLst>
                 <a:ext uri="{FF2B5EF4-FFF2-40B4-BE49-F238E27FC236}">
-                  <a16:creationId xmlns:a16="http://schemas.microsoft.com/office/drawing/2014/main" id="{C668D24A-FB0B-201B-5785-B0B2BFFC2204}"/>
+                  <a16:creationId xmlns:a16="http://schemas.microsoft.com/office/drawing/2014/main" id="{8634C2B0-310F-A093-A2D8-6E127997417C}"/>
                 </a:ext>
               </a:extLst>
             </p:cNvPr>
-            <p:cNvGrpSpPr/>
+            <p:cNvSpPr txBox="1"/>
             <p:nvPr/>
-          </p:nvGrpSpPr>
-          <p:grpSpPr>
+          </p:nvSpPr>
+          <p:spPr>
             <a:xfrm>
-              <a:off x="4796287" y="172527"/>
-              <a:ext cx="1955321" cy="1449238"/>
-              <a:chOff x="7583857" y="1371598"/>
-              <a:chExt cx="3010618" cy="1449238"/>
+              <a:off x="8758061" y="1480231"/>
+              <a:ext cx="595035" cy="369332"/>
             </a:xfrm>
-          </p:grpSpPr>
-          <p:sp>
-            <p:nvSpPr>
-              <p:cNvPr id="11" name="Rectangle 10">
-                <a:extLst>
-                  <a:ext uri="{FF2B5EF4-FFF2-40B4-BE49-F238E27FC236}">
-                    <a16:creationId xmlns:a16="http://schemas.microsoft.com/office/drawing/2014/main" id="{DB33D683-FF92-1846-4CB4-ADFA2579EF96}"/>
-                  </a:ext>
-                </a:extLst>
-              </p:cNvPr>
-              <p:cNvSpPr/>
-              <p:nvPr/>
-            </p:nvSpPr>
-            <p:spPr>
-              <a:xfrm>
-                <a:off x="7583857" y="1371598"/>
-                <a:ext cx="3010618" cy="1449238"/>
-              </a:xfrm>
-              <a:prstGeom prst="rect">
-                <a:avLst/>
-              </a:prstGeom>
-              <a:noFill/>
-            </p:spPr>
-            <p:style>
-              <a:lnRef idx="2">
-                <a:schemeClr val="accent1">
-                  <a:shade val="15000"/>
-                </a:schemeClr>
-              </a:lnRef>
-              <a:fillRef idx="1">
-                <a:schemeClr val="accent1"/>
-              </a:fillRef>
-              <a:effectRef idx="0">
-                <a:schemeClr val="accent1"/>
-              </a:effectRef>
-              <a:fontRef idx="minor">
-                <a:schemeClr val="lt1"/>
-              </a:fontRef>
-            </p:style>
-            <p:txBody>
-              <a:bodyPr rtlCol="0" anchor="ctr"/>
-              <a:lstStyle/>
-              <a:p>
-                <a:pPr algn="ctr"/>
-                <a:endParaRPr lang="en-US"/>
-              </a:p>
-            </p:txBody>
-          </p:sp>
-          <p:sp>
-            <p:nvSpPr>
-              <p:cNvPr id="12" name="TextBox 11">
-                <a:extLst>
-                  <a:ext uri="{FF2B5EF4-FFF2-40B4-BE49-F238E27FC236}">
-                    <a16:creationId xmlns:a16="http://schemas.microsoft.com/office/drawing/2014/main" id="{AF4FE8B7-84B8-F65E-9677-2775CB9BA07A}"/>
-                  </a:ext>
-                </a:extLst>
-              </p:cNvPr>
-              <p:cNvSpPr txBox="1"/>
-              <p:nvPr/>
-            </p:nvSpPr>
-            <p:spPr>
-              <a:xfrm>
-                <a:off x="7614249" y="1566495"/>
-                <a:ext cx="2949836" cy="369332"/>
-              </a:xfrm>
-              <a:prstGeom prst="rect">
-                <a:avLst/>
-              </a:prstGeom>
-              <a:noFill/>
-            </p:spPr>
-            <p:txBody>
-              <a:bodyPr wrap="none" rtlCol="0">
-                <a:spAutoFit/>
-              </a:bodyPr>
-              <a:lstStyle/>
-              <a:p>
-                <a:r>
-                  <a:rPr lang="en-US" dirty="0"/>
-                  <a:t>Command bridge</a:t>
-                </a:r>
-              </a:p>
-            </p:txBody>
-          </p:sp>
-        </p:grpSp>
-        <p:grpSp>
-          <p:nvGrpSpPr>
-            <p:cNvPr id="13" name="Group 12">
+            <a:prstGeom prst="rect">
+              <a:avLst/>
+            </a:prstGeom>
+            <a:noFill/>
+          </p:spPr>
+          <p:txBody>
+            <a:bodyPr wrap="none" rtlCol="0">
+              <a:spAutoFit/>
+            </a:bodyPr>
+            <a:lstStyle/>
+            <a:p>
+              <a:r>
+                <a:rPr lang="en-US" dirty="0"/>
+                <a:t>Hull</a:t>
+              </a:r>
+            </a:p>
+          </p:txBody>
+        </p:sp>
+      </p:grpSp>
+      <p:grpSp>
+        <p:nvGrpSpPr>
+          <p:cNvPr id="17" name="Group 16">
+            <a:extLst>
+              <a:ext uri="{FF2B5EF4-FFF2-40B4-BE49-F238E27FC236}">
+                <a16:creationId xmlns:a16="http://schemas.microsoft.com/office/drawing/2014/main" id="{BC535F67-637D-540C-1BD7-30CD66EB98D7}"/>
+              </a:ext>
+            </a:extLst>
+          </p:cNvPr>
+          <p:cNvGrpSpPr/>
+          <p:nvPr/>
+        </p:nvGrpSpPr>
+        <p:grpSpPr>
+          <a:xfrm>
+            <a:off x="1259138" y="1658238"/>
+            <a:ext cx="3010618" cy="1449238"/>
+            <a:chOff x="7529419" y="1291361"/>
+            <a:chExt cx="3010618" cy="1449238"/>
+          </a:xfrm>
+        </p:grpSpPr>
+        <p:sp>
+          <p:nvSpPr>
+            <p:cNvPr id="18" name="Rectangle 17">
               <a:extLst>
                 <a:ext uri="{FF2B5EF4-FFF2-40B4-BE49-F238E27FC236}">
-                  <a16:creationId xmlns:a16="http://schemas.microsoft.com/office/drawing/2014/main" id="{C3D4FF44-F924-9C1A-2CC4-40B6A0638398}"/>
+                  <a16:creationId xmlns:a16="http://schemas.microsoft.com/office/drawing/2014/main" id="{C14F1CB8-8261-6DCE-5A2C-0EC607B2B4A3}"/>
                 </a:ext>
               </a:extLst>
             </p:cNvPr>
-            <p:cNvGrpSpPr/>
+            <p:cNvSpPr/>
             <p:nvPr/>
-          </p:nvGrpSpPr>
-          <p:grpSpPr>
+          </p:nvSpPr>
+          <p:spPr>
             <a:xfrm>
-              <a:off x="4945093" y="1792816"/>
-              <a:ext cx="1657709" cy="2398144"/>
-              <a:chOff x="8226725" y="1397479"/>
-              <a:chExt cx="1657709" cy="1449238"/>
+              <a:off x="7529419" y="1291361"/>
+              <a:ext cx="3010618" cy="1449238"/>
             </a:xfrm>
-          </p:grpSpPr>
-          <p:sp>
-            <p:nvSpPr>
-              <p:cNvPr id="14" name="Rectangle 13">
-                <a:extLst>
-                  <a:ext uri="{FF2B5EF4-FFF2-40B4-BE49-F238E27FC236}">
-                    <a16:creationId xmlns:a16="http://schemas.microsoft.com/office/drawing/2014/main" id="{80084728-EA7E-6187-BC31-C33BC6024726}"/>
-                  </a:ext>
-                </a:extLst>
-              </p:cNvPr>
-              <p:cNvSpPr/>
-              <p:nvPr/>
-            </p:nvSpPr>
-            <p:spPr>
-              <a:xfrm>
-                <a:off x="8226725" y="1397479"/>
-                <a:ext cx="1657709" cy="1449238"/>
-              </a:xfrm>
-              <a:prstGeom prst="rect">
-                <a:avLst/>
-              </a:prstGeom>
-              <a:noFill/>
-            </p:spPr>
-            <p:style>
-              <a:lnRef idx="2">
-                <a:schemeClr val="accent1">
-                  <a:shade val="15000"/>
-                </a:schemeClr>
-              </a:lnRef>
-              <a:fillRef idx="1">
-                <a:schemeClr val="accent1"/>
-              </a:fillRef>
-              <a:effectRef idx="0">
-                <a:schemeClr val="accent1"/>
-              </a:effectRef>
-              <a:fontRef idx="minor">
-                <a:schemeClr val="lt1"/>
-              </a:fontRef>
-            </p:style>
-            <p:txBody>
-              <a:bodyPr rtlCol="0" anchor="ctr"/>
-              <a:lstStyle/>
-              <a:p>
-                <a:pPr algn="ctr"/>
-                <a:endParaRPr lang="en-US"/>
-              </a:p>
-            </p:txBody>
-          </p:sp>
-          <p:sp>
-            <p:nvSpPr>
-              <p:cNvPr id="15" name="TextBox 14">
-                <a:extLst>
-                  <a:ext uri="{FF2B5EF4-FFF2-40B4-BE49-F238E27FC236}">
-                    <a16:creationId xmlns:a16="http://schemas.microsoft.com/office/drawing/2014/main" id="{8634C2B0-310F-A093-A2D8-6E127997417C}"/>
-                  </a:ext>
-                </a:extLst>
-              </p:cNvPr>
-              <p:cNvSpPr txBox="1"/>
-              <p:nvPr/>
-            </p:nvSpPr>
-            <p:spPr>
-              <a:xfrm>
-                <a:off x="8758061" y="1480231"/>
-                <a:ext cx="595035" cy="369332"/>
-              </a:xfrm>
-              <a:prstGeom prst="rect">
-                <a:avLst/>
-              </a:prstGeom>
-              <a:noFill/>
-            </p:spPr>
-            <p:txBody>
-              <a:bodyPr wrap="none" rtlCol="0">
-                <a:spAutoFit/>
-              </a:bodyPr>
-              <a:lstStyle/>
-              <a:p>
-                <a:r>
-                  <a:rPr lang="en-US" dirty="0"/>
-                  <a:t>Hull</a:t>
-                </a:r>
-              </a:p>
-            </p:txBody>
-          </p:sp>
-        </p:grpSp>
-        <p:grpSp>
-          <p:nvGrpSpPr>
-            <p:cNvPr id="17" name="Group 16">
+            <a:prstGeom prst="rect">
+              <a:avLst/>
+            </a:prstGeom>
+            <a:noFill/>
+          </p:spPr>
+          <p:style>
+            <a:lnRef idx="2">
+              <a:schemeClr val="accent1">
+                <a:shade val="15000"/>
+              </a:schemeClr>
+            </a:lnRef>
+            <a:fillRef idx="1">
+              <a:schemeClr val="accent1"/>
+            </a:fillRef>
+            <a:effectRef idx="0">
+              <a:schemeClr val="accent1"/>
+            </a:effectRef>
+            <a:fontRef idx="minor">
+              <a:schemeClr val="lt1"/>
+            </a:fontRef>
+          </p:style>
+          <p:txBody>
+            <a:bodyPr rtlCol="0" anchor="ctr"/>
+            <a:lstStyle/>
+            <a:p>
+              <a:pPr algn="ctr"/>
+              <a:endParaRPr lang="en-US" dirty="0"/>
+            </a:p>
+          </p:txBody>
+        </p:sp>
+        <p:sp>
+          <p:nvSpPr>
+            <p:cNvPr id="19" name="TextBox 18">
               <a:extLst>
                 <a:ext uri="{FF2B5EF4-FFF2-40B4-BE49-F238E27FC236}">
-                  <a16:creationId xmlns:a16="http://schemas.microsoft.com/office/drawing/2014/main" id="{BC535F67-637D-540C-1BD7-30CD66EB98D7}"/>
+                  <a16:creationId xmlns:a16="http://schemas.microsoft.com/office/drawing/2014/main" id="{A377DB3F-B098-A5B1-8F79-09425D747053}"/>
                 </a:ext>
               </a:extLst>
             </p:cNvPr>
-            <p:cNvGrpSpPr/>
+            <p:cNvSpPr txBox="1"/>
             <p:nvPr/>
-          </p:nvGrpSpPr>
-          <p:grpSpPr>
+          </p:nvSpPr>
+          <p:spPr>
             <a:xfrm>
-              <a:off x="4268636" y="4244019"/>
-              <a:ext cx="3010618" cy="1449238"/>
-              <a:chOff x="7529419" y="1291361"/>
-              <a:chExt cx="3010618" cy="1449238"/>
+              <a:off x="8693128" y="1369046"/>
+              <a:ext cx="683200" cy="369332"/>
             </a:xfrm>
-          </p:grpSpPr>
-          <p:sp>
-            <p:nvSpPr>
-              <p:cNvPr id="18" name="Rectangle 17">
-                <a:extLst>
-                  <a:ext uri="{FF2B5EF4-FFF2-40B4-BE49-F238E27FC236}">
-                    <a16:creationId xmlns:a16="http://schemas.microsoft.com/office/drawing/2014/main" id="{C14F1CB8-8261-6DCE-5A2C-0EC607B2B4A3}"/>
-                  </a:ext>
-                </a:extLst>
-              </p:cNvPr>
-              <p:cNvSpPr/>
-              <p:nvPr/>
-            </p:nvSpPr>
-            <p:spPr>
-              <a:xfrm>
-                <a:off x="7529419" y="1291361"/>
-                <a:ext cx="3010618" cy="1449238"/>
-              </a:xfrm>
-              <a:prstGeom prst="rect">
-                <a:avLst/>
-              </a:prstGeom>
-              <a:noFill/>
-            </p:spPr>
-            <p:style>
-              <a:lnRef idx="2">
-                <a:schemeClr val="accent1">
-                  <a:shade val="15000"/>
-                </a:schemeClr>
-              </a:lnRef>
-              <a:fillRef idx="1">
-                <a:schemeClr val="accent1"/>
-              </a:fillRef>
-              <a:effectRef idx="0">
-                <a:schemeClr val="accent1"/>
-              </a:effectRef>
-              <a:fontRef idx="minor">
-                <a:schemeClr val="lt1"/>
-              </a:fontRef>
-            </p:style>
-            <p:txBody>
-              <a:bodyPr rtlCol="0" anchor="ctr"/>
-              <a:lstStyle/>
-              <a:p>
-                <a:pPr algn="ctr"/>
-                <a:endParaRPr lang="en-US" dirty="0"/>
-              </a:p>
-            </p:txBody>
-          </p:sp>
-          <p:sp>
-            <p:nvSpPr>
-              <p:cNvPr id="19" name="TextBox 18">
-                <a:extLst>
-                  <a:ext uri="{FF2B5EF4-FFF2-40B4-BE49-F238E27FC236}">
-                    <a16:creationId xmlns:a16="http://schemas.microsoft.com/office/drawing/2014/main" id="{A377DB3F-B098-A5B1-8F79-09425D747053}"/>
-                  </a:ext>
-                </a:extLst>
-              </p:cNvPr>
-              <p:cNvSpPr txBox="1"/>
-              <p:nvPr/>
-            </p:nvSpPr>
-            <p:spPr>
-              <a:xfrm>
-                <a:off x="8737211" y="1397479"/>
-                <a:ext cx="795411" cy="369332"/>
-              </a:xfrm>
-              <a:prstGeom prst="rect">
-                <a:avLst/>
-              </a:prstGeom>
-              <a:noFill/>
-            </p:spPr>
-            <p:txBody>
-              <a:bodyPr wrap="none" rtlCol="0">
-                <a:spAutoFit/>
-              </a:bodyPr>
-              <a:lstStyle/>
-              <a:p>
-                <a:r>
-                  <a:rPr lang="en-US" dirty="0"/>
-                  <a:t>Wings</a:t>
-                </a:r>
-              </a:p>
-            </p:txBody>
-          </p:sp>
-        </p:grpSp>
-        <p:grpSp>
-          <p:nvGrpSpPr>
-            <p:cNvPr id="21" name="Group 20">
+            <a:prstGeom prst="rect">
+              <a:avLst/>
+            </a:prstGeom>
+            <a:noFill/>
+          </p:spPr>
+          <p:txBody>
+            <a:bodyPr wrap="none" rtlCol="0">
+              <a:spAutoFit/>
+            </a:bodyPr>
+            <a:lstStyle/>
+            <a:p>
+              <a:r>
+                <a:rPr lang="en-US" dirty="0"/>
+                <a:t>Wing</a:t>
+              </a:r>
+            </a:p>
+          </p:txBody>
+        </p:sp>
+      </p:grpSp>
+      <p:grpSp>
+        <p:nvGrpSpPr>
+          <p:cNvPr id="21" name="Group 20">
+            <a:extLst>
+              <a:ext uri="{FF2B5EF4-FFF2-40B4-BE49-F238E27FC236}">
+                <a16:creationId xmlns:a16="http://schemas.microsoft.com/office/drawing/2014/main" id="{53ED03D2-E715-7734-6DDD-B03371178A02}"/>
+              </a:ext>
+            </a:extLst>
+          </p:cNvPr>
+          <p:cNvGrpSpPr/>
+          <p:nvPr/>
+        </p:nvGrpSpPr>
+        <p:grpSpPr>
+          <a:xfrm>
+            <a:off x="4722636" y="4305709"/>
+            <a:ext cx="1819454" cy="1127235"/>
+            <a:chOff x="7614249" y="1397479"/>
+            <a:chExt cx="3010618" cy="1449238"/>
+          </a:xfrm>
+        </p:grpSpPr>
+        <p:sp>
+          <p:nvSpPr>
+            <p:cNvPr id="22" name="Rectangle 21">
               <a:extLst>
                 <a:ext uri="{FF2B5EF4-FFF2-40B4-BE49-F238E27FC236}">
-                  <a16:creationId xmlns:a16="http://schemas.microsoft.com/office/drawing/2014/main" id="{53ED03D2-E715-7734-6DDD-B03371178A02}"/>
+                  <a16:creationId xmlns:a16="http://schemas.microsoft.com/office/drawing/2014/main" id="{C071C6A7-BA0E-AC5E-3749-A200A3A56914}"/>
                 </a:ext>
               </a:extLst>
             </p:cNvPr>
-            <p:cNvGrpSpPr/>
+            <p:cNvSpPr/>
             <p:nvPr/>
-          </p:nvGrpSpPr>
-          <p:grpSpPr>
+          </p:nvSpPr>
+          <p:spPr>
             <a:xfrm>
-              <a:off x="4912417" y="5730765"/>
-              <a:ext cx="1819454" cy="1127235"/>
-              <a:chOff x="7614249" y="1397479"/>
-              <a:chExt cx="3010618" cy="1449238"/>
+              <a:off x="7614249" y="1397479"/>
+              <a:ext cx="3010618" cy="1449238"/>
             </a:xfrm>
-          </p:grpSpPr>
-          <p:sp>
-            <p:nvSpPr>
-              <p:cNvPr id="22" name="Rectangle 21">
-                <a:extLst>
-                  <a:ext uri="{FF2B5EF4-FFF2-40B4-BE49-F238E27FC236}">
-                    <a16:creationId xmlns:a16="http://schemas.microsoft.com/office/drawing/2014/main" id="{C071C6A7-BA0E-AC5E-3749-A200A3A56914}"/>
-                  </a:ext>
-                </a:extLst>
-              </p:cNvPr>
-              <p:cNvSpPr/>
-              <p:nvPr/>
-            </p:nvSpPr>
-            <p:spPr>
-              <a:xfrm>
-                <a:off x="7614249" y="1397479"/>
-                <a:ext cx="3010618" cy="1449238"/>
-              </a:xfrm>
-              <a:prstGeom prst="rect">
-                <a:avLst/>
-              </a:prstGeom>
-              <a:noFill/>
-            </p:spPr>
-            <p:style>
-              <a:lnRef idx="2">
-                <a:schemeClr val="accent1">
-                  <a:shade val="15000"/>
-                </a:schemeClr>
-              </a:lnRef>
-              <a:fillRef idx="1">
-                <a:schemeClr val="accent1"/>
-              </a:fillRef>
-              <a:effectRef idx="0">
-                <a:schemeClr val="accent1"/>
-              </a:effectRef>
-              <a:fontRef idx="minor">
-                <a:schemeClr val="lt1"/>
-              </a:fontRef>
-            </p:style>
-            <p:txBody>
-              <a:bodyPr rtlCol="0" anchor="ctr"/>
-              <a:lstStyle/>
-              <a:p>
-                <a:pPr algn="ctr"/>
-                <a:endParaRPr lang="en-US"/>
-              </a:p>
-            </p:txBody>
-          </p:sp>
-          <p:sp>
-            <p:nvSpPr>
-              <p:cNvPr id="23" name="TextBox 22">
-                <a:extLst>
-                  <a:ext uri="{FF2B5EF4-FFF2-40B4-BE49-F238E27FC236}">
-                    <a16:creationId xmlns:a16="http://schemas.microsoft.com/office/drawing/2014/main" id="{9E8FC88F-7565-6A54-BB42-274DFEF38D30}"/>
-                  </a:ext>
-                </a:extLst>
-              </p:cNvPr>
-              <p:cNvSpPr txBox="1"/>
-              <p:nvPr/>
-            </p:nvSpPr>
-            <p:spPr>
-              <a:xfrm>
-                <a:off x="8283184" y="1433867"/>
-                <a:ext cx="1672748" cy="474834"/>
-              </a:xfrm>
-              <a:prstGeom prst="rect">
-                <a:avLst/>
-              </a:prstGeom>
-              <a:noFill/>
-            </p:spPr>
-            <p:txBody>
-              <a:bodyPr wrap="none" rtlCol="0">
-                <a:spAutoFit/>
-              </a:bodyPr>
-              <a:lstStyle/>
-              <a:p>
-                <a:r>
-                  <a:rPr lang="en-US" dirty="0"/>
-                  <a:t>Thruster</a:t>
-                </a:r>
-              </a:p>
-            </p:txBody>
-          </p:sp>
-        </p:grpSp>
-        <p:grpSp>
-          <p:nvGrpSpPr>
-            <p:cNvPr id="24" name="Group 23">
+            <a:prstGeom prst="rect">
+              <a:avLst/>
+            </a:prstGeom>
+            <a:noFill/>
+          </p:spPr>
+          <p:style>
+            <a:lnRef idx="2">
+              <a:schemeClr val="accent1">
+                <a:shade val="15000"/>
+              </a:schemeClr>
+            </a:lnRef>
+            <a:fillRef idx="1">
+              <a:schemeClr val="accent1"/>
+            </a:fillRef>
+            <a:effectRef idx="0">
+              <a:schemeClr val="accent1"/>
+            </a:effectRef>
+            <a:fontRef idx="minor">
+              <a:schemeClr val="lt1"/>
+            </a:fontRef>
+          </p:style>
+          <p:txBody>
+            <a:bodyPr rtlCol="0" anchor="ctr"/>
+            <a:lstStyle/>
+            <a:p>
+              <a:pPr algn="ctr"/>
+              <a:endParaRPr lang="en-US"/>
+            </a:p>
+          </p:txBody>
+        </p:sp>
+        <p:sp>
+          <p:nvSpPr>
+            <p:cNvPr id="23" name="TextBox 22">
               <a:extLst>
                 <a:ext uri="{FF2B5EF4-FFF2-40B4-BE49-F238E27FC236}">
-                  <a16:creationId xmlns:a16="http://schemas.microsoft.com/office/drawing/2014/main" id="{7C6E0B41-08C9-1225-C612-573039AAD3C7}"/>
+                  <a16:creationId xmlns:a16="http://schemas.microsoft.com/office/drawing/2014/main" id="{9E8FC88F-7565-6A54-BB42-274DFEF38D30}"/>
                 </a:ext>
               </a:extLst>
             </p:cNvPr>
-            <p:cNvGrpSpPr/>
+            <p:cNvSpPr txBox="1"/>
             <p:nvPr/>
-          </p:nvGrpSpPr>
-          <p:grpSpPr>
+          </p:nvSpPr>
+          <p:spPr>
             <a:xfrm>
-              <a:off x="7906187" y="3114270"/>
-              <a:ext cx="1819454" cy="1127235"/>
-              <a:chOff x="7573931" y="1257815"/>
-              <a:chExt cx="3010618" cy="1449238"/>
+              <a:off x="8283184" y="1433867"/>
+              <a:ext cx="1672748" cy="474834"/>
             </a:xfrm>
-          </p:grpSpPr>
-          <p:sp>
-            <p:nvSpPr>
-              <p:cNvPr id="25" name="Rectangle 24">
-                <a:extLst>
-                  <a:ext uri="{FF2B5EF4-FFF2-40B4-BE49-F238E27FC236}">
-                    <a16:creationId xmlns:a16="http://schemas.microsoft.com/office/drawing/2014/main" id="{CED98CBD-3A85-A0B1-8A62-37FFB4C705B0}"/>
-                  </a:ext>
-                </a:extLst>
-              </p:cNvPr>
-              <p:cNvSpPr/>
-              <p:nvPr/>
-            </p:nvSpPr>
-            <p:spPr>
-              <a:xfrm>
-                <a:off x="7573931" y="1257815"/>
-                <a:ext cx="3010618" cy="1449238"/>
-              </a:xfrm>
-              <a:prstGeom prst="rect">
-                <a:avLst/>
-              </a:prstGeom>
-              <a:noFill/>
-            </p:spPr>
-            <p:style>
-              <a:lnRef idx="2">
-                <a:schemeClr val="accent1">
-                  <a:shade val="15000"/>
-                </a:schemeClr>
-              </a:lnRef>
-              <a:fillRef idx="1">
-                <a:schemeClr val="accent1"/>
-              </a:fillRef>
-              <a:effectRef idx="0">
-                <a:schemeClr val="accent1"/>
-              </a:effectRef>
-              <a:fontRef idx="minor">
-                <a:schemeClr val="lt1"/>
-              </a:fontRef>
-            </p:style>
-            <p:txBody>
-              <a:bodyPr rtlCol="0" anchor="ctr"/>
-              <a:lstStyle/>
-              <a:p>
-                <a:pPr algn="ctr"/>
-                <a:endParaRPr lang="en-US" dirty="0"/>
-              </a:p>
-            </p:txBody>
-          </p:sp>
-          <p:sp>
-            <p:nvSpPr>
-              <p:cNvPr id="26" name="TextBox 25">
-                <a:extLst>
-                  <a:ext uri="{FF2B5EF4-FFF2-40B4-BE49-F238E27FC236}">
-                    <a16:creationId xmlns:a16="http://schemas.microsoft.com/office/drawing/2014/main" id="{C31CD00A-7E5F-78F0-D22D-64D03B62C779}"/>
-                  </a:ext>
-                </a:extLst>
-              </p:cNvPr>
-              <p:cNvSpPr txBox="1"/>
-              <p:nvPr/>
-            </p:nvSpPr>
-            <p:spPr>
-              <a:xfrm>
-                <a:off x="8283184" y="1270476"/>
-                <a:ext cx="1592112" cy="474834"/>
-              </a:xfrm>
-              <a:prstGeom prst="rect">
-                <a:avLst/>
-              </a:prstGeom>
-              <a:noFill/>
-            </p:spPr>
-            <p:txBody>
-              <a:bodyPr wrap="none" rtlCol="0">
-                <a:spAutoFit/>
-              </a:bodyPr>
-              <a:lstStyle/>
-              <a:p>
-                <a:r>
-                  <a:rPr lang="en-US" dirty="0"/>
-                  <a:t>Drone 1</a:t>
-                </a:r>
-              </a:p>
-            </p:txBody>
-          </p:sp>
-        </p:grpSp>
-        <p:grpSp>
-          <p:nvGrpSpPr>
-            <p:cNvPr id="27" name="Group 26">
+            <a:prstGeom prst="rect">
+              <a:avLst/>
+            </a:prstGeom>
+            <a:noFill/>
+          </p:spPr>
+          <p:txBody>
+            <a:bodyPr wrap="none" rtlCol="0">
+              <a:spAutoFit/>
+            </a:bodyPr>
+            <a:lstStyle/>
+            <a:p>
+              <a:r>
+                <a:rPr lang="en-US" dirty="0"/>
+                <a:t>Thruster</a:t>
+              </a:r>
+            </a:p>
+          </p:txBody>
+        </p:sp>
+      </p:grpSp>
+      <p:grpSp>
+        <p:nvGrpSpPr>
+          <p:cNvPr id="24" name="Group 23">
+            <a:extLst>
+              <a:ext uri="{FF2B5EF4-FFF2-40B4-BE49-F238E27FC236}">
+                <a16:creationId xmlns:a16="http://schemas.microsoft.com/office/drawing/2014/main" id="{7C6E0B41-08C9-1225-C612-573039AAD3C7}"/>
+              </a:ext>
+            </a:extLst>
+          </p:cNvPr>
+          <p:cNvGrpSpPr/>
+          <p:nvPr/>
+        </p:nvGrpSpPr>
+        <p:grpSpPr>
+          <a:xfrm>
+            <a:off x="7716406" y="3178474"/>
+            <a:ext cx="1819454" cy="1127235"/>
+            <a:chOff x="7573931" y="1257815"/>
+            <a:chExt cx="3010618" cy="1449238"/>
+          </a:xfrm>
+        </p:grpSpPr>
+        <p:sp>
+          <p:nvSpPr>
+            <p:cNvPr id="25" name="Rectangle 24">
               <a:extLst>
                 <a:ext uri="{FF2B5EF4-FFF2-40B4-BE49-F238E27FC236}">
-                  <a16:creationId xmlns:a16="http://schemas.microsoft.com/office/drawing/2014/main" id="{8BCD4AA6-6327-65C6-04FC-26CDC8D43FB4}"/>
+                  <a16:creationId xmlns:a16="http://schemas.microsoft.com/office/drawing/2014/main" id="{CED98CBD-3A85-A0B1-8A62-37FFB4C705B0}"/>
                 </a:ext>
               </a:extLst>
             </p:cNvPr>
-            <p:cNvGrpSpPr/>
+            <p:cNvSpPr/>
             <p:nvPr/>
-          </p:nvGrpSpPr>
-          <p:grpSpPr>
+          </p:nvSpPr>
+          <p:spPr>
             <a:xfrm>
-              <a:off x="1768775" y="3085967"/>
-              <a:ext cx="1819454" cy="1127235"/>
-              <a:chOff x="7614249" y="1397479"/>
-              <a:chExt cx="3010618" cy="1449238"/>
+              <a:off x="7573931" y="1257815"/>
+              <a:ext cx="3010618" cy="1449238"/>
             </a:xfrm>
-          </p:grpSpPr>
-          <p:sp>
-            <p:nvSpPr>
-              <p:cNvPr id="28" name="Rectangle 27">
-                <a:extLst>
-                  <a:ext uri="{FF2B5EF4-FFF2-40B4-BE49-F238E27FC236}">
-                    <a16:creationId xmlns:a16="http://schemas.microsoft.com/office/drawing/2014/main" id="{E0055768-A096-0909-6298-E7FA71D5D46F}"/>
-                  </a:ext>
-                </a:extLst>
-              </p:cNvPr>
-              <p:cNvSpPr/>
-              <p:nvPr/>
-            </p:nvSpPr>
-            <p:spPr>
-              <a:xfrm>
-                <a:off x="7614249" y="1397479"/>
-                <a:ext cx="3010618" cy="1449238"/>
-              </a:xfrm>
-              <a:prstGeom prst="rect">
-                <a:avLst/>
-              </a:prstGeom>
-              <a:noFill/>
-            </p:spPr>
-            <p:style>
-              <a:lnRef idx="2">
-                <a:schemeClr val="accent1">
-                  <a:shade val="15000"/>
-                </a:schemeClr>
-              </a:lnRef>
-              <a:fillRef idx="1">
-                <a:schemeClr val="accent1"/>
-              </a:fillRef>
-              <a:effectRef idx="0">
-                <a:schemeClr val="accent1"/>
-              </a:effectRef>
-              <a:fontRef idx="minor">
-                <a:schemeClr val="lt1"/>
-              </a:fontRef>
-            </p:style>
-            <p:txBody>
-              <a:bodyPr rtlCol="0" anchor="ctr"/>
-              <a:lstStyle/>
-              <a:p>
-                <a:pPr algn="ctr"/>
-                <a:endParaRPr lang="en-US"/>
-              </a:p>
-            </p:txBody>
-          </p:sp>
-          <p:sp>
-            <p:nvSpPr>
-              <p:cNvPr id="29" name="TextBox 28">
-                <a:extLst>
-                  <a:ext uri="{FF2B5EF4-FFF2-40B4-BE49-F238E27FC236}">
-                    <a16:creationId xmlns:a16="http://schemas.microsoft.com/office/drawing/2014/main" id="{C17EBA89-85A8-DA44-44C1-1D58262D4BCC}"/>
-                  </a:ext>
-                </a:extLst>
-              </p:cNvPr>
-              <p:cNvSpPr txBox="1"/>
-              <p:nvPr/>
-            </p:nvSpPr>
-            <p:spPr>
-              <a:xfrm>
-                <a:off x="8283184" y="1433867"/>
-                <a:ext cx="1592112" cy="474834"/>
-              </a:xfrm>
-              <a:prstGeom prst="rect">
-                <a:avLst/>
-              </a:prstGeom>
-              <a:noFill/>
-            </p:spPr>
-            <p:txBody>
-              <a:bodyPr wrap="none" rtlCol="0">
-                <a:spAutoFit/>
-              </a:bodyPr>
-              <a:lstStyle/>
-              <a:p>
-                <a:r>
-                  <a:rPr lang="en-US" dirty="0"/>
-                  <a:t>Drone 2</a:t>
-                </a:r>
-              </a:p>
-            </p:txBody>
-          </p:sp>
-        </p:grpSp>
-        <p:grpSp>
-          <p:nvGrpSpPr>
-            <p:cNvPr id="31" name="Group 30">
+            <a:prstGeom prst="rect">
+              <a:avLst/>
+            </a:prstGeom>
+            <a:noFill/>
+          </p:spPr>
+          <p:style>
+            <a:lnRef idx="2">
+              <a:schemeClr val="accent1">
+                <a:shade val="15000"/>
+              </a:schemeClr>
+            </a:lnRef>
+            <a:fillRef idx="1">
+              <a:schemeClr val="accent1"/>
+            </a:fillRef>
+            <a:effectRef idx="0">
+              <a:schemeClr val="accent1"/>
+            </a:effectRef>
+            <a:fontRef idx="minor">
+              <a:schemeClr val="lt1"/>
+            </a:fontRef>
+          </p:style>
+          <p:txBody>
+            <a:bodyPr rtlCol="0" anchor="ctr"/>
+            <a:lstStyle/>
+            <a:p>
+              <a:pPr algn="ctr"/>
+              <a:endParaRPr lang="en-US" dirty="0"/>
+            </a:p>
+          </p:txBody>
+        </p:sp>
+        <p:sp>
+          <p:nvSpPr>
+            <p:cNvPr id="26" name="TextBox 25">
               <a:extLst>
                 <a:ext uri="{FF2B5EF4-FFF2-40B4-BE49-F238E27FC236}">
-                  <a16:creationId xmlns:a16="http://schemas.microsoft.com/office/drawing/2014/main" id="{0E4CB660-CE98-6193-A4B6-F8D13D0D5405}"/>
+                  <a16:creationId xmlns:a16="http://schemas.microsoft.com/office/drawing/2014/main" id="{C31CD00A-7E5F-78F0-D22D-64D03B62C779}"/>
                 </a:ext>
               </a:extLst>
             </p:cNvPr>
-            <p:cNvGrpSpPr/>
+            <p:cNvSpPr txBox="1"/>
             <p:nvPr/>
-          </p:nvGrpSpPr>
-          <p:grpSpPr>
+          </p:nvSpPr>
+          <p:spPr>
             <a:xfrm>
-              <a:off x="1768415" y="4494248"/>
-              <a:ext cx="1819454" cy="1134641"/>
-              <a:chOff x="7614249" y="1387958"/>
-              <a:chExt cx="3010618" cy="1458759"/>
+              <a:off x="8283184" y="1270476"/>
+              <a:ext cx="1592112" cy="474834"/>
             </a:xfrm>
-          </p:grpSpPr>
-          <p:sp>
-            <p:nvSpPr>
-              <p:cNvPr id="32" name="Rectangle 31">
-                <a:extLst>
-                  <a:ext uri="{FF2B5EF4-FFF2-40B4-BE49-F238E27FC236}">
-                    <a16:creationId xmlns:a16="http://schemas.microsoft.com/office/drawing/2014/main" id="{F6E972A9-CF29-C245-EC1F-6780B31C4701}"/>
-                  </a:ext>
-                </a:extLst>
-              </p:cNvPr>
-              <p:cNvSpPr/>
-              <p:nvPr/>
-            </p:nvSpPr>
-            <p:spPr>
-              <a:xfrm>
-                <a:off x="7614249" y="1397479"/>
-                <a:ext cx="3010618" cy="1449238"/>
-              </a:xfrm>
-              <a:prstGeom prst="rect">
-                <a:avLst/>
-              </a:prstGeom>
-              <a:noFill/>
-            </p:spPr>
-            <p:style>
-              <a:lnRef idx="2">
-                <a:schemeClr val="accent1">
-                  <a:shade val="15000"/>
-                </a:schemeClr>
-              </a:lnRef>
-              <a:fillRef idx="1">
-                <a:schemeClr val="accent1"/>
-              </a:fillRef>
-              <a:effectRef idx="0">
-                <a:schemeClr val="accent1"/>
-              </a:effectRef>
-              <a:fontRef idx="minor">
-                <a:schemeClr val="lt1"/>
-              </a:fontRef>
-            </p:style>
-            <p:txBody>
-              <a:bodyPr rtlCol="0" anchor="ctr"/>
-              <a:lstStyle/>
-              <a:p>
-                <a:pPr algn="ctr"/>
-                <a:endParaRPr lang="en-US"/>
-              </a:p>
-            </p:txBody>
-          </p:sp>
-          <p:sp>
-            <p:nvSpPr>
-              <p:cNvPr id="33" name="TextBox 32">
-                <a:extLst>
-                  <a:ext uri="{FF2B5EF4-FFF2-40B4-BE49-F238E27FC236}">
-                    <a16:creationId xmlns:a16="http://schemas.microsoft.com/office/drawing/2014/main" id="{4F1FADB1-4BBE-DD78-8D2D-C28C8E5967A3}"/>
-                  </a:ext>
-                </a:extLst>
-              </p:cNvPr>
-              <p:cNvSpPr txBox="1"/>
-              <p:nvPr/>
-            </p:nvSpPr>
-            <p:spPr>
-              <a:xfrm>
-                <a:off x="7971151" y="1387958"/>
-                <a:ext cx="2408754" cy="474834"/>
-              </a:xfrm>
-              <a:prstGeom prst="rect">
-                <a:avLst/>
-              </a:prstGeom>
-              <a:noFill/>
-            </p:spPr>
-            <p:txBody>
-              <a:bodyPr wrap="none" rtlCol="0">
-                <a:spAutoFit/>
-              </a:bodyPr>
-              <a:lstStyle/>
-              <a:p>
-                <a:r>
-                  <a:rPr lang="en-US" dirty="0"/>
-                  <a:t>Energy cores</a:t>
-                </a:r>
-              </a:p>
-            </p:txBody>
-          </p:sp>
-        </p:grpSp>
-        <p:grpSp>
-          <p:nvGrpSpPr>
-            <p:cNvPr id="34" name="Group 33">
+            <a:prstGeom prst="rect">
+              <a:avLst/>
+            </a:prstGeom>
+            <a:noFill/>
+          </p:spPr>
+          <p:txBody>
+            <a:bodyPr wrap="none" rtlCol="0">
+              <a:spAutoFit/>
+            </a:bodyPr>
+            <a:lstStyle/>
+            <a:p>
+              <a:r>
+                <a:rPr lang="en-US" dirty="0"/>
+                <a:t>Drone 1</a:t>
+              </a:r>
+            </a:p>
+          </p:txBody>
+        </p:sp>
+      </p:grpSp>
+      <p:grpSp>
+        <p:nvGrpSpPr>
+          <p:cNvPr id="31" name="Group 30">
+            <a:extLst>
+              <a:ext uri="{FF2B5EF4-FFF2-40B4-BE49-F238E27FC236}">
+                <a16:creationId xmlns:a16="http://schemas.microsoft.com/office/drawing/2014/main" id="{0E4CB660-CE98-6193-A4B6-F8D13D0D5405}"/>
+              </a:ext>
+            </a:extLst>
+          </p:cNvPr>
+          <p:cNvGrpSpPr/>
+          <p:nvPr/>
+        </p:nvGrpSpPr>
+        <p:grpSpPr>
+          <a:xfrm>
+            <a:off x="1888726" y="3292142"/>
+            <a:ext cx="1819454" cy="1134641"/>
+            <a:chOff x="7614249" y="1387958"/>
+            <a:chExt cx="3010618" cy="1458759"/>
+          </a:xfrm>
+        </p:grpSpPr>
+        <p:sp>
+          <p:nvSpPr>
+            <p:cNvPr id="32" name="Rectangle 31">
               <a:extLst>
                 <a:ext uri="{FF2B5EF4-FFF2-40B4-BE49-F238E27FC236}">
-                  <a16:creationId xmlns:a16="http://schemas.microsoft.com/office/drawing/2014/main" id="{C2780D05-5F87-B0B8-7B75-E8706FFA9B72}"/>
+                  <a16:creationId xmlns:a16="http://schemas.microsoft.com/office/drawing/2014/main" id="{F6E972A9-CF29-C245-EC1F-6780B31C4701}"/>
                 </a:ext>
               </a:extLst>
             </p:cNvPr>
-            <p:cNvGrpSpPr/>
+            <p:cNvSpPr/>
             <p:nvPr/>
-          </p:nvGrpSpPr>
-          <p:grpSpPr>
+          </p:nvSpPr>
+          <p:spPr>
             <a:xfrm>
-              <a:off x="7906187" y="4501652"/>
-              <a:ext cx="1819454" cy="1127235"/>
-              <a:chOff x="7573931" y="1257815"/>
-              <a:chExt cx="3010618" cy="1449238"/>
+              <a:off x="7614249" y="1397479"/>
+              <a:ext cx="3010618" cy="1449238"/>
             </a:xfrm>
-          </p:grpSpPr>
-          <p:sp>
-            <p:nvSpPr>
-              <p:cNvPr id="35" name="Rectangle 34">
-                <a:extLst>
-                  <a:ext uri="{FF2B5EF4-FFF2-40B4-BE49-F238E27FC236}">
-                    <a16:creationId xmlns:a16="http://schemas.microsoft.com/office/drawing/2014/main" id="{BEEC565E-D254-DCD3-C3D2-F52EE2FFCA37}"/>
-                  </a:ext>
-                </a:extLst>
-              </p:cNvPr>
-              <p:cNvSpPr/>
-              <p:nvPr/>
-            </p:nvSpPr>
-            <p:spPr>
-              <a:xfrm>
-                <a:off x="7573931" y="1257815"/>
-                <a:ext cx="3010618" cy="1449238"/>
-              </a:xfrm>
-              <a:prstGeom prst="rect">
-                <a:avLst/>
-              </a:prstGeom>
-              <a:noFill/>
-            </p:spPr>
-            <p:style>
-              <a:lnRef idx="2">
-                <a:schemeClr val="accent1">
-                  <a:shade val="15000"/>
-                </a:schemeClr>
-              </a:lnRef>
-              <a:fillRef idx="1">
-                <a:schemeClr val="accent1"/>
-              </a:fillRef>
-              <a:effectRef idx="0">
-                <a:schemeClr val="accent1"/>
-              </a:effectRef>
-              <a:fontRef idx="minor">
-                <a:schemeClr val="lt1"/>
-              </a:fontRef>
-            </p:style>
-            <p:txBody>
-              <a:bodyPr rtlCol="0" anchor="ctr"/>
-              <a:lstStyle/>
-              <a:p>
-                <a:pPr algn="ctr"/>
-                <a:endParaRPr lang="en-US" dirty="0"/>
-              </a:p>
-            </p:txBody>
-          </p:sp>
-          <p:sp>
-            <p:nvSpPr>
-              <p:cNvPr id="36" name="TextBox 35">
-                <a:extLst>
-                  <a:ext uri="{FF2B5EF4-FFF2-40B4-BE49-F238E27FC236}">
-                    <a16:creationId xmlns:a16="http://schemas.microsoft.com/office/drawing/2014/main" id="{7325E4D3-9C68-575C-AC1C-8E6FDB9F6936}"/>
-                  </a:ext>
-                </a:extLst>
-              </p:cNvPr>
-              <p:cNvSpPr txBox="1"/>
-              <p:nvPr/>
-            </p:nvSpPr>
-            <p:spPr>
-              <a:xfrm>
-                <a:off x="8523129" y="1267337"/>
-                <a:ext cx="1510417" cy="474834"/>
-              </a:xfrm>
-              <a:prstGeom prst="rect">
-                <a:avLst/>
-              </a:prstGeom>
-              <a:noFill/>
-            </p:spPr>
-            <p:txBody>
-              <a:bodyPr wrap="none" rtlCol="0">
-                <a:spAutoFit/>
-              </a:bodyPr>
-              <a:lstStyle/>
-              <a:p>
-                <a:r>
-                  <a:rPr lang="en-US" dirty="0"/>
-                  <a:t>Artifact</a:t>
-                </a:r>
-              </a:p>
-            </p:txBody>
-          </p:sp>
-        </p:grpSp>
-        <p:cxnSp>
-          <p:nvCxnSpPr>
-            <p:cNvPr id="38" name="Straight Connector 37">
+            <a:prstGeom prst="rect">
+              <a:avLst/>
+            </a:prstGeom>
+            <a:noFill/>
+          </p:spPr>
+          <p:style>
+            <a:lnRef idx="2">
+              <a:schemeClr val="accent1">
+                <a:shade val="15000"/>
+              </a:schemeClr>
+            </a:lnRef>
+            <a:fillRef idx="1">
+              <a:schemeClr val="accent1"/>
+            </a:fillRef>
+            <a:effectRef idx="0">
+              <a:schemeClr val="accent1"/>
+            </a:effectRef>
+            <a:fontRef idx="minor">
+              <a:schemeClr val="lt1"/>
+            </a:fontRef>
+          </p:style>
+          <p:txBody>
+            <a:bodyPr rtlCol="0" anchor="ctr"/>
+            <a:lstStyle/>
+            <a:p>
+              <a:pPr algn="ctr"/>
+              <a:endParaRPr lang="en-US"/>
+            </a:p>
+          </p:txBody>
+        </p:sp>
+        <p:sp>
+          <p:nvSpPr>
+            <p:cNvPr id="33" name="TextBox 32">
               <a:extLst>
                 <a:ext uri="{FF2B5EF4-FFF2-40B4-BE49-F238E27FC236}">
-                  <a16:creationId xmlns:a16="http://schemas.microsoft.com/office/drawing/2014/main" id="{42C26F8B-9F43-1BA4-E6D4-555D8C4ADA0B}"/>
+                  <a16:creationId xmlns:a16="http://schemas.microsoft.com/office/drawing/2014/main" id="{4F1FADB1-4BBE-DD78-8D2D-C28C8E5967A3}"/>
                 </a:ext>
               </a:extLst>
             </p:cNvPr>
-            <p:cNvCxnSpPr>
-              <a:cxnSpLocks/>
-              <a:stCxn id="33" idx="0"/>
-            </p:cNvCxnSpPr>
+            <p:cNvSpPr txBox="1"/>
             <p:nvPr/>
-          </p:nvCxnSpPr>
+          </p:nvSpPr>
           <p:spPr>
             <a:xfrm>
-              <a:off x="2711967" y="4494248"/>
-              <a:ext cx="0" cy="1134641"/>
+              <a:off x="7971151" y="1387958"/>
+              <a:ext cx="2408754" cy="474834"/>
             </a:xfrm>
-            <a:prstGeom prst="line">
+            <a:prstGeom prst="rect">
               <a:avLst/>
             </a:prstGeom>
+            <a:noFill/>
+          </p:spPr>
+          <p:txBody>
+            <a:bodyPr wrap="none" rtlCol="0">
+              <a:spAutoFit/>
+            </a:bodyPr>
+            <a:lstStyle/>
+            <a:p>
+              <a:r>
+                <a:rPr lang="en-US" dirty="0"/>
+                <a:t>Energy cores</a:t>
+              </a:r>
+            </a:p>
+          </p:txBody>
+        </p:sp>
+      </p:grpSp>
+      <p:grpSp>
+        <p:nvGrpSpPr>
+          <p:cNvPr id="2" name="Group 1">
+            <a:extLst>
+              <a:ext uri="{FF2B5EF4-FFF2-40B4-BE49-F238E27FC236}">
+                <a16:creationId xmlns:a16="http://schemas.microsoft.com/office/drawing/2014/main" id="{DFB51D1A-F37D-D4F7-FD72-2A72F41298A0}"/>
+              </a:ext>
+            </a:extLst>
+          </p:cNvPr>
+          <p:cNvGrpSpPr/>
+          <p:nvPr/>
+        </p:nvGrpSpPr>
+        <p:grpSpPr>
+          <a:xfrm>
+            <a:off x="7120824" y="1605123"/>
+            <a:ext cx="3010618" cy="1449238"/>
+            <a:chOff x="7529419" y="1291361"/>
+            <a:chExt cx="3010618" cy="1449238"/>
+          </a:xfrm>
+        </p:grpSpPr>
+        <p:sp>
+          <p:nvSpPr>
+            <p:cNvPr id="3" name="Rectangle 2">
+              <a:extLst>
+                <a:ext uri="{FF2B5EF4-FFF2-40B4-BE49-F238E27FC236}">
+                  <a16:creationId xmlns:a16="http://schemas.microsoft.com/office/drawing/2014/main" id="{6F3F8AE4-9FA9-2C65-E7E8-BECE9B8D9B61}"/>
+                </a:ext>
+              </a:extLst>
+            </p:cNvPr>
+            <p:cNvSpPr/>
+            <p:nvPr/>
+          </p:nvSpPr>
+          <p:spPr>
+            <a:xfrm>
+              <a:off x="7529419" y="1291361"/>
+              <a:ext cx="3010618" cy="1449238"/>
+            </a:xfrm>
+            <a:prstGeom prst="rect">
+              <a:avLst/>
+            </a:prstGeom>
+            <a:noFill/>
           </p:spPr>
           <p:style>
             <a:lnRef idx="2">
-              <a:schemeClr val="accent1"/>
+              <a:schemeClr val="accent1">
+                <a:shade val="15000"/>
+              </a:schemeClr>
             </a:lnRef>
-            <a:fillRef idx="0">
+            <a:fillRef idx="1">
               <a:schemeClr val="accent1"/>
             </a:fillRef>
-            <a:effectRef idx="1">
+            <a:effectRef idx="0">
               <a:schemeClr val="accent1"/>
             </a:effectRef>
             <a:fontRef idx="minor">
-              <a:schemeClr val="tx1"/>
+              <a:schemeClr val="lt1"/>
             </a:fontRef>
           </p:style>
-        </p:cxnSp>
-        <p:cxnSp>
-          <p:nvCxnSpPr>
-            <p:cNvPr id="41" name="Straight Connector 40">
+          <p:txBody>
+            <a:bodyPr rtlCol="0" anchor="ctr"/>
+            <a:lstStyle/>
+            <a:p>
+              <a:pPr algn="ctr"/>
+              <a:endParaRPr lang="en-US" dirty="0"/>
+            </a:p>
+          </p:txBody>
+        </p:sp>
+        <p:sp>
+          <p:nvSpPr>
+            <p:cNvPr id="9" name="TextBox 8">
               <a:extLst>
                 <a:ext uri="{FF2B5EF4-FFF2-40B4-BE49-F238E27FC236}">
-                  <a16:creationId xmlns:a16="http://schemas.microsoft.com/office/drawing/2014/main" id="{7300123D-3AA2-20B2-9DC5-EBAEE78FEA56}"/>
+                  <a16:creationId xmlns:a16="http://schemas.microsoft.com/office/drawing/2014/main" id="{5745317A-0F40-3F06-6F0F-9024F348CF65}"/>
                 </a:ext>
               </a:extLst>
             </p:cNvPr>
-            <p:cNvCxnSpPr>
-              <a:cxnSpLocks/>
-              <a:stCxn id="32" idx="1"/>
-              <a:endCxn id="32" idx="3"/>
-            </p:cNvCxnSpPr>
+            <p:cNvSpPr txBox="1"/>
             <p:nvPr/>
-          </p:nvCxnSpPr>
+          </p:nvSpPr>
           <p:spPr>
             <a:xfrm>
-              <a:off x="1768415" y="5065272"/>
-              <a:ext cx="1819454" cy="0"/>
+              <a:off x="8693128" y="1369046"/>
+              <a:ext cx="683200" cy="369332"/>
             </a:xfrm>
-            <a:prstGeom prst="line">
+            <a:prstGeom prst="rect">
               <a:avLst/>
             </a:prstGeom>
+            <a:noFill/>
           </p:spPr>
-          <p:style>
-            <a:lnRef idx="2">
-              <a:schemeClr val="accent1"/>
-            </a:lnRef>
-            <a:fillRef idx="0">
-              <a:schemeClr val="accent1"/>
-            </a:fillRef>
-            <a:effectRef idx="1">
-              <a:schemeClr val="accent1"/>
-            </a:effectRef>
-            <a:fontRef idx="minor">
-              <a:schemeClr val="tx1"/>
-            </a:fontRef>
-          </p:style>
-        </p:cxnSp>
+          <p:txBody>
+            <a:bodyPr wrap="none" rtlCol="0">
+              <a:spAutoFit/>
+            </a:bodyPr>
+            <a:lstStyle/>
+            <a:p>
+              <a:r>
+                <a:rPr lang="en-US" dirty="0"/>
+                <a:t>Wing</a:t>
+              </a:r>
+            </a:p>
+          </p:txBody>
+        </p:sp>
       </p:grpSp>
     </p:spTree>
     <p:extLst>

--- a/Inventory layout.pptx
+++ b/Inventory layout.pptx
@@ -3408,8 +3408,8 @@
           </p:nvSpPr>
           <p:spPr>
             <a:xfrm>
-              <a:off x="7614249" y="1566495"/>
-              <a:ext cx="2949836" cy="369332"/>
+              <a:off x="8420209" y="1438519"/>
+              <a:ext cx="1486322" cy="369332"/>
             </a:xfrm>
             <a:prstGeom prst="rect">
               <a:avLst/>
@@ -3424,7 +3424,7 @@
             <a:p>
               <a:r>
                 <a:rPr lang="en-US" dirty="0"/>
-                <a:t>Command bridge</a:t>
+                <a:t>Cockpit</a:t>
               </a:r>
             </a:p>
           </p:txBody>

--- a/Inventory layout.pptx
+++ b/Inventory layout.pptx
@@ -7,6 +7,11 @@
   <p:sldIdLst>
     <p:sldId id="256" r:id="rId2"/>
     <p:sldId id="257" r:id="rId3"/>
+    <p:sldId id="258" r:id="rId4"/>
+    <p:sldId id="259" r:id="rId5"/>
+    <p:sldId id="260" r:id="rId6"/>
+    <p:sldId id="262" r:id="rId7"/>
+    <p:sldId id="261" r:id="rId8"/>
   </p:sldIdLst>
   <p:sldSz cx="12192000" cy="6858000"/>
   <p:notesSz cx="6858000" cy="9144000"/>
@@ -260,7 +265,7 @@
           <a:p>
             <a:fld id="{E73BF3D3-EBD1-455C-84C1-7FFD7CFDB72E}" type="datetimeFigureOut">
               <a:rPr lang="en-US" smtClean="0"/>
-              <a:t>6/21/2026</a:t>
+              <a:t>6/30/2026</a:t>
             </a:fld>
             <a:endParaRPr lang="en-US"/>
           </a:p>
@@ -458,7 +463,7 @@
           <a:p>
             <a:fld id="{E73BF3D3-EBD1-455C-84C1-7FFD7CFDB72E}" type="datetimeFigureOut">
               <a:rPr lang="en-US" smtClean="0"/>
-              <a:t>6/21/2026</a:t>
+              <a:t>6/30/2026</a:t>
             </a:fld>
             <a:endParaRPr lang="en-US"/>
           </a:p>
@@ -666,7 +671,7 @@
           <a:p>
             <a:fld id="{E73BF3D3-EBD1-455C-84C1-7FFD7CFDB72E}" type="datetimeFigureOut">
               <a:rPr lang="en-US" smtClean="0"/>
-              <a:t>6/21/2026</a:t>
+              <a:t>6/30/2026</a:t>
             </a:fld>
             <a:endParaRPr lang="en-US"/>
           </a:p>
@@ -864,7 +869,7 @@
           <a:p>
             <a:fld id="{E73BF3D3-EBD1-455C-84C1-7FFD7CFDB72E}" type="datetimeFigureOut">
               <a:rPr lang="en-US" smtClean="0"/>
-              <a:t>6/21/2026</a:t>
+              <a:t>6/30/2026</a:t>
             </a:fld>
             <a:endParaRPr lang="en-US"/>
           </a:p>
@@ -1139,7 +1144,7 @@
           <a:p>
             <a:fld id="{E73BF3D3-EBD1-455C-84C1-7FFD7CFDB72E}" type="datetimeFigureOut">
               <a:rPr lang="en-US" smtClean="0"/>
-              <a:t>6/21/2026</a:t>
+              <a:t>6/30/2026</a:t>
             </a:fld>
             <a:endParaRPr lang="en-US"/>
           </a:p>
@@ -1404,7 +1409,7 @@
           <a:p>
             <a:fld id="{E73BF3D3-EBD1-455C-84C1-7FFD7CFDB72E}" type="datetimeFigureOut">
               <a:rPr lang="en-US" smtClean="0"/>
-              <a:t>6/21/2026</a:t>
+              <a:t>6/30/2026</a:t>
             </a:fld>
             <a:endParaRPr lang="en-US"/>
           </a:p>
@@ -1816,7 +1821,7 @@
           <a:p>
             <a:fld id="{E73BF3D3-EBD1-455C-84C1-7FFD7CFDB72E}" type="datetimeFigureOut">
               <a:rPr lang="en-US" smtClean="0"/>
-              <a:t>6/21/2026</a:t>
+              <a:t>6/30/2026</a:t>
             </a:fld>
             <a:endParaRPr lang="en-US"/>
           </a:p>
@@ -1957,7 +1962,7 @@
           <a:p>
             <a:fld id="{E73BF3D3-EBD1-455C-84C1-7FFD7CFDB72E}" type="datetimeFigureOut">
               <a:rPr lang="en-US" smtClean="0"/>
-              <a:t>6/21/2026</a:t>
+              <a:t>6/30/2026</a:t>
             </a:fld>
             <a:endParaRPr lang="en-US"/>
           </a:p>
@@ -2070,7 +2075,7 @@
           <a:p>
             <a:fld id="{E73BF3D3-EBD1-455C-84C1-7FFD7CFDB72E}" type="datetimeFigureOut">
               <a:rPr lang="en-US" smtClean="0"/>
-              <a:t>6/21/2026</a:t>
+              <a:t>6/30/2026</a:t>
             </a:fld>
             <a:endParaRPr lang="en-US"/>
           </a:p>
@@ -2381,7 +2386,7 @@
           <a:p>
             <a:fld id="{E73BF3D3-EBD1-455C-84C1-7FFD7CFDB72E}" type="datetimeFigureOut">
               <a:rPr lang="en-US" smtClean="0"/>
-              <a:t>6/21/2026</a:t>
+              <a:t>6/30/2026</a:t>
             </a:fld>
             <a:endParaRPr lang="en-US"/>
           </a:p>
@@ -2669,7 +2674,7 @@
           <a:p>
             <a:fld id="{E73BF3D3-EBD1-455C-84C1-7FFD7CFDB72E}" type="datetimeFigureOut">
               <a:rPr lang="en-US" smtClean="0"/>
-              <a:t>6/21/2026</a:t>
+              <a:t>6/30/2026</a:t>
             </a:fld>
             <a:endParaRPr lang="en-US"/>
           </a:p>
@@ -2910,7 +2915,7 @@
           <a:p>
             <a:fld id="{E73BF3D3-EBD1-455C-84C1-7FFD7CFDB72E}" type="datetimeFigureOut">
               <a:rPr lang="en-US" smtClean="0"/>
-              <a:t>6/21/2026</a:t>
+              <a:t>6/30/2026</a:t>
             </a:fld>
             <a:endParaRPr lang="en-US"/>
           </a:p>
@@ -4121,6 +4126,3478 @@
 </p:sld>
 </file>
 
+<file path=ppt/slides/slide3.xml><?xml version="1.0" encoding="utf-8"?>
+<p:sld xmlns:a="http://schemas.openxmlformats.org/drawingml/2006/main" xmlns:r="http://schemas.openxmlformats.org/officeDocument/2006/relationships" xmlns:p="http://schemas.openxmlformats.org/presentationml/2006/main">
+  <p:cSld>
+    <p:spTree>
+      <p:nvGrpSpPr>
+        <p:cNvPr id="1" name=""/>
+        <p:cNvGrpSpPr/>
+        <p:nvPr/>
+      </p:nvGrpSpPr>
+      <p:grpSpPr>
+        <a:xfrm>
+          <a:off x="0" y="0"/>
+          <a:ext cx="0" cy="0"/>
+          <a:chOff x="0" y="0"/>
+          <a:chExt cx="0" cy="0"/>
+        </a:xfrm>
+      </p:grpSpPr>
+      <p:grpSp>
+        <p:nvGrpSpPr>
+          <p:cNvPr id="19" name="Group 18">
+            <a:extLst>
+              <a:ext uri="{FF2B5EF4-FFF2-40B4-BE49-F238E27FC236}">
+                <a16:creationId xmlns:a16="http://schemas.microsoft.com/office/drawing/2014/main" id="{1D9A53E0-1321-211B-E631-74DB4B86B518}"/>
+              </a:ext>
+            </a:extLst>
+          </p:cNvPr>
+          <p:cNvGrpSpPr/>
+          <p:nvPr/>
+        </p:nvGrpSpPr>
+        <p:grpSpPr>
+          <a:xfrm>
+            <a:off x="923026" y="379561"/>
+            <a:ext cx="10644997" cy="6159262"/>
+            <a:chOff x="923026" y="379561"/>
+            <a:chExt cx="10644997" cy="6159262"/>
+          </a:xfrm>
+        </p:grpSpPr>
+        <p:sp>
+          <p:nvSpPr>
+            <p:cNvPr id="4" name="Rectangle 3">
+              <a:extLst>
+                <a:ext uri="{FF2B5EF4-FFF2-40B4-BE49-F238E27FC236}">
+                  <a16:creationId xmlns:a16="http://schemas.microsoft.com/office/drawing/2014/main" id="{A89D7447-33C8-0C3C-B9E9-0801B03BFE45}"/>
+                </a:ext>
+              </a:extLst>
+            </p:cNvPr>
+            <p:cNvSpPr/>
+            <p:nvPr/>
+          </p:nvSpPr>
+          <p:spPr>
+            <a:xfrm>
+              <a:off x="923026" y="379562"/>
+              <a:ext cx="10644997" cy="6159261"/>
+            </a:xfrm>
+            <a:prstGeom prst="rect">
+              <a:avLst/>
+            </a:prstGeom>
+            <a:noFill/>
+          </p:spPr>
+          <p:style>
+            <a:lnRef idx="2">
+              <a:schemeClr val="accent1">
+                <a:shade val="15000"/>
+              </a:schemeClr>
+            </a:lnRef>
+            <a:fillRef idx="1">
+              <a:schemeClr val="accent1"/>
+            </a:fillRef>
+            <a:effectRef idx="0">
+              <a:schemeClr val="accent1"/>
+            </a:effectRef>
+            <a:fontRef idx="minor">
+              <a:schemeClr val="lt1"/>
+            </a:fontRef>
+          </p:style>
+          <p:txBody>
+            <a:bodyPr rtlCol="0" anchor="ctr"/>
+            <a:lstStyle/>
+            <a:p>
+              <a:pPr algn="ctr"/>
+              <a:endParaRPr lang="en-US"/>
+            </a:p>
+          </p:txBody>
+        </p:sp>
+        <p:cxnSp>
+          <p:nvCxnSpPr>
+            <p:cNvPr id="6" name="Straight Connector 5">
+              <a:extLst>
+                <a:ext uri="{FF2B5EF4-FFF2-40B4-BE49-F238E27FC236}">
+                  <a16:creationId xmlns:a16="http://schemas.microsoft.com/office/drawing/2014/main" id="{698F724E-023E-0D2F-704D-E757ADF36A3A}"/>
+                </a:ext>
+              </a:extLst>
+            </p:cNvPr>
+            <p:cNvCxnSpPr/>
+            <p:nvPr/>
+          </p:nvCxnSpPr>
+          <p:spPr>
+            <a:xfrm>
+              <a:off x="3148642" y="379562"/>
+              <a:ext cx="0" cy="6159261"/>
+            </a:xfrm>
+            <a:prstGeom prst="line">
+              <a:avLst/>
+            </a:prstGeom>
+          </p:spPr>
+          <p:style>
+            <a:lnRef idx="2">
+              <a:schemeClr val="accent1"/>
+            </a:lnRef>
+            <a:fillRef idx="0">
+              <a:schemeClr val="accent1"/>
+            </a:fillRef>
+            <a:effectRef idx="1">
+              <a:schemeClr val="accent1"/>
+            </a:effectRef>
+            <a:fontRef idx="minor">
+              <a:schemeClr val="tx1"/>
+            </a:fontRef>
+          </p:style>
+        </p:cxnSp>
+        <p:cxnSp>
+          <p:nvCxnSpPr>
+            <p:cNvPr id="7" name="Straight Connector 6">
+              <a:extLst>
+                <a:ext uri="{FF2B5EF4-FFF2-40B4-BE49-F238E27FC236}">
+                  <a16:creationId xmlns:a16="http://schemas.microsoft.com/office/drawing/2014/main" id="{F184F37D-7815-EE91-0B7B-85968F677C68}"/>
+                </a:ext>
+              </a:extLst>
+            </p:cNvPr>
+            <p:cNvCxnSpPr>
+              <a:cxnSpLocks/>
+            </p:cNvCxnSpPr>
+            <p:nvPr/>
+          </p:nvCxnSpPr>
+          <p:spPr>
+            <a:xfrm>
+              <a:off x="923026" y="2286000"/>
+              <a:ext cx="2225616" cy="0"/>
+            </a:xfrm>
+            <a:prstGeom prst="line">
+              <a:avLst/>
+            </a:prstGeom>
+          </p:spPr>
+          <p:style>
+            <a:lnRef idx="2">
+              <a:schemeClr val="accent1"/>
+            </a:lnRef>
+            <a:fillRef idx="0">
+              <a:schemeClr val="accent1"/>
+            </a:fillRef>
+            <a:effectRef idx="1">
+              <a:schemeClr val="accent1"/>
+            </a:effectRef>
+            <a:fontRef idx="minor">
+              <a:schemeClr val="tx1"/>
+            </a:fontRef>
+          </p:style>
+        </p:cxnSp>
+        <p:cxnSp>
+          <p:nvCxnSpPr>
+            <p:cNvPr id="10" name="Straight Connector 9">
+              <a:extLst>
+                <a:ext uri="{FF2B5EF4-FFF2-40B4-BE49-F238E27FC236}">
+                  <a16:creationId xmlns:a16="http://schemas.microsoft.com/office/drawing/2014/main" id="{A8A7758C-EDA3-F7F6-5445-52C71655D4A2}"/>
+                </a:ext>
+              </a:extLst>
+            </p:cNvPr>
+            <p:cNvCxnSpPr>
+              <a:cxnSpLocks/>
+            </p:cNvCxnSpPr>
+            <p:nvPr/>
+          </p:nvCxnSpPr>
+          <p:spPr>
+            <a:xfrm>
+              <a:off x="923026" y="4517366"/>
+              <a:ext cx="2225616" cy="0"/>
+            </a:xfrm>
+            <a:prstGeom prst="line">
+              <a:avLst/>
+            </a:prstGeom>
+          </p:spPr>
+          <p:style>
+            <a:lnRef idx="2">
+              <a:schemeClr val="accent1"/>
+            </a:lnRef>
+            <a:fillRef idx="0">
+              <a:schemeClr val="accent1"/>
+            </a:fillRef>
+            <a:effectRef idx="1">
+              <a:schemeClr val="accent1"/>
+            </a:effectRef>
+            <a:fontRef idx="minor">
+              <a:schemeClr val="tx1"/>
+            </a:fontRef>
+          </p:style>
+        </p:cxnSp>
+        <p:sp>
+          <p:nvSpPr>
+            <p:cNvPr id="11" name="TextBox 10">
+              <a:extLst>
+                <a:ext uri="{FF2B5EF4-FFF2-40B4-BE49-F238E27FC236}">
+                  <a16:creationId xmlns:a16="http://schemas.microsoft.com/office/drawing/2014/main" id="{C3587DEC-CEB2-3D4F-250D-EF41617C17E3}"/>
+                </a:ext>
+              </a:extLst>
+            </p:cNvPr>
+            <p:cNvSpPr txBox="1"/>
+            <p:nvPr/>
+          </p:nvSpPr>
+          <p:spPr>
+            <a:xfrm>
+              <a:off x="1352416" y="458002"/>
+              <a:ext cx="1422634" cy="369332"/>
+            </a:xfrm>
+            <a:prstGeom prst="rect">
+              <a:avLst/>
+            </a:prstGeom>
+            <a:noFill/>
+          </p:spPr>
+          <p:txBody>
+            <a:bodyPr wrap="none" rtlCol="0">
+              <a:spAutoFit/>
+            </a:bodyPr>
+            <a:lstStyle/>
+            <a:p>
+              <a:r>
+                <a:rPr lang="en-US" dirty="0"/>
+                <a:t>Item name 3</a:t>
+              </a:r>
+            </a:p>
+          </p:txBody>
+        </p:sp>
+        <p:sp>
+          <p:nvSpPr>
+            <p:cNvPr id="12" name="TextBox 11">
+              <a:extLst>
+                <a:ext uri="{FF2B5EF4-FFF2-40B4-BE49-F238E27FC236}">
+                  <a16:creationId xmlns:a16="http://schemas.microsoft.com/office/drawing/2014/main" id="{53EEE1F4-1040-43C8-2E91-A13F31C9FC74}"/>
+                </a:ext>
+              </a:extLst>
+            </p:cNvPr>
+            <p:cNvSpPr txBox="1"/>
+            <p:nvPr/>
+          </p:nvSpPr>
+          <p:spPr>
+            <a:xfrm>
+              <a:off x="1324517" y="2364440"/>
+              <a:ext cx="1422634" cy="369332"/>
+            </a:xfrm>
+            <a:prstGeom prst="rect">
+              <a:avLst/>
+            </a:prstGeom>
+            <a:noFill/>
+          </p:spPr>
+          <p:txBody>
+            <a:bodyPr wrap="none" rtlCol="0">
+              <a:spAutoFit/>
+            </a:bodyPr>
+            <a:lstStyle/>
+            <a:p>
+              <a:r>
+                <a:rPr lang="en-US" dirty="0"/>
+                <a:t>Item name 2</a:t>
+              </a:r>
+            </a:p>
+          </p:txBody>
+        </p:sp>
+        <p:sp>
+          <p:nvSpPr>
+            <p:cNvPr id="13" name="TextBox 12">
+              <a:extLst>
+                <a:ext uri="{FF2B5EF4-FFF2-40B4-BE49-F238E27FC236}">
+                  <a16:creationId xmlns:a16="http://schemas.microsoft.com/office/drawing/2014/main" id="{34ED066B-4AE0-D085-4F97-F5735BDC46AA}"/>
+                </a:ext>
+              </a:extLst>
+            </p:cNvPr>
+            <p:cNvSpPr txBox="1"/>
+            <p:nvPr/>
+          </p:nvSpPr>
+          <p:spPr>
+            <a:xfrm>
+              <a:off x="1324517" y="4595805"/>
+              <a:ext cx="1422634" cy="369332"/>
+            </a:xfrm>
+            <a:prstGeom prst="rect">
+              <a:avLst/>
+            </a:prstGeom>
+            <a:noFill/>
+          </p:spPr>
+          <p:txBody>
+            <a:bodyPr wrap="none" rtlCol="0">
+              <a:spAutoFit/>
+            </a:bodyPr>
+            <a:lstStyle/>
+            <a:p>
+              <a:r>
+                <a:rPr lang="en-US" dirty="0"/>
+                <a:t>Item name 1</a:t>
+              </a:r>
+            </a:p>
+          </p:txBody>
+        </p:sp>
+        <p:cxnSp>
+          <p:nvCxnSpPr>
+            <p:cNvPr id="14" name="Straight Connector 13">
+              <a:extLst>
+                <a:ext uri="{FF2B5EF4-FFF2-40B4-BE49-F238E27FC236}">
+                  <a16:creationId xmlns:a16="http://schemas.microsoft.com/office/drawing/2014/main" id="{599736BE-3AD8-B308-46A1-F73985C6A980}"/>
+                </a:ext>
+              </a:extLst>
+            </p:cNvPr>
+            <p:cNvCxnSpPr/>
+            <p:nvPr/>
+          </p:nvCxnSpPr>
+          <p:spPr>
+            <a:xfrm>
+              <a:off x="9573535" y="379561"/>
+              <a:ext cx="0" cy="6159261"/>
+            </a:xfrm>
+            <a:prstGeom prst="line">
+              <a:avLst/>
+            </a:prstGeom>
+          </p:spPr>
+          <p:style>
+            <a:lnRef idx="2">
+              <a:schemeClr val="accent1"/>
+            </a:lnRef>
+            <a:fillRef idx="0">
+              <a:schemeClr val="accent1"/>
+            </a:fillRef>
+            <a:effectRef idx="1">
+              <a:schemeClr val="accent1"/>
+            </a:effectRef>
+            <a:fontRef idx="minor">
+              <a:schemeClr val="tx1"/>
+            </a:fontRef>
+          </p:style>
+        </p:cxnSp>
+        <p:sp>
+          <p:nvSpPr>
+            <p:cNvPr id="15" name="TextBox 14">
+              <a:extLst>
+                <a:ext uri="{FF2B5EF4-FFF2-40B4-BE49-F238E27FC236}">
+                  <a16:creationId xmlns:a16="http://schemas.microsoft.com/office/drawing/2014/main" id="{610A978A-D7CA-1AE0-D813-ACAD167B0314}"/>
+                </a:ext>
+              </a:extLst>
+            </p:cNvPr>
+            <p:cNvSpPr txBox="1"/>
+            <p:nvPr/>
+          </p:nvSpPr>
+          <p:spPr>
+            <a:xfrm>
+              <a:off x="10132257" y="379561"/>
+              <a:ext cx="696986" cy="369332"/>
+            </a:xfrm>
+            <a:prstGeom prst="rect">
+              <a:avLst/>
+            </a:prstGeom>
+            <a:noFill/>
+          </p:spPr>
+          <p:txBody>
+            <a:bodyPr wrap="none" rtlCol="0">
+              <a:spAutoFit/>
+            </a:bodyPr>
+            <a:lstStyle/>
+            <a:p>
+              <a:r>
+                <a:rPr lang="en-US" dirty="0"/>
+                <a:t>Stats</a:t>
+              </a:r>
+            </a:p>
+          </p:txBody>
+        </p:sp>
+        <p:sp>
+          <p:nvSpPr>
+            <p:cNvPr id="18" name="TextBox 17">
+              <a:extLst>
+                <a:ext uri="{FF2B5EF4-FFF2-40B4-BE49-F238E27FC236}">
+                  <a16:creationId xmlns:a16="http://schemas.microsoft.com/office/drawing/2014/main" id="{AAA25048-5C8F-7460-DF22-ECEA6E9498D0}"/>
+                </a:ext>
+              </a:extLst>
+            </p:cNvPr>
+            <p:cNvSpPr txBox="1"/>
+            <p:nvPr/>
+          </p:nvSpPr>
+          <p:spPr>
+            <a:xfrm>
+              <a:off x="9575321" y="1095555"/>
+              <a:ext cx="1832484" cy="2308324"/>
+            </a:xfrm>
+            <a:prstGeom prst="rect">
+              <a:avLst/>
+            </a:prstGeom>
+            <a:noFill/>
+          </p:spPr>
+          <p:txBody>
+            <a:bodyPr wrap="square" rtlCol="0">
+              <a:spAutoFit/>
+            </a:bodyPr>
+            <a:lstStyle/>
+            <a:p>
+              <a:r>
+                <a:rPr lang="en-US" dirty="0"/>
+                <a:t>HP</a:t>
+              </a:r>
+            </a:p>
+            <a:p>
+              <a:r>
+                <a:rPr lang="en-US" dirty="0"/>
+                <a:t>Fire rate</a:t>
+              </a:r>
+            </a:p>
+            <a:p>
+              <a:r>
+                <a:rPr lang="en-US" dirty="0"/>
+                <a:t>AOE</a:t>
+              </a:r>
+            </a:p>
+            <a:p>
+              <a:r>
+                <a:rPr lang="en-US" dirty="0"/>
+                <a:t>Armor pen %</a:t>
+              </a:r>
+            </a:p>
+            <a:p>
+              <a:r>
+                <a:rPr lang="en-US" dirty="0"/>
+                <a:t>Armor pen flat</a:t>
+              </a:r>
+            </a:p>
+            <a:p>
+              <a:r>
+                <a:rPr lang="en-US" dirty="0"/>
+                <a:t>All other stats that is global (not weapon tied</a:t>
+              </a:r>
+            </a:p>
+          </p:txBody>
+        </p:sp>
+      </p:grpSp>
+      <p:grpSp>
+        <p:nvGrpSpPr>
+          <p:cNvPr id="36" name="Group 35">
+            <a:extLst>
+              <a:ext uri="{FF2B5EF4-FFF2-40B4-BE49-F238E27FC236}">
+                <a16:creationId xmlns:a16="http://schemas.microsoft.com/office/drawing/2014/main" id="{B028262D-C2EB-4010-E75F-77FF8E005DA8}"/>
+              </a:ext>
+            </a:extLst>
+          </p:cNvPr>
+          <p:cNvGrpSpPr/>
+          <p:nvPr/>
+        </p:nvGrpSpPr>
+        <p:grpSpPr>
+          <a:xfrm>
+            <a:off x="3330102" y="568172"/>
+            <a:ext cx="6061973" cy="5910266"/>
+            <a:chOff x="3330102" y="568172"/>
+            <a:chExt cx="6061973" cy="5910266"/>
+          </a:xfrm>
+        </p:grpSpPr>
+        <p:sp>
+          <p:nvSpPr>
+            <p:cNvPr id="21" name="Rectangle 20">
+              <a:extLst>
+                <a:ext uri="{FF2B5EF4-FFF2-40B4-BE49-F238E27FC236}">
+                  <a16:creationId xmlns:a16="http://schemas.microsoft.com/office/drawing/2014/main" id="{6170ED45-9A27-1EB0-BBC8-E2C9C4E8F2B6}"/>
+                </a:ext>
+              </a:extLst>
+            </p:cNvPr>
+            <p:cNvSpPr/>
+            <p:nvPr/>
+          </p:nvSpPr>
+          <p:spPr>
+            <a:xfrm>
+              <a:off x="3959442" y="568172"/>
+              <a:ext cx="4971494" cy="3071674"/>
+            </a:xfrm>
+            <a:prstGeom prst="rect">
+              <a:avLst/>
+            </a:prstGeom>
+            <a:noFill/>
+          </p:spPr>
+          <p:style>
+            <a:lnRef idx="2">
+              <a:schemeClr val="accent1">
+                <a:shade val="15000"/>
+              </a:schemeClr>
+            </a:lnRef>
+            <a:fillRef idx="1">
+              <a:schemeClr val="accent1"/>
+            </a:fillRef>
+            <a:effectRef idx="0">
+              <a:schemeClr val="accent1"/>
+            </a:effectRef>
+            <a:fontRef idx="minor">
+              <a:schemeClr val="lt1"/>
+            </a:fontRef>
+          </p:style>
+          <p:txBody>
+            <a:bodyPr rtlCol="0" anchor="ctr"/>
+            <a:lstStyle/>
+            <a:p>
+              <a:pPr algn="ctr"/>
+              <a:endParaRPr lang="en-US"/>
+            </a:p>
+          </p:txBody>
+        </p:sp>
+        <p:sp>
+          <p:nvSpPr>
+            <p:cNvPr id="22" name="TextBox 21">
+              <a:extLst>
+                <a:ext uri="{FF2B5EF4-FFF2-40B4-BE49-F238E27FC236}">
+                  <a16:creationId xmlns:a16="http://schemas.microsoft.com/office/drawing/2014/main" id="{F2CB7667-B710-7A42-AF71-84D4224EE459}"/>
+                </a:ext>
+              </a:extLst>
+            </p:cNvPr>
+            <p:cNvSpPr txBox="1"/>
+            <p:nvPr/>
+          </p:nvSpPr>
+          <p:spPr>
+            <a:xfrm>
+              <a:off x="5747507" y="647370"/>
+              <a:ext cx="1559338" cy="369332"/>
+            </a:xfrm>
+            <a:prstGeom prst="rect">
+              <a:avLst/>
+            </a:prstGeom>
+            <a:noFill/>
+          </p:spPr>
+          <p:txBody>
+            <a:bodyPr wrap="none" rtlCol="0">
+              <a:spAutoFit/>
+            </a:bodyPr>
+            <a:lstStyle/>
+            <a:p>
+              <a:r>
+                <a:rPr lang="en-US" dirty="0"/>
+                <a:t>Selected item</a:t>
+              </a:r>
+            </a:p>
+          </p:txBody>
+        </p:sp>
+        <p:sp>
+          <p:nvSpPr>
+            <p:cNvPr id="23" name="Rectangle 22">
+              <a:extLst>
+                <a:ext uri="{FF2B5EF4-FFF2-40B4-BE49-F238E27FC236}">
+                  <a16:creationId xmlns:a16="http://schemas.microsoft.com/office/drawing/2014/main" id="{AE42066E-F87E-69DB-9A74-49ECAA4BFC30}"/>
+                </a:ext>
+              </a:extLst>
+            </p:cNvPr>
+            <p:cNvSpPr/>
+            <p:nvPr/>
+          </p:nvSpPr>
+          <p:spPr>
+            <a:xfrm>
+              <a:off x="3330102" y="3826276"/>
+              <a:ext cx="1796557" cy="2652162"/>
+            </a:xfrm>
+            <a:prstGeom prst="rect">
+              <a:avLst/>
+            </a:prstGeom>
+            <a:noFill/>
+          </p:spPr>
+          <p:style>
+            <a:lnRef idx="2">
+              <a:schemeClr val="accent1">
+                <a:shade val="15000"/>
+              </a:schemeClr>
+            </a:lnRef>
+            <a:fillRef idx="1">
+              <a:schemeClr val="accent1"/>
+            </a:fillRef>
+            <a:effectRef idx="0">
+              <a:schemeClr val="accent1"/>
+            </a:effectRef>
+            <a:fontRef idx="minor">
+              <a:schemeClr val="lt1"/>
+            </a:fontRef>
+          </p:style>
+          <p:txBody>
+            <a:bodyPr rtlCol="0" anchor="ctr"/>
+            <a:lstStyle/>
+            <a:p>
+              <a:pPr algn="ctr"/>
+              <a:endParaRPr lang="en-US"/>
+            </a:p>
+          </p:txBody>
+        </p:sp>
+        <p:sp>
+          <p:nvSpPr>
+            <p:cNvPr id="25" name="Rectangle 24">
+              <a:extLst>
+                <a:ext uri="{FF2B5EF4-FFF2-40B4-BE49-F238E27FC236}">
+                  <a16:creationId xmlns:a16="http://schemas.microsoft.com/office/drawing/2014/main" id="{40D8F5FB-CE47-F291-DF69-20A4C10BB0B2}"/>
+                </a:ext>
+              </a:extLst>
+            </p:cNvPr>
+            <p:cNvSpPr/>
+            <p:nvPr/>
+          </p:nvSpPr>
+          <p:spPr>
+            <a:xfrm>
+              <a:off x="5469554" y="3816030"/>
+              <a:ext cx="1796557" cy="2652162"/>
+            </a:xfrm>
+            <a:prstGeom prst="rect">
+              <a:avLst/>
+            </a:prstGeom>
+            <a:noFill/>
+          </p:spPr>
+          <p:style>
+            <a:lnRef idx="2">
+              <a:schemeClr val="accent1">
+                <a:shade val="15000"/>
+              </a:schemeClr>
+            </a:lnRef>
+            <a:fillRef idx="1">
+              <a:schemeClr val="accent1"/>
+            </a:fillRef>
+            <a:effectRef idx="0">
+              <a:schemeClr val="accent1"/>
+            </a:effectRef>
+            <a:fontRef idx="minor">
+              <a:schemeClr val="lt1"/>
+            </a:fontRef>
+          </p:style>
+          <p:txBody>
+            <a:bodyPr rtlCol="0" anchor="ctr"/>
+            <a:lstStyle/>
+            <a:p>
+              <a:pPr algn="ctr"/>
+              <a:endParaRPr lang="en-US"/>
+            </a:p>
+          </p:txBody>
+        </p:sp>
+        <p:sp>
+          <p:nvSpPr>
+            <p:cNvPr id="26" name="Rectangle 25">
+              <a:extLst>
+                <a:ext uri="{FF2B5EF4-FFF2-40B4-BE49-F238E27FC236}">
+                  <a16:creationId xmlns:a16="http://schemas.microsoft.com/office/drawing/2014/main" id="{63DE8D9D-016D-F52F-B2C4-A0F9D8AFD677}"/>
+                </a:ext>
+              </a:extLst>
+            </p:cNvPr>
+            <p:cNvSpPr/>
+            <p:nvPr/>
+          </p:nvSpPr>
+          <p:spPr>
+            <a:xfrm>
+              <a:off x="7595518" y="3816030"/>
+              <a:ext cx="1796557" cy="2652162"/>
+            </a:xfrm>
+            <a:prstGeom prst="rect">
+              <a:avLst/>
+            </a:prstGeom>
+            <a:noFill/>
+          </p:spPr>
+          <p:style>
+            <a:lnRef idx="2">
+              <a:schemeClr val="accent1">
+                <a:shade val="15000"/>
+              </a:schemeClr>
+            </a:lnRef>
+            <a:fillRef idx="1">
+              <a:schemeClr val="accent1"/>
+            </a:fillRef>
+            <a:effectRef idx="0">
+              <a:schemeClr val="accent1"/>
+            </a:effectRef>
+            <a:fontRef idx="minor">
+              <a:schemeClr val="lt1"/>
+            </a:fontRef>
+          </p:style>
+          <p:txBody>
+            <a:bodyPr rtlCol="0" anchor="ctr"/>
+            <a:lstStyle/>
+            <a:p>
+              <a:pPr algn="ctr"/>
+              <a:endParaRPr lang="en-US"/>
+            </a:p>
+          </p:txBody>
+        </p:sp>
+        <p:sp>
+          <p:nvSpPr>
+            <p:cNvPr id="27" name="TextBox 26">
+              <a:extLst>
+                <a:ext uri="{FF2B5EF4-FFF2-40B4-BE49-F238E27FC236}">
+                  <a16:creationId xmlns:a16="http://schemas.microsoft.com/office/drawing/2014/main" id="{797BF47C-F74A-BA0D-2E29-D3CA61754C89}"/>
+                </a:ext>
+              </a:extLst>
+            </p:cNvPr>
+            <p:cNvSpPr txBox="1"/>
+            <p:nvPr/>
+          </p:nvSpPr>
+          <p:spPr>
+            <a:xfrm>
+              <a:off x="3710449" y="3897297"/>
+              <a:ext cx="1035861" cy="369332"/>
+            </a:xfrm>
+            <a:prstGeom prst="rect">
+              <a:avLst/>
+            </a:prstGeom>
+            <a:noFill/>
+          </p:spPr>
+          <p:txBody>
+            <a:bodyPr wrap="none" rtlCol="0">
+              <a:spAutoFit/>
+            </a:bodyPr>
+            <a:lstStyle/>
+            <a:p>
+              <a:r>
+                <a:rPr lang="en-US" dirty="0"/>
+                <a:t>Option 1</a:t>
+              </a:r>
+            </a:p>
+          </p:txBody>
+        </p:sp>
+        <p:sp>
+          <p:nvSpPr>
+            <p:cNvPr id="28" name="TextBox 27">
+              <a:extLst>
+                <a:ext uri="{FF2B5EF4-FFF2-40B4-BE49-F238E27FC236}">
+                  <a16:creationId xmlns:a16="http://schemas.microsoft.com/office/drawing/2014/main" id="{571B7E5E-B2E1-CEEE-0F21-0D51F2E6609F}"/>
+                </a:ext>
+              </a:extLst>
+            </p:cNvPr>
+            <p:cNvSpPr txBox="1"/>
+            <p:nvPr/>
+          </p:nvSpPr>
+          <p:spPr>
+            <a:xfrm>
+              <a:off x="8004411" y="3897297"/>
+              <a:ext cx="1035861" cy="369332"/>
+            </a:xfrm>
+            <a:prstGeom prst="rect">
+              <a:avLst/>
+            </a:prstGeom>
+            <a:noFill/>
+          </p:spPr>
+          <p:txBody>
+            <a:bodyPr wrap="none" rtlCol="0">
+              <a:spAutoFit/>
+            </a:bodyPr>
+            <a:lstStyle/>
+            <a:p>
+              <a:r>
+                <a:rPr lang="en-US" dirty="0"/>
+                <a:t>Option 3</a:t>
+              </a:r>
+            </a:p>
+          </p:txBody>
+        </p:sp>
+        <p:sp>
+          <p:nvSpPr>
+            <p:cNvPr id="29" name="TextBox 28">
+              <a:extLst>
+                <a:ext uri="{FF2B5EF4-FFF2-40B4-BE49-F238E27FC236}">
+                  <a16:creationId xmlns:a16="http://schemas.microsoft.com/office/drawing/2014/main" id="{0216F73E-B20F-BC4D-FBF4-91DC4D318ABD}"/>
+                </a:ext>
+              </a:extLst>
+            </p:cNvPr>
+            <p:cNvSpPr txBox="1"/>
+            <p:nvPr/>
+          </p:nvSpPr>
+          <p:spPr>
+            <a:xfrm>
+              <a:off x="5877023" y="3897297"/>
+              <a:ext cx="1035861" cy="369332"/>
+            </a:xfrm>
+            <a:prstGeom prst="rect">
+              <a:avLst/>
+            </a:prstGeom>
+            <a:noFill/>
+          </p:spPr>
+          <p:txBody>
+            <a:bodyPr wrap="none" rtlCol="0">
+              <a:spAutoFit/>
+            </a:bodyPr>
+            <a:lstStyle/>
+            <a:p>
+              <a:r>
+                <a:rPr lang="en-US" dirty="0"/>
+                <a:t>Option 2</a:t>
+              </a:r>
+            </a:p>
+          </p:txBody>
+        </p:sp>
+        <p:sp>
+          <p:nvSpPr>
+            <p:cNvPr id="30" name="TextBox 29">
+              <a:extLst>
+                <a:ext uri="{FF2B5EF4-FFF2-40B4-BE49-F238E27FC236}">
+                  <a16:creationId xmlns:a16="http://schemas.microsoft.com/office/drawing/2014/main" id="{E9637BE8-0E92-D2CB-F118-61F63826FB95}"/>
+                </a:ext>
+              </a:extLst>
+            </p:cNvPr>
+            <p:cNvSpPr txBox="1"/>
+            <p:nvPr/>
+          </p:nvSpPr>
+          <p:spPr>
+            <a:xfrm>
+              <a:off x="3441220" y="4361455"/>
+              <a:ext cx="1469613" cy="646331"/>
+            </a:xfrm>
+            <a:prstGeom prst="rect">
+              <a:avLst/>
+            </a:prstGeom>
+            <a:noFill/>
+          </p:spPr>
+          <p:txBody>
+            <a:bodyPr wrap="square" rtlCol="0">
+              <a:spAutoFit/>
+            </a:bodyPr>
+            <a:lstStyle/>
+            <a:p>
+              <a:r>
+                <a:rPr lang="en-US" sz="1200" dirty="0"/>
+                <a:t>General description, short and bold big font</a:t>
+              </a:r>
+            </a:p>
+          </p:txBody>
+        </p:sp>
+        <p:sp>
+          <p:nvSpPr>
+            <p:cNvPr id="31" name="TextBox 30">
+              <a:extLst>
+                <a:ext uri="{FF2B5EF4-FFF2-40B4-BE49-F238E27FC236}">
+                  <a16:creationId xmlns:a16="http://schemas.microsoft.com/office/drawing/2014/main" id="{FFEFCF4D-C9DA-29C7-9091-6CE9EF910A36}"/>
+                </a:ext>
+              </a:extLst>
+            </p:cNvPr>
+            <p:cNvSpPr txBox="1"/>
+            <p:nvPr/>
+          </p:nvSpPr>
+          <p:spPr>
+            <a:xfrm>
+              <a:off x="3475067" y="5599519"/>
+              <a:ext cx="1469613" cy="523220"/>
+            </a:xfrm>
+            <a:prstGeom prst="rect">
+              <a:avLst/>
+            </a:prstGeom>
+            <a:noFill/>
+          </p:spPr>
+          <p:txBody>
+            <a:bodyPr wrap="square" rtlCol="0">
+              <a:spAutoFit/>
+            </a:bodyPr>
+            <a:lstStyle/>
+            <a:p>
+              <a:r>
+                <a:rPr lang="en-US" sz="700" dirty="0"/>
+                <a:t>Detailed explanation (if needs to, especially for key word effects like burn, bleed, electrocute, etc. Small light font in Italic</a:t>
+              </a:r>
+            </a:p>
+          </p:txBody>
+        </p:sp>
+        <p:sp>
+          <p:nvSpPr>
+            <p:cNvPr id="32" name="TextBox 31">
+              <a:extLst>
+                <a:ext uri="{FF2B5EF4-FFF2-40B4-BE49-F238E27FC236}">
+                  <a16:creationId xmlns:a16="http://schemas.microsoft.com/office/drawing/2014/main" id="{03FD3357-6DDD-21D7-F076-497C160667DE}"/>
+                </a:ext>
+              </a:extLst>
+            </p:cNvPr>
+            <p:cNvSpPr txBox="1"/>
+            <p:nvPr/>
+          </p:nvSpPr>
+          <p:spPr>
+            <a:xfrm>
+              <a:off x="7723573" y="4251393"/>
+              <a:ext cx="1469613" cy="646331"/>
+            </a:xfrm>
+            <a:prstGeom prst="rect">
+              <a:avLst/>
+            </a:prstGeom>
+            <a:noFill/>
+          </p:spPr>
+          <p:txBody>
+            <a:bodyPr wrap="square" rtlCol="0">
+              <a:spAutoFit/>
+            </a:bodyPr>
+            <a:lstStyle/>
+            <a:p>
+              <a:r>
+                <a:rPr lang="en-US" sz="1200" dirty="0"/>
+                <a:t>General description, short and bold big font</a:t>
+              </a:r>
+            </a:p>
+          </p:txBody>
+        </p:sp>
+        <p:sp>
+          <p:nvSpPr>
+            <p:cNvPr id="33" name="TextBox 32">
+              <a:extLst>
+                <a:ext uri="{FF2B5EF4-FFF2-40B4-BE49-F238E27FC236}">
+                  <a16:creationId xmlns:a16="http://schemas.microsoft.com/office/drawing/2014/main" id="{4FFA6046-52C0-29D8-4064-09DE54382767}"/>
+                </a:ext>
+              </a:extLst>
+            </p:cNvPr>
+            <p:cNvSpPr txBox="1"/>
+            <p:nvPr/>
+          </p:nvSpPr>
+          <p:spPr>
+            <a:xfrm>
+              <a:off x="5621126" y="5599519"/>
+              <a:ext cx="1469613" cy="523220"/>
+            </a:xfrm>
+            <a:prstGeom prst="rect">
+              <a:avLst/>
+            </a:prstGeom>
+            <a:noFill/>
+          </p:spPr>
+          <p:txBody>
+            <a:bodyPr wrap="square" rtlCol="0">
+              <a:spAutoFit/>
+            </a:bodyPr>
+            <a:lstStyle/>
+            <a:p>
+              <a:r>
+                <a:rPr lang="en-US" sz="700" dirty="0"/>
+                <a:t>Detailed explanation (if needs to, especially for key word effects like burn, bleed, electrocute, etc. Small light font in Italic</a:t>
+              </a:r>
+            </a:p>
+          </p:txBody>
+        </p:sp>
+        <p:sp>
+          <p:nvSpPr>
+            <p:cNvPr id="34" name="TextBox 33">
+              <a:extLst>
+                <a:ext uri="{FF2B5EF4-FFF2-40B4-BE49-F238E27FC236}">
+                  <a16:creationId xmlns:a16="http://schemas.microsoft.com/office/drawing/2014/main" id="{CB3A51E6-4B2A-0182-5EC7-780E6E4B3DBA}"/>
+                </a:ext>
+              </a:extLst>
+            </p:cNvPr>
+            <p:cNvSpPr txBox="1"/>
+            <p:nvPr/>
+          </p:nvSpPr>
+          <p:spPr>
+            <a:xfrm>
+              <a:off x="5739679" y="4513855"/>
+              <a:ext cx="1469613" cy="646331"/>
+            </a:xfrm>
+            <a:prstGeom prst="rect">
+              <a:avLst/>
+            </a:prstGeom>
+            <a:noFill/>
+          </p:spPr>
+          <p:txBody>
+            <a:bodyPr wrap="square" rtlCol="0">
+              <a:spAutoFit/>
+            </a:bodyPr>
+            <a:lstStyle/>
+            <a:p>
+              <a:r>
+                <a:rPr lang="en-US" sz="1200" dirty="0"/>
+                <a:t>General description, short and bold big font</a:t>
+              </a:r>
+            </a:p>
+          </p:txBody>
+        </p:sp>
+        <p:sp>
+          <p:nvSpPr>
+            <p:cNvPr id="35" name="TextBox 34">
+              <a:extLst>
+                <a:ext uri="{FF2B5EF4-FFF2-40B4-BE49-F238E27FC236}">
+                  <a16:creationId xmlns:a16="http://schemas.microsoft.com/office/drawing/2014/main" id="{D9A5FD71-C663-8386-8113-8B3EF7419D98}"/>
+                </a:ext>
+              </a:extLst>
+            </p:cNvPr>
+            <p:cNvSpPr txBox="1"/>
+            <p:nvPr/>
+          </p:nvSpPr>
+          <p:spPr>
+            <a:xfrm>
+              <a:off x="7909820" y="5641857"/>
+              <a:ext cx="1469613" cy="523220"/>
+            </a:xfrm>
+            <a:prstGeom prst="rect">
+              <a:avLst/>
+            </a:prstGeom>
+            <a:noFill/>
+          </p:spPr>
+          <p:txBody>
+            <a:bodyPr wrap="square" rtlCol="0">
+              <a:spAutoFit/>
+            </a:bodyPr>
+            <a:lstStyle/>
+            <a:p>
+              <a:r>
+                <a:rPr lang="en-US" sz="700" dirty="0"/>
+                <a:t>Detailed explanation (if needs to, especially for key word effects like burn, bleed, electrocute, etc. Small light font in Italic</a:t>
+              </a:r>
+            </a:p>
+          </p:txBody>
+        </p:sp>
+      </p:grpSp>
+    </p:spTree>
+    <p:extLst>
+      <p:ext uri="{BB962C8B-B14F-4D97-AF65-F5344CB8AC3E}">
+        <p14:creationId xmlns:p14="http://schemas.microsoft.com/office/powerpoint/2010/main" val="1441764683"/>
+      </p:ext>
+    </p:extLst>
+  </p:cSld>
+  <p:clrMapOvr>
+    <a:masterClrMapping/>
+  </p:clrMapOvr>
+</p:sld>
+</file>
+
+<file path=ppt/slides/slide4.xml><?xml version="1.0" encoding="utf-8"?>
+<p:sld xmlns:a="http://schemas.openxmlformats.org/drawingml/2006/main" xmlns:r="http://schemas.openxmlformats.org/officeDocument/2006/relationships" xmlns:p="http://schemas.openxmlformats.org/presentationml/2006/main">
+  <p:cSld>
+    <p:spTree>
+      <p:nvGrpSpPr>
+        <p:cNvPr id="1" name=""/>
+        <p:cNvGrpSpPr/>
+        <p:nvPr/>
+      </p:nvGrpSpPr>
+      <p:grpSpPr>
+        <a:xfrm>
+          <a:off x="0" y="0"/>
+          <a:ext cx="0" cy="0"/>
+          <a:chOff x="0" y="0"/>
+          <a:chExt cx="0" cy="0"/>
+        </a:xfrm>
+      </p:grpSpPr>
+      <p:pic>
+        <p:nvPicPr>
+          <p:cNvPr id="3" name="Picture 2">
+            <a:extLst>
+              <a:ext uri="{FF2B5EF4-FFF2-40B4-BE49-F238E27FC236}">
+                <a16:creationId xmlns:a16="http://schemas.microsoft.com/office/drawing/2014/main" id="{B7F5261D-08F5-86F6-475A-19F5928B03B7}"/>
+              </a:ext>
+            </a:extLst>
+          </p:cNvPr>
+          <p:cNvPicPr>
+            <a:picLocks noChangeAspect="1"/>
+          </p:cNvPicPr>
+          <p:nvPr/>
+        </p:nvPicPr>
+        <p:blipFill>
+          <a:blip r:embed="rId2"/>
+          <a:stretch>
+            <a:fillRect/>
+          </a:stretch>
+        </p:blipFill>
+        <p:spPr>
+          <a:xfrm>
+            <a:off x="761537" y="328915"/>
+            <a:ext cx="10668925" cy="6200169"/>
+          </a:xfrm>
+          <a:prstGeom prst="rect">
+            <a:avLst/>
+          </a:prstGeom>
+        </p:spPr>
+      </p:pic>
+    </p:spTree>
+    <p:extLst>
+      <p:ext uri="{BB962C8B-B14F-4D97-AF65-F5344CB8AC3E}">
+        <p14:creationId xmlns:p14="http://schemas.microsoft.com/office/powerpoint/2010/main" val="2249671187"/>
+      </p:ext>
+    </p:extLst>
+  </p:cSld>
+  <p:clrMapOvr>
+    <a:masterClrMapping/>
+  </p:clrMapOvr>
+</p:sld>
+</file>
+
+<file path=ppt/slides/slide5.xml><?xml version="1.0" encoding="utf-8"?>
+<p:sld xmlns:a="http://schemas.openxmlformats.org/drawingml/2006/main" xmlns:r="http://schemas.openxmlformats.org/officeDocument/2006/relationships" xmlns:p="http://schemas.openxmlformats.org/presentationml/2006/main">
+  <p:cSld>
+    <p:spTree>
+      <p:nvGrpSpPr>
+        <p:cNvPr id="1" name=""/>
+        <p:cNvGrpSpPr/>
+        <p:nvPr/>
+      </p:nvGrpSpPr>
+      <p:grpSpPr>
+        <a:xfrm>
+          <a:off x="0" y="0"/>
+          <a:ext cx="0" cy="0"/>
+          <a:chOff x="0" y="0"/>
+          <a:chExt cx="0" cy="0"/>
+        </a:xfrm>
+      </p:grpSpPr>
+      <p:sp>
+        <p:nvSpPr>
+          <p:cNvPr id="2" name="Rectangle 1">
+            <a:extLst>
+              <a:ext uri="{FF2B5EF4-FFF2-40B4-BE49-F238E27FC236}">
+                <a16:creationId xmlns:a16="http://schemas.microsoft.com/office/drawing/2014/main" id="{F8F77FC7-A7C0-3FEC-46F0-41BEB9FD0477}"/>
+              </a:ext>
+            </a:extLst>
+          </p:cNvPr>
+          <p:cNvSpPr/>
+          <p:nvPr/>
+        </p:nvSpPr>
+        <p:spPr>
+          <a:xfrm>
+            <a:off x="1588698" y="370936"/>
+            <a:ext cx="9014604" cy="5676181"/>
+          </a:xfrm>
+          <a:prstGeom prst="rect">
+            <a:avLst/>
+          </a:prstGeom>
+          <a:solidFill>
+            <a:schemeClr val="bg1"/>
+          </a:solidFill>
+        </p:spPr>
+        <p:style>
+          <a:lnRef idx="2">
+            <a:schemeClr val="accent1">
+              <a:shade val="15000"/>
+            </a:schemeClr>
+          </a:lnRef>
+          <a:fillRef idx="1">
+            <a:schemeClr val="accent1"/>
+          </a:fillRef>
+          <a:effectRef idx="0">
+            <a:schemeClr val="accent1"/>
+          </a:effectRef>
+          <a:fontRef idx="minor">
+            <a:schemeClr val="lt1"/>
+          </a:fontRef>
+        </p:style>
+        <p:txBody>
+          <a:bodyPr rtlCol="0" anchor="ctr"/>
+          <a:lstStyle/>
+          <a:p>
+            <a:pPr algn="ctr"/>
+            <a:endParaRPr lang="en-US" dirty="0"/>
+          </a:p>
+        </p:txBody>
+      </p:sp>
+      <p:cxnSp>
+        <p:nvCxnSpPr>
+          <p:cNvPr id="4" name="Straight Connector 3">
+            <a:extLst>
+              <a:ext uri="{FF2B5EF4-FFF2-40B4-BE49-F238E27FC236}">
+                <a16:creationId xmlns:a16="http://schemas.microsoft.com/office/drawing/2014/main" id="{C756B3DE-ACD7-F824-6B6A-05835C060463}"/>
+              </a:ext>
+            </a:extLst>
+          </p:cNvPr>
+          <p:cNvCxnSpPr/>
+          <p:nvPr/>
+        </p:nvCxnSpPr>
+        <p:spPr>
+          <a:xfrm flipV="1">
+            <a:off x="3347049" y="5598535"/>
+            <a:ext cx="293298" cy="431321"/>
+          </a:xfrm>
+          <a:prstGeom prst="line">
+            <a:avLst/>
+          </a:prstGeom>
+        </p:spPr>
+        <p:style>
+          <a:lnRef idx="2">
+            <a:schemeClr val="accent1"/>
+          </a:lnRef>
+          <a:fillRef idx="0">
+            <a:schemeClr val="accent1"/>
+          </a:fillRef>
+          <a:effectRef idx="1">
+            <a:schemeClr val="accent1"/>
+          </a:effectRef>
+          <a:fontRef idx="minor">
+            <a:schemeClr val="tx1"/>
+          </a:fontRef>
+        </p:style>
+      </p:cxnSp>
+      <p:cxnSp>
+        <p:nvCxnSpPr>
+          <p:cNvPr id="5" name="Straight Connector 4">
+            <a:extLst>
+              <a:ext uri="{FF2B5EF4-FFF2-40B4-BE49-F238E27FC236}">
+                <a16:creationId xmlns:a16="http://schemas.microsoft.com/office/drawing/2014/main" id="{891992E0-581A-C8EB-954E-BA9AD851ABA8}"/>
+              </a:ext>
+            </a:extLst>
+          </p:cNvPr>
+          <p:cNvCxnSpPr>
+            <a:cxnSpLocks/>
+          </p:cNvCxnSpPr>
+          <p:nvPr/>
+        </p:nvCxnSpPr>
+        <p:spPr>
+          <a:xfrm flipH="1" flipV="1">
+            <a:off x="8617789" y="5598535"/>
+            <a:ext cx="376687" cy="439947"/>
+          </a:xfrm>
+          <a:prstGeom prst="line">
+            <a:avLst/>
+          </a:prstGeom>
+        </p:spPr>
+        <p:style>
+          <a:lnRef idx="2">
+            <a:schemeClr val="accent1"/>
+          </a:lnRef>
+          <a:fillRef idx="0">
+            <a:schemeClr val="accent1"/>
+          </a:fillRef>
+          <a:effectRef idx="1">
+            <a:schemeClr val="accent1"/>
+          </a:effectRef>
+          <a:fontRef idx="minor">
+            <a:schemeClr val="tx1"/>
+          </a:fontRef>
+        </p:style>
+      </p:cxnSp>
+      <p:cxnSp>
+        <p:nvCxnSpPr>
+          <p:cNvPr id="8" name="Straight Connector 7">
+            <a:extLst>
+              <a:ext uri="{FF2B5EF4-FFF2-40B4-BE49-F238E27FC236}">
+                <a16:creationId xmlns:a16="http://schemas.microsoft.com/office/drawing/2014/main" id="{4C1B0340-3A95-9810-4643-3797EE6B55AE}"/>
+              </a:ext>
+            </a:extLst>
+          </p:cNvPr>
+          <p:cNvCxnSpPr>
+            <a:cxnSpLocks/>
+          </p:cNvCxnSpPr>
+          <p:nvPr/>
+        </p:nvCxnSpPr>
+        <p:spPr>
+          <a:xfrm flipH="1">
+            <a:off x="3640347" y="5598535"/>
+            <a:ext cx="4977442" cy="0"/>
+          </a:xfrm>
+          <a:prstGeom prst="line">
+            <a:avLst/>
+          </a:prstGeom>
+        </p:spPr>
+        <p:style>
+          <a:lnRef idx="2">
+            <a:schemeClr val="accent1"/>
+          </a:lnRef>
+          <a:fillRef idx="0">
+            <a:schemeClr val="accent1"/>
+          </a:fillRef>
+          <a:effectRef idx="1">
+            <a:schemeClr val="accent1"/>
+          </a:effectRef>
+          <a:fontRef idx="minor">
+            <a:schemeClr val="tx1"/>
+          </a:fontRef>
+        </p:style>
+      </p:cxnSp>
+      <p:grpSp>
+        <p:nvGrpSpPr>
+          <p:cNvPr id="19" name="Group 18">
+            <a:extLst>
+              <a:ext uri="{FF2B5EF4-FFF2-40B4-BE49-F238E27FC236}">
+                <a16:creationId xmlns:a16="http://schemas.microsoft.com/office/drawing/2014/main" id="{0B70A6F6-CA4A-5E14-A2B1-4EC5FC785AE4}"/>
+              </a:ext>
+            </a:extLst>
+          </p:cNvPr>
+          <p:cNvGrpSpPr/>
+          <p:nvPr/>
+        </p:nvGrpSpPr>
+        <p:grpSpPr>
+          <a:xfrm rot="16200000">
+            <a:off x="8672423" y="2908540"/>
+            <a:ext cx="3421812" cy="439947"/>
+            <a:chOff x="3499449" y="5759570"/>
+            <a:chExt cx="5647427" cy="439947"/>
+          </a:xfrm>
+        </p:grpSpPr>
+        <p:cxnSp>
+          <p:nvCxnSpPr>
+            <p:cNvPr id="20" name="Straight Connector 19">
+              <a:extLst>
+                <a:ext uri="{FF2B5EF4-FFF2-40B4-BE49-F238E27FC236}">
+                  <a16:creationId xmlns:a16="http://schemas.microsoft.com/office/drawing/2014/main" id="{2E37B8BF-EF94-7861-B64F-70D49F88A1EE}"/>
+                </a:ext>
+              </a:extLst>
+            </p:cNvPr>
+            <p:cNvCxnSpPr/>
+            <p:nvPr/>
+          </p:nvCxnSpPr>
+          <p:spPr>
+            <a:xfrm flipV="1">
+              <a:off x="3499449" y="5759570"/>
+              <a:ext cx="293298" cy="431321"/>
+            </a:xfrm>
+            <a:prstGeom prst="line">
+              <a:avLst/>
+            </a:prstGeom>
+          </p:spPr>
+          <p:style>
+            <a:lnRef idx="2">
+              <a:schemeClr val="accent1"/>
+            </a:lnRef>
+            <a:fillRef idx="0">
+              <a:schemeClr val="accent1"/>
+            </a:fillRef>
+            <a:effectRef idx="1">
+              <a:schemeClr val="accent1"/>
+            </a:effectRef>
+            <a:fontRef idx="minor">
+              <a:schemeClr val="tx1"/>
+            </a:fontRef>
+          </p:style>
+        </p:cxnSp>
+        <p:cxnSp>
+          <p:nvCxnSpPr>
+            <p:cNvPr id="21" name="Straight Connector 20">
+              <a:extLst>
+                <a:ext uri="{FF2B5EF4-FFF2-40B4-BE49-F238E27FC236}">
+                  <a16:creationId xmlns:a16="http://schemas.microsoft.com/office/drawing/2014/main" id="{F4EF7149-51D9-2197-EF93-1997115F33AF}"/>
+                </a:ext>
+              </a:extLst>
+            </p:cNvPr>
+            <p:cNvCxnSpPr>
+              <a:cxnSpLocks/>
+            </p:cNvCxnSpPr>
+            <p:nvPr/>
+          </p:nvCxnSpPr>
+          <p:spPr>
+            <a:xfrm flipH="1" flipV="1">
+              <a:off x="8770189" y="5759570"/>
+              <a:ext cx="376687" cy="439947"/>
+            </a:xfrm>
+            <a:prstGeom prst="line">
+              <a:avLst/>
+            </a:prstGeom>
+          </p:spPr>
+          <p:style>
+            <a:lnRef idx="2">
+              <a:schemeClr val="accent1"/>
+            </a:lnRef>
+            <a:fillRef idx="0">
+              <a:schemeClr val="accent1"/>
+            </a:fillRef>
+            <a:effectRef idx="1">
+              <a:schemeClr val="accent1"/>
+            </a:effectRef>
+            <a:fontRef idx="minor">
+              <a:schemeClr val="tx1"/>
+            </a:fontRef>
+          </p:style>
+        </p:cxnSp>
+        <p:cxnSp>
+          <p:nvCxnSpPr>
+            <p:cNvPr id="22" name="Straight Connector 21">
+              <a:extLst>
+                <a:ext uri="{FF2B5EF4-FFF2-40B4-BE49-F238E27FC236}">
+                  <a16:creationId xmlns:a16="http://schemas.microsoft.com/office/drawing/2014/main" id="{ECE49785-5D2E-7995-C7C6-3D1B961FEAF3}"/>
+                </a:ext>
+              </a:extLst>
+            </p:cNvPr>
+            <p:cNvCxnSpPr>
+              <a:cxnSpLocks/>
+            </p:cNvCxnSpPr>
+            <p:nvPr/>
+          </p:nvCxnSpPr>
+          <p:spPr>
+            <a:xfrm flipH="1">
+              <a:off x="3792747" y="5759570"/>
+              <a:ext cx="4977442" cy="0"/>
+            </a:xfrm>
+            <a:prstGeom prst="line">
+              <a:avLst/>
+            </a:prstGeom>
+          </p:spPr>
+          <p:style>
+            <a:lnRef idx="2">
+              <a:schemeClr val="accent1"/>
+            </a:lnRef>
+            <a:fillRef idx="0">
+              <a:schemeClr val="accent1"/>
+            </a:fillRef>
+            <a:effectRef idx="1">
+              <a:schemeClr val="accent1"/>
+            </a:effectRef>
+            <a:fontRef idx="minor">
+              <a:schemeClr val="tx1"/>
+            </a:fontRef>
+          </p:style>
+        </p:cxnSp>
+      </p:grpSp>
+      <p:grpSp>
+        <p:nvGrpSpPr>
+          <p:cNvPr id="23" name="Group 22">
+            <a:extLst>
+              <a:ext uri="{FF2B5EF4-FFF2-40B4-BE49-F238E27FC236}">
+                <a16:creationId xmlns:a16="http://schemas.microsoft.com/office/drawing/2014/main" id="{075E268B-2C8D-505A-329B-0EE3F35CF221}"/>
+              </a:ext>
+            </a:extLst>
+          </p:cNvPr>
+          <p:cNvGrpSpPr/>
+          <p:nvPr/>
+        </p:nvGrpSpPr>
+        <p:grpSpPr>
+          <a:xfrm rot="5400000">
+            <a:off x="106391" y="2989053"/>
+            <a:ext cx="3421812" cy="439947"/>
+            <a:chOff x="3499449" y="5759570"/>
+            <a:chExt cx="5647427" cy="439947"/>
+          </a:xfrm>
+        </p:grpSpPr>
+        <p:cxnSp>
+          <p:nvCxnSpPr>
+            <p:cNvPr id="24" name="Straight Connector 23">
+              <a:extLst>
+                <a:ext uri="{FF2B5EF4-FFF2-40B4-BE49-F238E27FC236}">
+                  <a16:creationId xmlns:a16="http://schemas.microsoft.com/office/drawing/2014/main" id="{BEE9DA21-708E-6427-2CAA-69BE608EC12B}"/>
+                </a:ext>
+              </a:extLst>
+            </p:cNvPr>
+            <p:cNvCxnSpPr/>
+            <p:nvPr/>
+          </p:nvCxnSpPr>
+          <p:spPr>
+            <a:xfrm flipV="1">
+              <a:off x="3499449" y="5759570"/>
+              <a:ext cx="293298" cy="431321"/>
+            </a:xfrm>
+            <a:prstGeom prst="line">
+              <a:avLst/>
+            </a:prstGeom>
+          </p:spPr>
+          <p:style>
+            <a:lnRef idx="2">
+              <a:schemeClr val="accent1"/>
+            </a:lnRef>
+            <a:fillRef idx="0">
+              <a:schemeClr val="accent1"/>
+            </a:fillRef>
+            <a:effectRef idx="1">
+              <a:schemeClr val="accent1"/>
+            </a:effectRef>
+            <a:fontRef idx="minor">
+              <a:schemeClr val="tx1"/>
+            </a:fontRef>
+          </p:style>
+        </p:cxnSp>
+        <p:cxnSp>
+          <p:nvCxnSpPr>
+            <p:cNvPr id="25" name="Straight Connector 24">
+              <a:extLst>
+                <a:ext uri="{FF2B5EF4-FFF2-40B4-BE49-F238E27FC236}">
+                  <a16:creationId xmlns:a16="http://schemas.microsoft.com/office/drawing/2014/main" id="{6D8639F4-E9BA-18BF-4CCB-F18CAE7F984C}"/>
+                </a:ext>
+              </a:extLst>
+            </p:cNvPr>
+            <p:cNvCxnSpPr>
+              <a:cxnSpLocks/>
+            </p:cNvCxnSpPr>
+            <p:nvPr/>
+          </p:nvCxnSpPr>
+          <p:spPr>
+            <a:xfrm flipH="1" flipV="1">
+              <a:off x="8770189" y="5759570"/>
+              <a:ext cx="376687" cy="439947"/>
+            </a:xfrm>
+            <a:prstGeom prst="line">
+              <a:avLst/>
+            </a:prstGeom>
+          </p:spPr>
+          <p:style>
+            <a:lnRef idx="2">
+              <a:schemeClr val="accent1"/>
+            </a:lnRef>
+            <a:fillRef idx="0">
+              <a:schemeClr val="accent1"/>
+            </a:fillRef>
+            <a:effectRef idx="1">
+              <a:schemeClr val="accent1"/>
+            </a:effectRef>
+            <a:fontRef idx="minor">
+              <a:schemeClr val="tx1"/>
+            </a:fontRef>
+          </p:style>
+        </p:cxnSp>
+        <p:cxnSp>
+          <p:nvCxnSpPr>
+            <p:cNvPr id="26" name="Straight Connector 25">
+              <a:extLst>
+                <a:ext uri="{FF2B5EF4-FFF2-40B4-BE49-F238E27FC236}">
+                  <a16:creationId xmlns:a16="http://schemas.microsoft.com/office/drawing/2014/main" id="{E8824670-7153-463D-8474-43225C1E050A}"/>
+                </a:ext>
+              </a:extLst>
+            </p:cNvPr>
+            <p:cNvCxnSpPr>
+              <a:cxnSpLocks/>
+            </p:cNvCxnSpPr>
+            <p:nvPr/>
+          </p:nvCxnSpPr>
+          <p:spPr>
+            <a:xfrm flipH="1">
+              <a:off x="3792747" y="5759570"/>
+              <a:ext cx="4977442" cy="0"/>
+            </a:xfrm>
+            <a:prstGeom prst="line">
+              <a:avLst/>
+            </a:prstGeom>
+          </p:spPr>
+          <p:style>
+            <a:lnRef idx="2">
+              <a:schemeClr val="accent1"/>
+            </a:lnRef>
+            <a:fillRef idx="0">
+              <a:schemeClr val="accent1"/>
+            </a:fillRef>
+            <a:effectRef idx="1">
+              <a:schemeClr val="accent1"/>
+            </a:effectRef>
+            <a:fontRef idx="minor">
+              <a:schemeClr val="tx1"/>
+            </a:fontRef>
+          </p:style>
+        </p:cxnSp>
+      </p:grpSp>
+      <p:sp>
+        <p:nvSpPr>
+          <p:cNvPr id="27" name="Rectangle 26">
+            <a:extLst>
+              <a:ext uri="{FF2B5EF4-FFF2-40B4-BE49-F238E27FC236}">
+                <a16:creationId xmlns:a16="http://schemas.microsoft.com/office/drawing/2014/main" id="{6EDF10A6-489B-FD26-1D02-F70B79701802}"/>
+              </a:ext>
+            </a:extLst>
+          </p:cNvPr>
+          <p:cNvSpPr/>
+          <p:nvPr/>
+        </p:nvSpPr>
+        <p:spPr>
+          <a:xfrm>
+            <a:off x="1647644" y="1976524"/>
+            <a:ext cx="330681" cy="379561"/>
+          </a:xfrm>
+          <a:prstGeom prst="rect">
+            <a:avLst/>
+          </a:prstGeom>
+          <a:solidFill>
+            <a:schemeClr val="bg1"/>
+          </a:solidFill>
+        </p:spPr>
+        <p:style>
+          <a:lnRef idx="2">
+            <a:schemeClr val="accent1">
+              <a:shade val="15000"/>
+            </a:schemeClr>
+          </a:lnRef>
+          <a:fillRef idx="1">
+            <a:schemeClr val="accent1"/>
+          </a:fillRef>
+          <a:effectRef idx="0">
+            <a:schemeClr val="accent1"/>
+          </a:effectRef>
+          <a:fontRef idx="minor">
+            <a:schemeClr val="lt1"/>
+          </a:fontRef>
+        </p:style>
+        <p:txBody>
+          <a:bodyPr rtlCol="0" anchor="ctr"/>
+          <a:lstStyle/>
+          <a:p>
+            <a:pPr algn="ctr"/>
+            <a:endParaRPr lang="en-US"/>
+          </a:p>
+        </p:txBody>
+      </p:sp>
+      <p:sp>
+        <p:nvSpPr>
+          <p:cNvPr id="28" name="Rectangle 27">
+            <a:extLst>
+              <a:ext uri="{FF2B5EF4-FFF2-40B4-BE49-F238E27FC236}">
+                <a16:creationId xmlns:a16="http://schemas.microsoft.com/office/drawing/2014/main" id="{325B135E-1A89-676F-18A1-F2A58A407FAB}"/>
+              </a:ext>
+            </a:extLst>
+          </p:cNvPr>
+          <p:cNvSpPr/>
+          <p:nvPr/>
+        </p:nvSpPr>
+        <p:spPr>
+          <a:xfrm>
+            <a:off x="1647643" y="2540116"/>
+            <a:ext cx="330681" cy="379561"/>
+          </a:xfrm>
+          <a:prstGeom prst="rect">
+            <a:avLst/>
+          </a:prstGeom>
+          <a:solidFill>
+            <a:schemeClr val="bg1"/>
+          </a:solidFill>
+        </p:spPr>
+        <p:style>
+          <a:lnRef idx="2">
+            <a:schemeClr val="accent1">
+              <a:shade val="15000"/>
+            </a:schemeClr>
+          </a:lnRef>
+          <a:fillRef idx="1">
+            <a:schemeClr val="accent1"/>
+          </a:fillRef>
+          <a:effectRef idx="0">
+            <a:schemeClr val="accent1"/>
+          </a:effectRef>
+          <a:fontRef idx="minor">
+            <a:schemeClr val="lt1"/>
+          </a:fontRef>
+        </p:style>
+        <p:txBody>
+          <a:bodyPr rtlCol="0" anchor="ctr"/>
+          <a:lstStyle/>
+          <a:p>
+            <a:pPr algn="ctr"/>
+            <a:endParaRPr lang="en-US"/>
+          </a:p>
+        </p:txBody>
+      </p:sp>
+      <p:sp>
+        <p:nvSpPr>
+          <p:cNvPr id="29" name="Rectangle 28">
+            <a:extLst>
+              <a:ext uri="{FF2B5EF4-FFF2-40B4-BE49-F238E27FC236}">
+                <a16:creationId xmlns:a16="http://schemas.microsoft.com/office/drawing/2014/main" id="{7F5083D5-4D90-221A-1860-C91F586672B0}"/>
+              </a:ext>
+            </a:extLst>
+          </p:cNvPr>
+          <p:cNvSpPr/>
+          <p:nvPr/>
+        </p:nvSpPr>
+        <p:spPr>
+          <a:xfrm>
+            <a:off x="1656270" y="3153776"/>
+            <a:ext cx="330681" cy="329493"/>
+          </a:xfrm>
+          <a:prstGeom prst="rect">
+            <a:avLst/>
+          </a:prstGeom>
+          <a:solidFill>
+            <a:schemeClr val="bg1"/>
+          </a:solidFill>
+        </p:spPr>
+        <p:style>
+          <a:lnRef idx="2">
+            <a:schemeClr val="accent1">
+              <a:shade val="15000"/>
+            </a:schemeClr>
+          </a:lnRef>
+          <a:fillRef idx="1">
+            <a:schemeClr val="accent1"/>
+          </a:fillRef>
+          <a:effectRef idx="0">
+            <a:schemeClr val="accent1"/>
+          </a:effectRef>
+          <a:fontRef idx="minor">
+            <a:schemeClr val="lt1"/>
+          </a:fontRef>
+        </p:style>
+        <p:txBody>
+          <a:bodyPr rtlCol="0" anchor="ctr"/>
+          <a:lstStyle/>
+          <a:p>
+            <a:pPr algn="ctr"/>
+            <a:endParaRPr lang="en-US"/>
+          </a:p>
+        </p:txBody>
+      </p:sp>
+      <p:sp>
+        <p:nvSpPr>
+          <p:cNvPr id="30" name="Rectangle 29">
+            <a:extLst>
+              <a:ext uri="{FF2B5EF4-FFF2-40B4-BE49-F238E27FC236}">
+                <a16:creationId xmlns:a16="http://schemas.microsoft.com/office/drawing/2014/main" id="{A667434D-8703-62DE-6615-3E4DB821B627}"/>
+              </a:ext>
+            </a:extLst>
+          </p:cNvPr>
+          <p:cNvSpPr/>
+          <p:nvPr/>
+        </p:nvSpPr>
+        <p:spPr>
+          <a:xfrm>
+            <a:off x="1656270" y="3738934"/>
+            <a:ext cx="330681" cy="329493"/>
+          </a:xfrm>
+          <a:prstGeom prst="rect">
+            <a:avLst/>
+          </a:prstGeom>
+          <a:solidFill>
+            <a:schemeClr val="bg1"/>
+          </a:solidFill>
+        </p:spPr>
+        <p:style>
+          <a:lnRef idx="2">
+            <a:schemeClr val="accent1">
+              <a:shade val="15000"/>
+            </a:schemeClr>
+          </a:lnRef>
+          <a:fillRef idx="1">
+            <a:schemeClr val="accent1"/>
+          </a:fillRef>
+          <a:effectRef idx="0">
+            <a:schemeClr val="accent1"/>
+          </a:effectRef>
+          <a:fontRef idx="minor">
+            <a:schemeClr val="lt1"/>
+          </a:fontRef>
+        </p:style>
+        <p:txBody>
+          <a:bodyPr rtlCol="0" anchor="ctr"/>
+          <a:lstStyle/>
+          <a:p>
+            <a:pPr algn="ctr"/>
+            <a:endParaRPr lang="en-US"/>
+          </a:p>
+        </p:txBody>
+      </p:sp>
+      <p:sp>
+        <p:nvSpPr>
+          <p:cNvPr id="31" name="Rectangle 30">
+            <a:extLst>
+              <a:ext uri="{FF2B5EF4-FFF2-40B4-BE49-F238E27FC236}">
+                <a16:creationId xmlns:a16="http://schemas.microsoft.com/office/drawing/2014/main" id="{E0E80810-0093-0E76-61A0-360B273F7EEE}"/>
+              </a:ext>
+            </a:extLst>
+          </p:cNvPr>
+          <p:cNvSpPr/>
+          <p:nvPr/>
+        </p:nvSpPr>
+        <p:spPr>
+          <a:xfrm>
+            <a:off x="10213676" y="1870132"/>
+            <a:ext cx="330681" cy="379561"/>
+          </a:xfrm>
+          <a:prstGeom prst="rect">
+            <a:avLst/>
+          </a:prstGeom>
+          <a:solidFill>
+            <a:schemeClr val="bg1"/>
+          </a:solidFill>
+        </p:spPr>
+        <p:style>
+          <a:lnRef idx="2">
+            <a:schemeClr val="accent1">
+              <a:shade val="15000"/>
+            </a:schemeClr>
+          </a:lnRef>
+          <a:fillRef idx="1">
+            <a:schemeClr val="accent1"/>
+          </a:fillRef>
+          <a:effectRef idx="0">
+            <a:schemeClr val="accent1"/>
+          </a:effectRef>
+          <a:fontRef idx="minor">
+            <a:schemeClr val="lt1"/>
+          </a:fontRef>
+        </p:style>
+        <p:txBody>
+          <a:bodyPr rtlCol="0" anchor="ctr"/>
+          <a:lstStyle/>
+          <a:p>
+            <a:pPr algn="ctr"/>
+            <a:endParaRPr lang="en-US"/>
+          </a:p>
+        </p:txBody>
+      </p:sp>
+      <p:sp>
+        <p:nvSpPr>
+          <p:cNvPr id="32" name="Rectangle 31">
+            <a:extLst>
+              <a:ext uri="{FF2B5EF4-FFF2-40B4-BE49-F238E27FC236}">
+                <a16:creationId xmlns:a16="http://schemas.microsoft.com/office/drawing/2014/main" id="{18274521-F03F-213B-5468-64E587498EB6}"/>
+              </a:ext>
+            </a:extLst>
+          </p:cNvPr>
+          <p:cNvSpPr/>
+          <p:nvPr/>
+        </p:nvSpPr>
+        <p:spPr>
+          <a:xfrm>
+            <a:off x="10215112" y="2502736"/>
+            <a:ext cx="330681" cy="379561"/>
+          </a:xfrm>
+          <a:prstGeom prst="rect">
+            <a:avLst/>
+          </a:prstGeom>
+          <a:solidFill>
+            <a:schemeClr val="bg1"/>
+          </a:solidFill>
+        </p:spPr>
+        <p:style>
+          <a:lnRef idx="2">
+            <a:schemeClr val="accent1">
+              <a:shade val="15000"/>
+            </a:schemeClr>
+          </a:lnRef>
+          <a:fillRef idx="1">
+            <a:schemeClr val="accent1"/>
+          </a:fillRef>
+          <a:effectRef idx="0">
+            <a:schemeClr val="accent1"/>
+          </a:effectRef>
+          <a:fontRef idx="minor">
+            <a:schemeClr val="lt1"/>
+          </a:fontRef>
+        </p:style>
+        <p:txBody>
+          <a:bodyPr rtlCol="0" anchor="ctr"/>
+          <a:lstStyle/>
+          <a:p>
+            <a:pPr algn="ctr"/>
+            <a:endParaRPr lang="en-US"/>
+          </a:p>
+        </p:txBody>
+      </p:sp>
+      <p:sp>
+        <p:nvSpPr>
+          <p:cNvPr id="33" name="Rectangle 32">
+            <a:extLst>
+              <a:ext uri="{FF2B5EF4-FFF2-40B4-BE49-F238E27FC236}">
+                <a16:creationId xmlns:a16="http://schemas.microsoft.com/office/drawing/2014/main" id="{9B4CCE7E-6643-4F04-0269-A87D543DF060}"/>
+              </a:ext>
+            </a:extLst>
+          </p:cNvPr>
+          <p:cNvSpPr/>
+          <p:nvPr/>
+        </p:nvSpPr>
+        <p:spPr>
+          <a:xfrm>
+            <a:off x="10222299" y="3106584"/>
+            <a:ext cx="330681" cy="379561"/>
+          </a:xfrm>
+          <a:prstGeom prst="rect">
+            <a:avLst/>
+          </a:prstGeom>
+          <a:solidFill>
+            <a:schemeClr val="bg1"/>
+          </a:solidFill>
+        </p:spPr>
+        <p:style>
+          <a:lnRef idx="2">
+            <a:schemeClr val="accent1">
+              <a:shade val="15000"/>
+            </a:schemeClr>
+          </a:lnRef>
+          <a:fillRef idx="1">
+            <a:schemeClr val="accent1"/>
+          </a:fillRef>
+          <a:effectRef idx="0">
+            <a:schemeClr val="accent1"/>
+          </a:effectRef>
+          <a:fontRef idx="minor">
+            <a:schemeClr val="lt1"/>
+          </a:fontRef>
+        </p:style>
+        <p:txBody>
+          <a:bodyPr rtlCol="0" anchor="ctr"/>
+          <a:lstStyle/>
+          <a:p>
+            <a:pPr algn="ctr"/>
+            <a:endParaRPr lang="en-US"/>
+          </a:p>
+        </p:txBody>
+      </p:sp>
+      <p:sp>
+        <p:nvSpPr>
+          <p:cNvPr id="34" name="Rectangle 33">
+            <a:extLst>
+              <a:ext uri="{FF2B5EF4-FFF2-40B4-BE49-F238E27FC236}">
+                <a16:creationId xmlns:a16="http://schemas.microsoft.com/office/drawing/2014/main" id="{2033305F-4400-25FD-B52B-9880CFFBCD65}"/>
+              </a:ext>
+            </a:extLst>
+          </p:cNvPr>
+          <p:cNvSpPr/>
+          <p:nvPr/>
+        </p:nvSpPr>
+        <p:spPr>
+          <a:xfrm>
+            <a:off x="10222298" y="3740008"/>
+            <a:ext cx="330681" cy="379561"/>
+          </a:xfrm>
+          <a:prstGeom prst="rect">
+            <a:avLst/>
+          </a:prstGeom>
+          <a:solidFill>
+            <a:schemeClr val="bg1"/>
+          </a:solidFill>
+        </p:spPr>
+        <p:style>
+          <a:lnRef idx="2">
+            <a:schemeClr val="accent1">
+              <a:shade val="15000"/>
+            </a:schemeClr>
+          </a:lnRef>
+          <a:fillRef idx="1">
+            <a:schemeClr val="accent1"/>
+          </a:fillRef>
+          <a:effectRef idx="0">
+            <a:schemeClr val="accent1"/>
+          </a:effectRef>
+          <a:fontRef idx="minor">
+            <a:schemeClr val="lt1"/>
+          </a:fontRef>
+        </p:style>
+        <p:txBody>
+          <a:bodyPr rtlCol="0" anchor="ctr"/>
+          <a:lstStyle/>
+          <a:p>
+            <a:pPr algn="ctr"/>
+            <a:endParaRPr lang="en-US"/>
+          </a:p>
+        </p:txBody>
+      </p:sp>
+      <p:cxnSp>
+        <p:nvCxnSpPr>
+          <p:cNvPr id="36" name="Straight Connector 35">
+            <a:extLst>
+              <a:ext uri="{FF2B5EF4-FFF2-40B4-BE49-F238E27FC236}">
+                <a16:creationId xmlns:a16="http://schemas.microsoft.com/office/drawing/2014/main" id="{46AC083E-1F8A-EEA8-0F19-9024B00B3EB1}"/>
+              </a:ext>
+            </a:extLst>
+          </p:cNvPr>
+          <p:cNvCxnSpPr>
+            <a:cxnSpLocks/>
+          </p:cNvCxnSpPr>
+          <p:nvPr/>
+        </p:nvCxnSpPr>
+        <p:spPr>
+          <a:xfrm>
+            <a:off x="3278038" y="6047108"/>
+            <a:ext cx="5814204" cy="0"/>
+          </a:xfrm>
+          <a:prstGeom prst="line">
+            <a:avLst/>
+          </a:prstGeom>
+        </p:spPr>
+        <p:style>
+          <a:lnRef idx="2">
+            <a:schemeClr val="accent1"/>
+          </a:lnRef>
+          <a:fillRef idx="0">
+            <a:schemeClr val="accent1"/>
+          </a:fillRef>
+          <a:effectRef idx="1">
+            <a:schemeClr val="accent1"/>
+          </a:effectRef>
+          <a:fontRef idx="minor">
+            <a:schemeClr val="tx1"/>
+          </a:fontRef>
+        </p:style>
+      </p:cxnSp>
+      <p:sp>
+        <p:nvSpPr>
+          <p:cNvPr id="39" name="TextBox 38">
+            <a:extLst>
+              <a:ext uri="{FF2B5EF4-FFF2-40B4-BE49-F238E27FC236}">
+                <a16:creationId xmlns:a16="http://schemas.microsoft.com/office/drawing/2014/main" id="{7BB4DDDD-6966-6BD5-12E5-EEA4C21BE20E}"/>
+              </a:ext>
+            </a:extLst>
+          </p:cNvPr>
+          <p:cNvSpPr txBox="1"/>
+          <p:nvPr/>
+        </p:nvSpPr>
+        <p:spPr>
+          <a:xfrm>
+            <a:off x="1812983" y="702686"/>
+            <a:ext cx="1546385" cy="307777"/>
+          </a:xfrm>
+          <a:prstGeom prst="rect">
+            <a:avLst/>
+          </a:prstGeom>
+          <a:noFill/>
+        </p:spPr>
+        <p:txBody>
+          <a:bodyPr wrap="none" rtlCol="0">
+            <a:spAutoFit/>
+          </a:bodyPr>
+          <a:lstStyle/>
+          <a:p>
+            <a:r>
+              <a:rPr lang="en-US" sz="1400" dirty="0"/>
+              <a:t>Exp bar is up here</a:t>
+            </a:r>
+          </a:p>
+        </p:txBody>
+      </p:sp>
+      <p:sp>
+        <p:nvSpPr>
+          <p:cNvPr id="41" name="TextBox 40">
+            <a:extLst>
+              <a:ext uri="{FF2B5EF4-FFF2-40B4-BE49-F238E27FC236}">
+                <a16:creationId xmlns:a16="http://schemas.microsoft.com/office/drawing/2014/main" id="{D3C14A8F-1E78-BB95-D59C-6D370CA82E9A}"/>
+              </a:ext>
+            </a:extLst>
+          </p:cNvPr>
+          <p:cNvSpPr txBox="1"/>
+          <p:nvPr/>
+        </p:nvSpPr>
+        <p:spPr>
+          <a:xfrm>
+            <a:off x="3803299" y="5629529"/>
+            <a:ext cx="2103461" cy="369332"/>
+          </a:xfrm>
+          <a:prstGeom prst="rect">
+            <a:avLst/>
+          </a:prstGeom>
+          <a:noFill/>
+        </p:spPr>
+        <p:txBody>
+          <a:bodyPr wrap="none" rtlCol="0">
+            <a:spAutoFit/>
+          </a:bodyPr>
+          <a:lstStyle/>
+          <a:p>
+            <a:r>
+              <a:rPr lang="en-US" dirty="0"/>
+              <a:t>Current HP/ </a:t>
+            </a:r>
+            <a:r>
+              <a:rPr lang="en-US" dirty="0" err="1"/>
+              <a:t>MaxHP</a:t>
+            </a:r>
+            <a:endParaRPr lang="en-US" dirty="0"/>
+          </a:p>
+        </p:txBody>
+      </p:sp>
+      <p:cxnSp>
+        <p:nvCxnSpPr>
+          <p:cNvPr id="43" name="Straight Connector 42">
+            <a:extLst>
+              <a:ext uri="{FF2B5EF4-FFF2-40B4-BE49-F238E27FC236}">
+                <a16:creationId xmlns:a16="http://schemas.microsoft.com/office/drawing/2014/main" id="{A4287643-428A-C7C4-080E-9BE56FAB8B70}"/>
+              </a:ext>
+            </a:extLst>
+          </p:cNvPr>
+          <p:cNvCxnSpPr/>
+          <p:nvPr/>
+        </p:nvCxnSpPr>
+        <p:spPr>
+          <a:xfrm flipV="1">
+            <a:off x="3278038" y="5503650"/>
+            <a:ext cx="362309" cy="526206"/>
+          </a:xfrm>
+          <a:prstGeom prst="line">
+            <a:avLst/>
+          </a:prstGeom>
+        </p:spPr>
+        <p:style>
+          <a:lnRef idx="2">
+            <a:schemeClr val="accent1"/>
+          </a:lnRef>
+          <a:fillRef idx="0">
+            <a:schemeClr val="accent1"/>
+          </a:fillRef>
+          <a:effectRef idx="1">
+            <a:schemeClr val="accent1"/>
+          </a:effectRef>
+          <a:fontRef idx="minor">
+            <a:schemeClr val="tx1"/>
+          </a:fontRef>
+        </p:style>
+      </p:cxnSp>
+      <p:cxnSp>
+        <p:nvCxnSpPr>
+          <p:cNvPr id="44" name="Straight Connector 43">
+            <a:extLst>
+              <a:ext uri="{FF2B5EF4-FFF2-40B4-BE49-F238E27FC236}">
+                <a16:creationId xmlns:a16="http://schemas.microsoft.com/office/drawing/2014/main" id="{E64B49F0-D434-124B-12B4-1C730C044E88}"/>
+              </a:ext>
+            </a:extLst>
+          </p:cNvPr>
+          <p:cNvCxnSpPr>
+            <a:cxnSpLocks/>
+          </p:cNvCxnSpPr>
+          <p:nvPr/>
+        </p:nvCxnSpPr>
+        <p:spPr>
+          <a:xfrm flipH="1">
+            <a:off x="3640347" y="5503650"/>
+            <a:ext cx="4977442" cy="0"/>
+          </a:xfrm>
+          <a:prstGeom prst="line">
+            <a:avLst/>
+          </a:prstGeom>
+        </p:spPr>
+        <p:style>
+          <a:lnRef idx="2">
+            <a:schemeClr val="accent1"/>
+          </a:lnRef>
+          <a:fillRef idx="0">
+            <a:schemeClr val="accent1"/>
+          </a:fillRef>
+          <a:effectRef idx="1">
+            <a:schemeClr val="accent1"/>
+          </a:effectRef>
+          <a:fontRef idx="minor">
+            <a:schemeClr val="tx1"/>
+          </a:fontRef>
+        </p:style>
+      </p:cxnSp>
+      <p:cxnSp>
+        <p:nvCxnSpPr>
+          <p:cNvPr id="48" name="Straight Connector 47">
+            <a:extLst>
+              <a:ext uri="{FF2B5EF4-FFF2-40B4-BE49-F238E27FC236}">
+                <a16:creationId xmlns:a16="http://schemas.microsoft.com/office/drawing/2014/main" id="{ED32EFC3-981A-0087-80D0-05CB0D37B72F}"/>
+              </a:ext>
+            </a:extLst>
+          </p:cNvPr>
+          <p:cNvCxnSpPr>
+            <a:cxnSpLocks/>
+          </p:cNvCxnSpPr>
+          <p:nvPr/>
+        </p:nvCxnSpPr>
+        <p:spPr>
+          <a:xfrm flipH="1" flipV="1">
+            <a:off x="8624978" y="5503650"/>
+            <a:ext cx="467264" cy="543458"/>
+          </a:xfrm>
+          <a:prstGeom prst="line">
+            <a:avLst/>
+          </a:prstGeom>
+        </p:spPr>
+        <p:style>
+          <a:lnRef idx="2">
+            <a:schemeClr val="accent1"/>
+          </a:lnRef>
+          <a:fillRef idx="0">
+            <a:schemeClr val="accent1"/>
+          </a:fillRef>
+          <a:effectRef idx="1">
+            <a:schemeClr val="accent1"/>
+          </a:effectRef>
+          <a:fontRef idx="minor">
+            <a:schemeClr val="tx1"/>
+          </a:fontRef>
+        </p:style>
+      </p:cxnSp>
+      <p:sp>
+        <p:nvSpPr>
+          <p:cNvPr id="50" name="TextBox 49">
+            <a:extLst>
+              <a:ext uri="{FF2B5EF4-FFF2-40B4-BE49-F238E27FC236}">
+                <a16:creationId xmlns:a16="http://schemas.microsoft.com/office/drawing/2014/main" id="{2204B3DF-7797-90A9-F4F9-D65B161CE10B}"/>
+              </a:ext>
+            </a:extLst>
+          </p:cNvPr>
+          <p:cNvSpPr txBox="1"/>
+          <p:nvPr/>
+        </p:nvSpPr>
+        <p:spPr>
+          <a:xfrm>
+            <a:off x="5931202" y="5629529"/>
+            <a:ext cx="2844112" cy="369332"/>
+          </a:xfrm>
+          <a:prstGeom prst="rect">
+            <a:avLst/>
+          </a:prstGeom>
+          <a:noFill/>
+        </p:spPr>
+        <p:txBody>
+          <a:bodyPr wrap="none" rtlCol="0">
+            <a:spAutoFit/>
+          </a:bodyPr>
+          <a:lstStyle/>
+          <a:p>
+            <a:r>
+              <a:rPr lang="en-US" dirty="0"/>
+              <a:t>Current shield / max shield</a:t>
+            </a:r>
+          </a:p>
+        </p:txBody>
+      </p:sp>
+      <p:cxnSp>
+        <p:nvCxnSpPr>
+          <p:cNvPr id="52" name="Straight Arrow Connector 51">
+            <a:extLst>
+              <a:ext uri="{FF2B5EF4-FFF2-40B4-BE49-F238E27FC236}">
+                <a16:creationId xmlns:a16="http://schemas.microsoft.com/office/drawing/2014/main" id="{48609583-393C-804C-5D4F-54324382CB16}"/>
+              </a:ext>
+            </a:extLst>
+          </p:cNvPr>
+          <p:cNvCxnSpPr/>
+          <p:nvPr/>
+        </p:nvCxnSpPr>
+        <p:spPr>
+          <a:xfrm>
+            <a:off x="9092242" y="3036498"/>
+            <a:ext cx="595222" cy="0"/>
+          </a:xfrm>
+          <a:prstGeom prst="straightConnector1">
+            <a:avLst/>
+          </a:prstGeom>
+          <a:ln>
+            <a:tailEnd type="triangle"/>
+          </a:ln>
+        </p:spPr>
+        <p:style>
+          <a:lnRef idx="2">
+            <a:schemeClr val="accent1"/>
+          </a:lnRef>
+          <a:fillRef idx="0">
+            <a:schemeClr val="accent1"/>
+          </a:fillRef>
+          <a:effectRef idx="1">
+            <a:schemeClr val="accent1"/>
+          </a:effectRef>
+          <a:fontRef idx="minor">
+            <a:schemeClr val="tx1"/>
+          </a:fontRef>
+        </p:style>
+      </p:cxnSp>
+      <p:sp>
+        <p:nvSpPr>
+          <p:cNvPr id="53" name="TextBox 52">
+            <a:extLst>
+              <a:ext uri="{FF2B5EF4-FFF2-40B4-BE49-F238E27FC236}">
+                <a16:creationId xmlns:a16="http://schemas.microsoft.com/office/drawing/2014/main" id="{89D43C57-13A9-54E4-26C1-564345EEA242}"/>
+              </a:ext>
+            </a:extLst>
+          </p:cNvPr>
+          <p:cNvSpPr txBox="1"/>
+          <p:nvPr/>
+        </p:nvSpPr>
+        <p:spPr>
+          <a:xfrm>
+            <a:off x="8625195" y="2624933"/>
+            <a:ext cx="1542474" cy="369332"/>
+          </a:xfrm>
+          <a:prstGeom prst="rect">
+            <a:avLst/>
+          </a:prstGeom>
+          <a:noFill/>
+        </p:spPr>
+        <p:txBody>
+          <a:bodyPr wrap="none" rtlCol="0">
+            <a:spAutoFit/>
+          </a:bodyPr>
+          <a:lstStyle/>
+          <a:p>
+            <a:r>
+              <a:rPr lang="en-US" dirty="0"/>
+              <a:t>Passive items</a:t>
+            </a:r>
+          </a:p>
+        </p:txBody>
+      </p:sp>
+      <p:sp>
+        <p:nvSpPr>
+          <p:cNvPr id="54" name="TextBox 53">
+            <a:extLst>
+              <a:ext uri="{FF2B5EF4-FFF2-40B4-BE49-F238E27FC236}">
+                <a16:creationId xmlns:a16="http://schemas.microsoft.com/office/drawing/2014/main" id="{41E86FD4-0937-AE9D-A232-A3D5F74E8CB0}"/>
+              </a:ext>
+            </a:extLst>
+          </p:cNvPr>
+          <p:cNvSpPr txBox="1"/>
+          <p:nvPr/>
+        </p:nvSpPr>
+        <p:spPr>
+          <a:xfrm>
+            <a:off x="2113959" y="2683673"/>
+            <a:ext cx="1124667" cy="369332"/>
+          </a:xfrm>
+          <a:prstGeom prst="rect">
+            <a:avLst/>
+          </a:prstGeom>
+          <a:noFill/>
+        </p:spPr>
+        <p:txBody>
+          <a:bodyPr wrap="none" rtlCol="0">
+            <a:spAutoFit/>
+          </a:bodyPr>
+          <a:lstStyle/>
+          <a:p>
+            <a:r>
+              <a:rPr lang="en-US" dirty="0"/>
+              <a:t>Weapons</a:t>
+            </a:r>
+          </a:p>
+        </p:txBody>
+      </p:sp>
+      <p:cxnSp>
+        <p:nvCxnSpPr>
+          <p:cNvPr id="56" name="Straight Arrow Connector 55">
+            <a:extLst>
+              <a:ext uri="{FF2B5EF4-FFF2-40B4-BE49-F238E27FC236}">
+                <a16:creationId xmlns:a16="http://schemas.microsoft.com/office/drawing/2014/main" id="{274C9A74-5AE8-D14A-DADC-2FB778A2D7F3}"/>
+              </a:ext>
+            </a:extLst>
+          </p:cNvPr>
+          <p:cNvCxnSpPr>
+            <a:cxnSpLocks/>
+          </p:cNvCxnSpPr>
+          <p:nvPr/>
+        </p:nvCxnSpPr>
+        <p:spPr>
+          <a:xfrm flipH="1">
+            <a:off x="2251494" y="3296364"/>
+            <a:ext cx="810883" cy="0"/>
+          </a:xfrm>
+          <a:prstGeom prst="straightConnector1">
+            <a:avLst/>
+          </a:prstGeom>
+          <a:ln>
+            <a:tailEnd type="triangle"/>
+          </a:ln>
+        </p:spPr>
+        <p:style>
+          <a:lnRef idx="2">
+            <a:schemeClr val="accent1"/>
+          </a:lnRef>
+          <a:fillRef idx="0">
+            <a:schemeClr val="accent1"/>
+          </a:fillRef>
+          <a:effectRef idx="1">
+            <a:schemeClr val="accent1"/>
+          </a:effectRef>
+          <a:fontRef idx="minor">
+            <a:schemeClr val="tx1"/>
+          </a:fontRef>
+        </p:style>
+      </p:cxnSp>
+      <p:cxnSp>
+        <p:nvCxnSpPr>
+          <p:cNvPr id="60" name="Straight Connector 59">
+            <a:extLst>
+              <a:ext uri="{FF2B5EF4-FFF2-40B4-BE49-F238E27FC236}">
+                <a16:creationId xmlns:a16="http://schemas.microsoft.com/office/drawing/2014/main" id="{054AA63D-0AD3-AF21-5C31-9CDD96DFA095}"/>
+              </a:ext>
+            </a:extLst>
+          </p:cNvPr>
+          <p:cNvCxnSpPr/>
+          <p:nvPr/>
+        </p:nvCxnSpPr>
+        <p:spPr>
+          <a:xfrm>
+            <a:off x="3640347" y="526210"/>
+            <a:ext cx="162952" cy="284671"/>
+          </a:xfrm>
+          <a:prstGeom prst="line">
+            <a:avLst/>
+          </a:prstGeom>
+        </p:spPr>
+        <p:style>
+          <a:lnRef idx="2">
+            <a:schemeClr val="accent1"/>
+          </a:lnRef>
+          <a:fillRef idx="0">
+            <a:schemeClr val="accent1"/>
+          </a:fillRef>
+          <a:effectRef idx="1">
+            <a:schemeClr val="accent1"/>
+          </a:effectRef>
+          <a:fontRef idx="minor">
+            <a:schemeClr val="tx1"/>
+          </a:fontRef>
+        </p:style>
+      </p:cxnSp>
+      <p:cxnSp>
+        <p:nvCxnSpPr>
+          <p:cNvPr id="61" name="Straight Connector 60">
+            <a:extLst>
+              <a:ext uri="{FF2B5EF4-FFF2-40B4-BE49-F238E27FC236}">
+                <a16:creationId xmlns:a16="http://schemas.microsoft.com/office/drawing/2014/main" id="{5C979DFD-C594-0BE2-3012-4A9F70DB52E0}"/>
+              </a:ext>
+            </a:extLst>
+          </p:cNvPr>
+          <p:cNvCxnSpPr>
+            <a:cxnSpLocks/>
+          </p:cNvCxnSpPr>
+          <p:nvPr/>
+        </p:nvCxnSpPr>
+        <p:spPr>
+          <a:xfrm flipH="1">
+            <a:off x="8134709" y="526210"/>
+            <a:ext cx="172518" cy="284671"/>
+          </a:xfrm>
+          <a:prstGeom prst="line">
+            <a:avLst/>
+          </a:prstGeom>
+        </p:spPr>
+        <p:style>
+          <a:lnRef idx="2">
+            <a:schemeClr val="accent1"/>
+          </a:lnRef>
+          <a:fillRef idx="0">
+            <a:schemeClr val="accent1"/>
+          </a:fillRef>
+          <a:effectRef idx="1">
+            <a:schemeClr val="accent1"/>
+          </a:effectRef>
+          <a:fontRef idx="minor">
+            <a:schemeClr val="tx1"/>
+          </a:fontRef>
+        </p:style>
+      </p:cxnSp>
+      <p:cxnSp>
+        <p:nvCxnSpPr>
+          <p:cNvPr id="63" name="Straight Connector 62">
+            <a:extLst>
+              <a:ext uri="{FF2B5EF4-FFF2-40B4-BE49-F238E27FC236}">
+                <a16:creationId xmlns:a16="http://schemas.microsoft.com/office/drawing/2014/main" id="{0B23B48E-12AB-69C6-DB73-745AB3C88F89}"/>
+              </a:ext>
+            </a:extLst>
+          </p:cNvPr>
+          <p:cNvCxnSpPr>
+            <a:cxnSpLocks/>
+          </p:cNvCxnSpPr>
+          <p:nvPr/>
+        </p:nvCxnSpPr>
+        <p:spPr>
+          <a:xfrm>
+            <a:off x="3803299" y="810881"/>
+            <a:ext cx="4331410" cy="0"/>
+          </a:xfrm>
+          <a:prstGeom prst="line">
+            <a:avLst/>
+          </a:prstGeom>
+        </p:spPr>
+        <p:style>
+          <a:lnRef idx="2">
+            <a:schemeClr val="accent1"/>
+          </a:lnRef>
+          <a:fillRef idx="0">
+            <a:schemeClr val="accent1"/>
+          </a:fillRef>
+          <a:effectRef idx="1">
+            <a:schemeClr val="accent1"/>
+          </a:effectRef>
+          <a:fontRef idx="minor">
+            <a:schemeClr val="tx1"/>
+          </a:fontRef>
+        </p:style>
+      </p:cxnSp>
+      <p:sp>
+        <p:nvSpPr>
+          <p:cNvPr id="66" name="TextBox 65">
+            <a:extLst>
+              <a:ext uri="{FF2B5EF4-FFF2-40B4-BE49-F238E27FC236}">
+                <a16:creationId xmlns:a16="http://schemas.microsoft.com/office/drawing/2014/main" id="{AD3FEDDA-F2C8-7CB7-B1E2-096683E77A68}"/>
+              </a:ext>
+            </a:extLst>
+          </p:cNvPr>
+          <p:cNvSpPr txBox="1"/>
+          <p:nvPr/>
+        </p:nvSpPr>
+        <p:spPr>
+          <a:xfrm>
+            <a:off x="4386722" y="1008155"/>
+            <a:ext cx="2966536" cy="1477328"/>
+          </a:xfrm>
+          <a:prstGeom prst="rect">
+            <a:avLst/>
+          </a:prstGeom>
+          <a:noFill/>
+        </p:spPr>
+        <p:txBody>
+          <a:bodyPr wrap="square" rtlCol="0">
+            <a:spAutoFit/>
+          </a:bodyPr>
+          <a:lstStyle/>
+          <a:p>
+            <a:r>
+              <a:rPr lang="en-US" dirty="0"/>
+              <a:t>Boss HP and shield (mirror that of player, It will only shows up when there is a boss and will disappear when there is none</a:t>
+            </a:r>
+          </a:p>
+        </p:txBody>
+      </p:sp>
+      <p:cxnSp>
+        <p:nvCxnSpPr>
+          <p:cNvPr id="69" name="Straight Arrow Connector 68">
+            <a:extLst>
+              <a:ext uri="{FF2B5EF4-FFF2-40B4-BE49-F238E27FC236}">
+                <a16:creationId xmlns:a16="http://schemas.microsoft.com/office/drawing/2014/main" id="{A4A47DED-2551-D55B-3CAD-61398BF07C39}"/>
+              </a:ext>
+            </a:extLst>
+          </p:cNvPr>
+          <p:cNvCxnSpPr/>
+          <p:nvPr/>
+        </p:nvCxnSpPr>
+        <p:spPr>
+          <a:xfrm flipV="1">
+            <a:off x="5598543" y="785004"/>
+            <a:ext cx="0" cy="223151"/>
+          </a:xfrm>
+          <a:prstGeom prst="straightConnector1">
+            <a:avLst/>
+          </a:prstGeom>
+          <a:ln>
+            <a:tailEnd type="triangle"/>
+          </a:ln>
+        </p:spPr>
+        <p:style>
+          <a:lnRef idx="2">
+            <a:schemeClr val="accent1"/>
+          </a:lnRef>
+          <a:fillRef idx="0">
+            <a:schemeClr val="accent1"/>
+          </a:fillRef>
+          <a:effectRef idx="1">
+            <a:schemeClr val="accent1"/>
+          </a:effectRef>
+          <a:fontRef idx="minor">
+            <a:schemeClr val="tx1"/>
+          </a:fontRef>
+        </p:style>
+      </p:cxnSp>
+      <p:sp>
+        <p:nvSpPr>
+          <p:cNvPr id="76" name="TextBox 75">
+            <a:extLst>
+              <a:ext uri="{FF2B5EF4-FFF2-40B4-BE49-F238E27FC236}">
+                <a16:creationId xmlns:a16="http://schemas.microsoft.com/office/drawing/2014/main" id="{DEF33BA4-4F46-313F-34AF-02015633C704}"/>
+              </a:ext>
+            </a:extLst>
+          </p:cNvPr>
+          <p:cNvSpPr txBox="1"/>
+          <p:nvPr/>
+        </p:nvSpPr>
+        <p:spPr>
+          <a:xfrm>
+            <a:off x="3506162" y="4187980"/>
+            <a:ext cx="4925684" cy="646331"/>
+          </a:xfrm>
+          <a:prstGeom prst="rect">
+            <a:avLst/>
+          </a:prstGeom>
+          <a:noFill/>
+        </p:spPr>
+        <p:txBody>
+          <a:bodyPr wrap="square" rtlCol="0">
+            <a:spAutoFit/>
+          </a:bodyPr>
+          <a:lstStyle/>
+          <a:p>
+            <a:r>
+              <a:rPr lang="en-US" dirty="0"/>
+              <a:t>The outer layer is actually the shield, it will fill left to right with a shade of blue</a:t>
+            </a:r>
+          </a:p>
+        </p:txBody>
+      </p:sp>
+      <p:cxnSp>
+        <p:nvCxnSpPr>
+          <p:cNvPr id="77" name="Straight Arrow Connector 76">
+            <a:extLst>
+              <a:ext uri="{FF2B5EF4-FFF2-40B4-BE49-F238E27FC236}">
+                <a16:creationId xmlns:a16="http://schemas.microsoft.com/office/drawing/2014/main" id="{1973DCCC-51FB-BE31-94D1-35B925976A54}"/>
+              </a:ext>
+            </a:extLst>
+          </p:cNvPr>
+          <p:cNvCxnSpPr/>
+          <p:nvPr/>
+        </p:nvCxnSpPr>
+        <p:spPr>
+          <a:xfrm>
+            <a:off x="5740159" y="5116899"/>
+            <a:ext cx="0" cy="295275"/>
+          </a:xfrm>
+          <a:prstGeom prst="straightConnector1">
+            <a:avLst/>
+          </a:prstGeom>
+          <a:ln>
+            <a:solidFill>
+              <a:schemeClr val="accent1"/>
+            </a:solidFill>
+            <a:tailEnd type="triangle"/>
+          </a:ln>
+        </p:spPr>
+        <p:style>
+          <a:lnRef idx="2">
+            <a:schemeClr val="accent1"/>
+          </a:lnRef>
+          <a:fillRef idx="0">
+            <a:schemeClr val="accent1"/>
+          </a:fillRef>
+          <a:effectRef idx="1">
+            <a:schemeClr val="accent1"/>
+          </a:effectRef>
+          <a:fontRef idx="minor">
+            <a:schemeClr val="tx1"/>
+          </a:fontRef>
+        </p:style>
+      </p:cxnSp>
+      <p:cxnSp>
+        <p:nvCxnSpPr>
+          <p:cNvPr id="78" name="Straight Arrow Connector 77">
+            <a:extLst>
+              <a:ext uri="{FF2B5EF4-FFF2-40B4-BE49-F238E27FC236}">
+                <a16:creationId xmlns:a16="http://schemas.microsoft.com/office/drawing/2014/main" id="{0E8625A5-4793-9D79-3009-50AAF5888A2A}"/>
+              </a:ext>
+            </a:extLst>
+          </p:cNvPr>
+          <p:cNvCxnSpPr>
+            <a:cxnSpLocks/>
+            <a:stCxn id="79" idx="2"/>
+          </p:cNvCxnSpPr>
+          <p:nvPr/>
+        </p:nvCxnSpPr>
+        <p:spPr>
+          <a:xfrm flipH="1">
+            <a:off x="8775314" y="5350272"/>
+            <a:ext cx="262290" cy="614443"/>
+          </a:xfrm>
+          <a:prstGeom prst="straightConnector1">
+            <a:avLst/>
+          </a:prstGeom>
+          <a:ln>
+            <a:tailEnd type="triangle"/>
+          </a:ln>
+        </p:spPr>
+        <p:style>
+          <a:lnRef idx="2">
+            <a:schemeClr val="accent1"/>
+          </a:lnRef>
+          <a:fillRef idx="0">
+            <a:schemeClr val="accent1"/>
+          </a:fillRef>
+          <a:effectRef idx="1">
+            <a:schemeClr val="accent1"/>
+          </a:effectRef>
+          <a:fontRef idx="minor">
+            <a:schemeClr val="tx1"/>
+          </a:fontRef>
+        </p:style>
+      </p:cxnSp>
+      <p:sp>
+        <p:nvSpPr>
+          <p:cNvPr id="79" name="TextBox 78">
+            <a:extLst>
+              <a:ext uri="{FF2B5EF4-FFF2-40B4-BE49-F238E27FC236}">
+                <a16:creationId xmlns:a16="http://schemas.microsoft.com/office/drawing/2014/main" id="{0082A3F8-8742-84FC-BF1B-6A61E1DB9EC4}"/>
+              </a:ext>
+            </a:extLst>
+          </p:cNvPr>
+          <p:cNvSpPr txBox="1"/>
+          <p:nvPr/>
+        </p:nvSpPr>
+        <p:spPr>
+          <a:xfrm>
+            <a:off x="7687570" y="4703941"/>
+            <a:ext cx="2700068" cy="646331"/>
+          </a:xfrm>
+          <a:prstGeom prst="rect">
+            <a:avLst/>
+          </a:prstGeom>
+          <a:noFill/>
+        </p:spPr>
+        <p:txBody>
+          <a:bodyPr wrap="square" rtlCol="0">
+            <a:spAutoFit/>
+          </a:bodyPr>
+          <a:lstStyle/>
+          <a:p>
+            <a:r>
+              <a:rPr lang="en-US" dirty="0"/>
+              <a:t>The inside box is the HP, also fill left to right</a:t>
+            </a:r>
+          </a:p>
+        </p:txBody>
+      </p:sp>
+      <p:cxnSp>
+        <p:nvCxnSpPr>
+          <p:cNvPr id="85" name="Straight Connector 84">
+            <a:extLst>
+              <a:ext uri="{FF2B5EF4-FFF2-40B4-BE49-F238E27FC236}">
+                <a16:creationId xmlns:a16="http://schemas.microsoft.com/office/drawing/2014/main" id="{46A76CD7-AAA1-36C9-5127-E32A78EA7DC4}"/>
+              </a:ext>
+            </a:extLst>
+          </p:cNvPr>
+          <p:cNvCxnSpPr/>
+          <p:nvPr/>
+        </p:nvCxnSpPr>
+        <p:spPr>
+          <a:xfrm>
+            <a:off x="1605949" y="439947"/>
+            <a:ext cx="8988727" cy="0"/>
+          </a:xfrm>
+          <a:prstGeom prst="line">
+            <a:avLst/>
+          </a:prstGeom>
+        </p:spPr>
+        <p:style>
+          <a:lnRef idx="2">
+            <a:schemeClr val="accent1"/>
+          </a:lnRef>
+          <a:fillRef idx="0">
+            <a:schemeClr val="accent1"/>
+          </a:fillRef>
+          <a:effectRef idx="1">
+            <a:schemeClr val="accent1"/>
+          </a:effectRef>
+          <a:fontRef idx="minor">
+            <a:schemeClr val="tx1"/>
+          </a:fontRef>
+        </p:style>
+      </p:cxnSp>
+      <p:cxnSp>
+        <p:nvCxnSpPr>
+          <p:cNvPr id="86" name="Straight Arrow Connector 85">
+            <a:extLst>
+              <a:ext uri="{FF2B5EF4-FFF2-40B4-BE49-F238E27FC236}">
+                <a16:creationId xmlns:a16="http://schemas.microsoft.com/office/drawing/2014/main" id="{F6507631-48C6-520C-7EE8-BBA718B66490}"/>
+              </a:ext>
+            </a:extLst>
+          </p:cNvPr>
+          <p:cNvCxnSpPr>
+            <a:cxnSpLocks/>
+            <a:stCxn id="39" idx="2"/>
+          </p:cNvCxnSpPr>
+          <p:nvPr/>
+        </p:nvCxnSpPr>
+        <p:spPr>
+          <a:xfrm flipH="1" flipV="1">
+            <a:off x="2580594" y="439947"/>
+            <a:ext cx="5582" cy="570516"/>
+          </a:xfrm>
+          <a:prstGeom prst="straightConnector1">
+            <a:avLst/>
+          </a:prstGeom>
+          <a:ln>
+            <a:tailEnd type="triangle"/>
+          </a:ln>
+        </p:spPr>
+        <p:style>
+          <a:lnRef idx="2">
+            <a:schemeClr val="accent1"/>
+          </a:lnRef>
+          <a:fillRef idx="0">
+            <a:schemeClr val="accent1"/>
+          </a:fillRef>
+          <a:effectRef idx="1">
+            <a:schemeClr val="accent1"/>
+          </a:effectRef>
+          <a:fontRef idx="minor">
+            <a:schemeClr val="tx1"/>
+          </a:fontRef>
+        </p:style>
+      </p:cxnSp>
+    </p:spTree>
+    <p:extLst>
+      <p:ext uri="{BB962C8B-B14F-4D97-AF65-F5344CB8AC3E}">
+        <p14:creationId xmlns:p14="http://schemas.microsoft.com/office/powerpoint/2010/main" val="2544213075"/>
+      </p:ext>
+    </p:extLst>
+  </p:cSld>
+  <p:clrMapOvr>
+    <a:masterClrMapping/>
+  </p:clrMapOvr>
+</p:sld>
+</file>
+
+<file path=ppt/slides/slide6.xml><?xml version="1.0" encoding="utf-8"?>
+<p:sld xmlns:a="http://schemas.openxmlformats.org/drawingml/2006/main" xmlns:r="http://schemas.openxmlformats.org/officeDocument/2006/relationships" xmlns:p="http://schemas.openxmlformats.org/presentationml/2006/main">
+  <p:cSld>
+    <p:spTree>
+      <p:nvGrpSpPr>
+        <p:cNvPr id="1" name=""/>
+        <p:cNvGrpSpPr/>
+        <p:nvPr/>
+      </p:nvGrpSpPr>
+      <p:grpSpPr>
+        <a:xfrm>
+          <a:off x="0" y="0"/>
+          <a:ext cx="0" cy="0"/>
+          <a:chOff x="0" y="0"/>
+          <a:chExt cx="0" cy="0"/>
+        </a:xfrm>
+      </p:grpSpPr>
+      <p:sp>
+        <p:nvSpPr>
+          <p:cNvPr id="2" name="Rectangle: Top Corners Snipped 1">
+            <a:extLst>
+              <a:ext uri="{FF2B5EF4-FFF2-40B4-BE49-F238E27FC236}">
+                <a16:creationId xmlns:a16="http://schemas.microsoft.com/office/drawing/2014/main" id="{14A7AA74-FF29-E5E5-5036-1C6D6A8AA43D}"/>
+              </a:ext>
+            </a:extLst>
+          </p:cNvPr>
+          <p:cNvSpPr/>
+          <p:nvPr/>
+        </p:nvSpPr>
+        <p:spPr>
+          <a:xfrm>
+            <a:off x="3881886" y="2518913"/>
+            <a:ext cx="3476445" cy="698740"/>
+          </a:xfrm>
+          <a:prstGeom prst="snip2SameRect">
+            <a:avLst>
+              <a:gd name="adj1" fmla="val 50000"/>
+              <a:gd name="adj2" fmla="val 0"/>
+            </a:avLst>
+          </a:prstGeom>
+        </p:spPr>
+        <p:style>
+          <a:lnRef idx="2">
+            <a:schemeClr val="accent1">
+              <a:shade val="15000"/>
+            </a:schemeClr>
+          </a:lnRef>
+          <a:fillRef idx="1">
+            <a:schemeClr val="accent1"/>
+          </a:fillRef>
+          <a:effectRef idx="0">
+            <a:schemeClr val="accent1"/>
+          </a:effectRef>
+          <a:fontRef idx="minor">
+            <a:schemeClr val="lt1"/>
+          </a:fontRef>
+        </p:style>
+        <p:txBody>
+          <a:bodyPr rtlCol="0" anchor="ctr"/>
+          <a:lstStyle/>
+          <a:p>
+            <a:pPr algn="ctr"/>
+            <a:endParaRPr lang="en-US"/>
+          </a:p>
+        </p:txBody>
+      </p:sp>
+      <p:grpSp>
+        <p:nvGrpSpPr>
+          <p:cNvPr id="8" name="Group 7">
+            <a:extLst>
+              <a:ext uri="{FF2B5EF4-FFF2-40B4-BE49-F238E27FC236}">
+                <a16:creationId xmlns:a16="http://schemas.microsoft.com/office/drawing/2014/main" id="{7D1D6E33-33E4-D2E9-E942-6441D56F2606}"/>
+              </a:ext>
+            </a:extLst>
+          </p:cNvPr>
+          <p:cNvGrpSpPr/>
+          <p:nvPr/>
+        </p:nvGrpSpPr>
+        <p:grpSpPr>
+          <a:xfrm>
+            <a:off x="992038" y="2044460"/>
+            <a:ext cx="2820837" cy="845388"/>
+            <a:chOff x="992038" y="2044460"/>
+            <a:chExt cx="2820837" cy="845388"/>
+          </a:xfrm>
+        </p:grpSpPr>
+        <p:sp>
+          <p:nvSpPr>
+            <p:cNvPr id="3" name="Freeform: Shape 2">
+              <a:extLst>
+                <a:ext uri="{FF2B5EF4-FFF2-40B4-BE49-F238E27FC236}">
+                  <a16:creationId xmlns:a16="http://schemas.microsoft.com/office/drawing/2014/main" id="{E6DDF6B5-2ED1-4361-FC2B-D1F33D5A8A9D}"/>
+                </a:ext>
+              </a:extLst>
+            </p:cNvPr>
+            <p:cNvSpPr/>
+            <p:nvPr/>
+          </p:nvSpPr>
+          <p:spPr>
+            <a:xfrm>
+              <a:off x="1112808" y="2147977"/>
+              <a:ext cx="2562045" cy="741871"/>
+            </a:xfrm>
+            <a:custGeom>
+              <a:avLst/>
+              <a:gdLst>
+                <a:gd name="csX0" fmla="*/ 0 w 2562045"/>
+                <a:gd name="csY0" fmla="*/ 741871 h 741871"/>
+                <a:gd name="csX1" fmla="*/ 543464 w 2562045"/>
+                <a:gd name="csY1" fmla="*/ 17252 h 741871"/>
+                <a:gd name="csX2" fmla="*/ 2009955 w 2562045"/>
+                <a:gd name="csY2" fmla="*/ 0 h 741871"/>
+                <a:gd name="csX3" fmla="*/ 2562045 w 2562045"/>
+                <a:gd name="csY3" fmla="*/ 690113 h 741871"/>
+                <a:gd name="csX4" fmla="*/ 0 w 2562045"/>
+                <a:gd name="csY4" fmla="*/ 741871 h 741871"/>
+              </a:gdLst>
+              <a:ahLst/>
+              <a:cxnLst>
+                <a:cxn ang="0">
+                  <a:pos x="csX0" y="csY0"/>
+                </a:cxn>
+                <a:cxn ang="0">
+                  <a:pos x="csX1" y="csY1"/>
+                </a:cxn>
+                <a:cxn ang="0">
+                  <a:pos x="csX2" y="csY2"/>
+                </a:cxn>
+                <a:cxn ang="0">
+                  <a:pos x="csX3" y="csY3"/>
+                </a:cxn>
+                <a:cxn ang="0">
+                  <a:pos x="csX4" y="csY4"/>
+                </a:cxn>
+              </a:cxnLst>
+              <a:rect l="l" t="t" r="r" b="b"/>
+              <a:pathLst>
+                <a:path w="2562045" h="741871">
+                  <a:moveTo>
+                    <a:pt x="0" y="741871"/>
+                  </a:moveTo>
+                  <a:lnTo>
+                    <a:pt x="543464" y="17252"/>
+                  </a:lnTo>
+                  <a:lnTo>
+                    <a:pt x="2009955" y="0"/>
+                  </a:lnTo>
+                  <a:lnTo>
+                    <a:pt x="2562045" y="690113"/>
+                  </a:lnTo>
+                  <a:lnTo>
+                    <a:pt x="0" y="741871"/>
+                  </a:lnTo>
+                  <a:close/>
+                </a:path>
+              </a:pathLst>
+            </a:custGeom>
+            <a:solidFill>
+              <a:schemeClr val="accent6"/>
+            </a:solidFill>
+          </p:spPr>
+          <p:style>
+            <a:lnRef idx="2">
+              <a:schemeClr val="accent1">
+                <a:shade val="15000"/>
+              </a:schemeClr>
+            </a:lnRef>
+            <a:fillRef idx="1">
+              <a:schemeClr val="accent1"/>
+            </a:fillRef>
+            <a:effectRef idx="0">
+              <a:schemeClr val="accent1"/>
+            </a:effectRef>
+            <a:fontRef idx="minor">
+              <a:schemeClr val="lt1"/>
+            </a:fontRef>
+          </p:style>
+          <p:txBody>
+            <a:bodyPr rtlCol="0" anchor="ctr"/>
+            <a:lstStyle/>
+            <a:p>
+              <a:pPr algn="ctr"/>
+              <a:endParaRPr lang="en-US"/>
+            </a:p>
+          </p:txBody>
+        </p:sp>
+        <p:sp>
+          <p:nvSpPr>
+            <p:cNvPr id="7" name="Freeform: Shape 6">
+              <a:extLst>
+                <a:ext uri="{FF2B5EF4-FFF2-40B4-BE49-F238E27FC236}">
+                  <a16:creationId xmlns:a16="http://schemas.microsoft.com/office/drawing/2014/main" id="{D2B04609-DBDE-49C6-6B9F-2EC588880FB2}"/>
+                </a:ext>
+              </a:extLst>
+            </p:cNvPr>
+            <p:cNvSpPr/>
+            <p:nvPr/>
+          </p:nvSpPr>
+          <p:spPr>
+            <a:xfrm>
+              <a:off x="992038" y="2044460"/>
+              <a:ext cx="2820837" cy="836763"/>
+            </a:xfrm>
+            <a:custGeom>
+              <a:avLst/>
+              <a:gdLst>
+                <a:gd name="csX0" fmla="*/ 103517 w 2820837"/>
+                <a:gd name="csY0" fmla="*/ 836763 h 836763"/>
+                <a:gd name="csX1" fmla="*/ 0 w 2820837"/>
+                <a:gd name="csY1" fmla="*/ 828136 h 836763"/>
+                <a:gd name="csX2" fmla="*/ 552090 w 2820837"/>
+                <a:gd name="csY2" fmla="*/ 34506 h 836763"/>
+                <a:gd name="csX3" fmla="*/ 2225615 w 2820837"/>
+                <a:gd name="csY3" fmla="*/ 0 h 836763"/>
+                <a:gd name="csX4" fmla="*/ 2820837 w 2820837"/>
+                <a:gd name="csY4" fmla="*/ 767751 h 836763"/>
+                <a:gd name="csX5" fmla="*/ 2682815 w 2820837"/>
+                <a:gd name="csY5" fmla="*/ 785004 h 836763"/>
+                <a:gd name="csX6" fmla="*/ 2147977 w 2820837"/>
+                <a:gd name="csY6" fmla="*/ 112144 h 836763"/>
+                <a:gd name="csX7" fmla="*/ 690113 w 2820837"/>
+                <a:gd name="csY7" fmla="*/ 129397 h 836763"/>
+                <a:gd name="csX8" fmla="*/ 103517 w 2820837"/>
+                <a:gd name="csY8" fmla="*/ 836763 h 836763"/>
+              </a:gdLst>
+              <a:ahLst/>
+              <a:cxnLst>
+                <a:cxn ang="0">
+                  <a:pos x="csX0" y="csY0"/>
+                </a:cxn>
+                <a:cxn ang="0">
+                  <a:pos x="csX1" y="csY1"/>
+                </a:cxn>
+                <a:cxn ang="0">
+                  <a:pos x="csX2" y="csY2"/>
+                </a:cxn>
+                <a:cxn ang="0">
+                  <a:pos x="csX3" y="csY3"/>
+                </a:cxn>
+                <a:cxn ang="0">
+                  <a:pos x="csX4" y="csY4"/>
+                </a:cxn>
+                <a:cxn ang="0">
+                  <a:pos x="csX5" y="csY5"/>
+                </a:cxn>
+                <a:cxn ang="0">
+                  <a:pos x="csX6" y="csY6"/>
+                </a:cxn>
+                <a:cxn ang="0">
+                  <a:pos x="csX7" y="csY7"/>
+                </a:cxn>
+                <a:cxn ang="0">
+                  <a:pos x="csX8" y="csY8"/>
+                </a:cxn>
+              </a:cxnLst>
+              <a:rect l="l" t="t" r="r" b="b"/>
+              <a:pathLst>
+                <a:path w="2820837" h="836763">
+                  <a:moveTo>
+                    <a:pt x="103517" y="836763"/>
+                  </a:moveTo>
+                  <a:lnTo>
+                    <a:pt x="0" y="828136"/>
+                  </a:lnTo>
+                  <a:lnTo>
+                    <a:pt x="552090" y="34506"/>
+                  </a:lnTo>
+                  <a:lnTo>
+                    <a:pt x="2225615" y="0"/>
+                  </a:lnTo>
+                  <a:lnTo>
+                    <a:pt x="2820837" y="767751"/>
+                  </a:lnTo>
+                  <a:lnTo>
+                    <a:pt x="2682815" y="785004"/>
+                  </a:lnTo>
+                  <a:lnTo>
+                    <a:pt x="2147977" y="112144"/>
+                  </a:lnTo>
+                  <a:lnTo>
+                    <a:pt x="690113" y="129397"/>
+                  </a:lnTo>
+                  <a:lnTo>
+                    <a:pt x="103517" y="836763"/>
+                  </a:lnTo>
+                  <a:close/>
+                </a:path>
+              </a:pathLst>
+            </a:custGeom>
+          </p:spPr>
+          <p:style>
+            <a:lnRef idx="2">
+              <a:schemeClr val="accent1">
+                <a:shade val="15000"/>
+              </a:schemeClr>
+            </a:lnRef>
+            <a:fillRef idx="1">
+              <a:schemeClr val="accent1"/>
+            </a:fillRef>
+            <a:effectRef idx="0">
+              <a:schemeClr val="accent1"/>
+            </a:effectRef>
+            <a:fontRef idx="minor">
+              <a:schemeClr val="lt1"/>
+            </a:fontRef>
+          </p:style>
+          <p:txBody>
+            <a:bodyPr rtlCol="0" anchor="ctr"/>
+            <a:lstStyle/>
+            <a:p>
+              <a:pPr algn="ctr"/>
+              <a:endParaRPr lang="en-US"/>
+            </a:p>
+          </p:txBody>
+        </p:sp>
+      </p:grpSp>
+      <p:cxnSp>
+        <p:nvCxnSpPr>
+          <p:cNvPr id="10" name="Straight Connector 9">
+            <a:extLst>
+              <a:ext uri="{FF2B5EF4-FFF2-40B4-BE49-F238E27FC236}">
+                <a16:creationId xmlns:a16="http://schemas.microsoft.com/office/drawing/2014/main" id="{F9D051ED-87EA-3089-F15B-E19E845C9E91}"/>
+              </a:ext>
+            </a:extLst>
+          </p:cNvPr>
+          <p:cNvCxnSpPr/>
+          <p:nvPr/>
+        </p:nvCxnSpPr>
+        <p:spPr>
+          <a:xfrm flipH="1">
+            <a:off x="3424687" y="2648309"/>
+            <a:ext cx="69011" cy="219974"/>
+          </a:xfrm>
+          <a:prstGeom prst="line">
+            <a:avLst/>
+          </a:prstGeom>
+        </p:spPr>
+        <p:style>
+          <a:lnRef idx="2">
+            <a:schemeClr val="accent1"/>
+          </a:lnRef>
+          <a:fillRef idx="0">
+            <a:schemeClr val="accent1"/>
+          </a:fillRef>
+          <a:effectRef idx="1">
+            <a:schemeClr val="accent1"/>
+          </a:effectRef>
+          <a:fontRef idx="minor">
+            <a:schemeClr val="tx1"/>
+          </a:fontRef>
+        </p:style>
+      </p:cxnSp>
+      <p:cxnSp>
+        <p:nvCxnSpPr>
+          <p:cNvPr id="11" name="Straight Connector 10">
+            <a:extLst>
+              <a:ext uri="{FF2B5EF4-FFF2-40B4-BE49-F238E27FC236}">
+                <a16:creationId xmlns:a16="http://schemas.microsoft.com/office/drawing/2014/main" id="{30124471-9883-4A3C-9A7A-898E4F57D69F}"/>
+              </a:ext>
+            </a:extLst>
+          </p:cNvPr>
+          <p:cNvCxnSpPr>
+            <a:cxnSpLocks/>
+          </p:cNvCxnSpPr>
+          <p:nvPr/>
+        </p:nvCxnSpPr>
+        <p:spPr>
+          <a:xfrm flipH="1">
+            <a:off x="3209026" y="2462841"/>
+            <a:ext cx="146650" cy="362309"/>
+          </a:xfrm>
+          <a:prstGeom prst="line">
+            <a:avLst/>
+          </a:prstGeom>
+        </p:spPr>
+        <p:style>
+          <a:lnRef idx="2">
+            <a:schemeClr val="accent1"/>
+          </a:lnRef>
+          <a:fillRef idx="0">
+            <a:schemeClr val="accent1"/>
+          </a:fillRef>
+          <a:effectRef idx="1">
+            <a:schemeClr val="accent1"/>
+          </a:effectRef>
+          <a:fontRef idx="minor">
+            <a:schemeClr val="tx1"/>
+          </a:fontRef>
+        </p:style>
+      </p:cxnSp>
+      <p:cxnSp>
+        <p:nvCxnSpPr>
+          <p:cNvPr id="13" name="Straight Connector 12">
+            <a:extLst>
+              <a:ext uri="{FF2B5EF4-FFF2-40B4-BE49-F238E27FC236}">
+                <a16:creationId xmlns:a16="http://schemas.microsoft.com/office/drawing/2014/main" id="{F1D5C987-63B0-42D9-55F7-0BE440D7D335}"/>
+              </a:ext>
+            </a:extLst>
+          </p:cNvPr>
+          <p:cNvCxnSpPr>
+            <a:cxnSpLocks/>
+          </p:cNvCxnSpPr>
+          <p:nvPr/>
+        </p:nvCxnSpPr>
+        <p:spPr>
+          <a:xfrm flipH="1">
+            <a:off x="3019245" y="2303253"/>
+            <a:ext cx="198409" cy="521896"/>
+          </a:xfrm>
+          <a:prstGeom prst="line">
+            <a:avLst/>
+          </a:prstGeom>
+        </p:spPr>
+        <p:style>
+          <a:lnRef idx="2">
+            <a:schemeClr val="accent1"/>
+          </a:lnRef>
+          <a:fillRef idx="0">
+            <a:schemeClr val="accent1"/>
+          </a:fillRef>
+          <a:effectRef idx="1">
+            <a:schemeClr val="accent1"/>
+          </a:effectRef>
+          <a:fontRef idx="minor">
+            <a:schemeClr val="tx1"/>
+          </a:fontRef>
+        </p:style>
+      </p:cxnSp>
+      <p:cxnSp>
+        <p:nvCxnSpPr>
+          <p:cNvPr id="15" name="Straight Connector 14">
+            <a:extLst>
+              <a:ext uri="{FF2B5EF4-FFF2-40B4-BE49-F238E27FC236}">
+                <a16:creationId xmlns:a16="http://schemas.microsoft.com/office/drawing/2014/main" id="{1E0A439B-E73B-425D-51AB-29366F614A6A}"/>
+              </a:ext>
+            </a:extLst>
+          </p:cNvPr>
+          <p:cNvCxnSpPr>
+            <a:cxnSpLocks/>
+          </p:cNvCxnSpPr>
+          <p:nvPr/>
+        </p:nvCxnSpPr>
+        <p:spPr>
+          <a:xfrm flipH="1">
+            <a:off x="2721633" y="2208362"/>
+            <a:ext cx="293298" cy="634039"/>
+          </a:xfrm>
+          <a:prstGeom prst="line">
+            <a:avLst/>
+          </a:prstGeom>
+        </p:spPr>
+        <p:style>
+          <a:lnRef idx="2">
+            <a:schemeClr val="accent1"/>
+          </a:lnRef>
+          <a:fillRef idx="0">
+            <a:schemeClr val="accent1"/>
+          </a:fillRef>
+          <a:effectRef idx="1">
+            <a:schemeClr val="accent1"/>
+          </a:effectRef>
+          <a:fontRef idx="minor">
+            <a:schemeClr val="tx1"/>
+          </a:fontRef>
+        </p:style>
+      </p:cxnSp>
+      <p:cxnSp>
+        <p:nvCxnSpPr>
+          <p:cNvPr id="17" name="Straight Connector 16">
+            <a:extLst>
+              <a:ext uri="{FF2B5EF4-FFF2-40B4-BE49-F238E27FC236}">
+                <a16:creationId xmlns:a16="http://schemas.microsoft.com/office/drawing/2014/main" id="{1599FA1D-B353-7A34-73DB-4CDFD029F8F5}"/>
+              </a:ext>
+            </a:extLst>
+          </p:cNvPr>
+          <p:cNvCxnSpPr>
+            <a:cxnSpLocks/>
+          </p:cNvCxnSpPr>
+          <p:nvPr/>
+        </p:nvCxnSpPr>
+        <p:spPr>
+          <a:xfrm flipH="1">
+            <a:off x="2874033" y="2360762"/>
+            <a:ext cx="293298" cy="634039"/>
+          </a:xfrm>
+          <a:prstGeom prst="line">
+            <a:avLst/>
+          </a:prstGeom>
+        </p:spPr>
+        <p:style>
+          <a:lnRef idx="2">
+            <a:schemeClr val="accent1"/>
+          </a:lnRef>
+          <a:fillRef idx="0">
+            <a:schemeClr val="accent1"/>
+          </a:fillRef>
+          <a:effectRef idx="1">
+            <a:schemeClr val="accent1"/>
+          </a:effectRef>
+          <a:fontRef idx="minor">
+            <a:schemeClr val="tx1"/>
+          </a:fontRef>
+        </p:style>
+      </p:cxnSp>
+    </p:spTree>
+    <p:extLst>
+      <p:ext uri="{BB962C8B-B14F-4D97-AF65-F5344CB8AC3E}">
+        <p14:creationId xmlns:p14="http://schemas.microsoft.com/office/powerpoint/2010/main" val="1869194029"/>
+      </p:ext>
+    </p:extLst>
+  </p:cSld>
+  <p:clrMapOvr>
+    <a:masterClrMapping/>
+  </p:clrMapOvr>
+</p:sld>
+</file>
+
+<file path=ppt/slides/slide7.xml><?xml version="1.0" encoding="utf-8"?>
+<p:sld xmlns:a="http://schemas.openxmlformats.org/drawingml/2006/main" xmlns:r="http://schemas.openxmlformats.org/officeDocument/2006/relationships" xmlns:p="http://schemas.openxmlformats.org/presentationml/2006/main">
+  <p:cSld>
+    <p:spTree>
+      <p:nvGrpSpPr>
+        <p:cNvPr id="1" name=""/>
+        <p:cNvGrpSpPr/>
+        <p:nvPr/>
+      </p:nvGrpSpPr>
+      <p:grpSpPr>
+        <a:xfrm>
+          <a:off x="0" y="0"/>
+          <a:ext cx="0" cy="0"/>
+          <a:chOff x="0" y="0"/>
+          <a:chExt cx="0" cy="0"/>
+        </a:xfrm>
+      </p:grpSpPr>
+      <p:pic>
+        <p:nvPicPr>
+          <p:cNvPr id="3" name="Picture 2">
+            <a:extLst>
+              <a:ext uri="{FF2B5EF4-FFF2-40B4-BE49-F238E27FC236}">
+                <a16:creationId xmlns:a16="http://schemas.microsoft.com/office/drawing/2014/main" id="{5A1F07C5-8A65-D067-5E61-8BC746A02C02}"/>
+              </a:ext>
+            </a:extLst>
+          </p:cNvPr>
+          <p:cNvPicPr>
+            <a:picLocks noChangeAspect="1"/>
+          </p:cNvPicPr>
+          <p:nvPr/>
+        </p:nvPicPr>
+        <p:blipFill>
+          <a:blip r:embed="rId2"/>
+          <a:stretch>
+            <a:fillRect/>
+          </a:stretch>
+        </p:blipFill>
+        <p:spPr>
+          <a:xfrm>
+            <a:off x="1578472" y="517907"/>
+            <a:ext cx="9035055" cy="5822185"/>
+          </a:xfrm>
+          <a:prstGeom prst="rect">
+            <a:avLst/>
+          </a:prstGeom>
+        </p:spPr>
+      </p:pic>
+      <p:cxnSp>
+        <p:nvCxnSpPr>
+          <p:cNvPr id="5" name="Straight Arrow Connector 4">
+            <a:extLst>
+              <a:ext uri="{FF2B5EF4-FFF2-40B4-BE49-F238E27FC236}">
+                <a16:creationId xmlns:a16="http://schemas.microsoft.com/office/drawing/2014/main" id="{4A2D1EDE-4EC3-D4BD-EED4-0263D92C1A53}"/>
+              </a:ext>
+            </a:extLst>
+          </p:cNvPr>
+          <p:cNvCxnSpPr/>
+          <p:nvPr/>
+        </p:nvCxnSpPr>
+        <p:spPr>
+          <a:xfrm>
+            <a:off x="5819775" y="5181600"/>
+            <a:ext cx="0" cy="295275"/>
+          </a:xfrm>
+          <a:prstGeom prst="straightConnector1">
+            <a:avLst/>
+          </a:prstGeom>
+          <a:ln>
+            <a:tailEnd type="triangle"/>
+          </a:ln>
+        </p:spPr>
+        <p:style>
+          <a:lnRef idx="2">
+            <a:schemeClr val="accent1"/>
+          </a:lnRef>
+          <a:fillRef idx="0">
+            <a:schemeClr val="accent1"/>
+          </a:fillRef>
+          <a:effectRef idx="1">
+            <a:schemeClr val="accent1"/>
+          </a:effectRef>
+          <a:fontRef idx="minor">
+            <a:schemeClr val="tx1"/>
+          </a:fontRef>
+        </p:style>
+      </p:cxnSp>
+      <p:sp>
+        <p:nvSpPr>
+          <p:cNvPr id="6" name="TextBox 5">
+            <a:extLst>
+              <a:ext uri="{FF2B5EF4-FFF2-40B4-BE49-F238E27FC236}">
+                <a16:creationId xmlns:a16="http://schemas.microsoft.com/office/drawing/2014/main" id="{B14CC680-EBEE-D919-7DB4-ED04BE739515}"/>
+              </a:ext>
+            </a:extLst>
+          </p:cNvPr>
+          <p:cNvSpPr txBox="1"/>
+          <p:nvPr/>
+        </p:nvSpPr>
+        <p:spPr>
+          <a:xfrm>
+            <a:off x="3633157" y="4535269"/>
+            <a:ext cx="4925684" cy="646331"/>
+          </a:xfrm>
+          <a:prstGeom prst="rect">
+            <a:avLst/>
+          </a:prstGeom>
+          <a:noFill/>
+        </p:spPr>
+        <p:txBody>
+          <a:bodyPr wrap="square" rtlCol="0">
+            <a:spAutoFit/>
+          </a:bodyPr>
+          <a:lstStyle/>
+          <a:p>
+            <a:r>
+              <a:rPr lang="en-US" dirty="0"/>
+              <a:t>The outer layer is actually the shield, it will fill left to right with a shade of blue</a:t>
+            </a:r>
+          </a:p>
+        </p:txBody>
+      </p:sp>
+      <p:cxnSp>
+        <p:nvCxnSpPr>
+          <p:cNvPr id="8" name="Straight Arrow Connector 7">
+            <a:extLst>
+              <a:ext uri="{FF2B5EF4-FFF2-40B4-BE49-F238E27FC236}">
+                <a16:creationId xmlns:a16="http://schemas.microsoft.com/office/drawing/2014/main" id="{5A4A5AA6-750E-C89A-3B5E-E4B61C22514B}"/>
+              </a:ext>
+            </a:extLst>
+          </p:cNvPr>
+          <p:cNvCxnSpPr/>
+          <p:nvPr/>
+        </p:nvCxnSpPr>
+        <p:spPr>
+          <a:xfrm flipH="1">
+            <a:off x="8764438" y="5476875"/>
+            <a:ext cx="388188" cy="475351"/>
+          </a:xfrm>
+          <a:prstGeom prst="straightConnector1">
+            <a:avLst/>
+          </a:prstGeom>
+          <a:ln>
+            <a:tailEnd type="triangle"/>
+          </a:ln>
+        </p:spPr>
+        <p:style>
+          <a:lnRef idx="2">
+            <a:schemeClr val="accent1"/>
+          </a:lnRef>
+          <a:fillRef idx="0">
+            <a:schemeClr val="accent1"/>
+          </a:fillRef>
+          <a:effectRef idx="1">
+            <a:schemeClr val="accent1"/>
+          </a:effectRef>
+          <a:fontRef idx="minor">
+            <a:schemeClr val="tx1"/>
+          </a:fontRef>
+        </p:style>
+      </p:cxnSp>
+      <p:sp>
+        <p:nvSpPr>
+          <p:cNvPr id="9" name="TextBox 8">
+            <a:extLst>
+              <a:ext uri="{FF2B5EF4-FFF2-40B4-BE49-F238E27FC236}">
+                <a16:creationId xmlns:a16="http://schemas.microsoft.com/office/drawing/2014/main" id="{CF6AFB18-70BA-DB2E-D8B9-6DDCF4227E9B}"/>
+              </a:ext>
+            </a:extLst>
+          </p:cNvPr>
+          <p:cNvSpPr txBox="1"/>
+          <p:nvPr/>
+        </p:nvSpPr>
+        <p:spPr>
+          <a:xfrm>
+            <a:off x="9074989" y="5089009"/>
+            <a:ext cx="2700068" cy="646331"/>
+          </a:xfrm>
+          <a:prstGeom prst="rect">
+            <a:avLst/>
+          </a:prstGeom>
+          <a:noFill/>
+        </p:spPr>
+        <p:txBody>
+          <a:bodyPr wrap="square" rtlCol="0">
+            <a:spAutoFit/>
+          </a:bodyPr>
+          <a:lstStyle/>
+          <a:p>
+            <a:r>
+              <a:rPr lang="en-US" dirty="0"/>
+              <a:t>The main box is the HP, also fill left to right</a:t>
+            </a:r>
+          </a:p>
+        </p:txBody>
+      </p:sp>
+    </p:spTree>
+    <p:extLst>
+      <p:ext uri="{BB962C8B-B14F-4D97-AF65-F5344CB8AC3E}">
+        <p14:creationId xmlns:p14="http://schemas.microsoft.com/office/powerpoint/2010/main" val="655174484"/>
+      </p:ext>
+    </p:extLst>
+  </p:cSld>
+  <p:clrMapOvr>
+    <a:masterClrMapping/>
+  </p:clrMapOvr>
+</p:sld>
+</file>
+
 <file path=ppt/theme/theme1.xml><?xml version="1.0" encoding="utf-8"?>
 <a:theme xmlns:a="http://schemas.openxmlformats.org/drawingml/2006/main" name="Office Theme">
   <a:themeElements>

--- a/Inventory layout.pptx
+++ b/Inventory layout.pptx
@@ -265,7 +265,7 @@
           <a:p>
             <a:fld id="{E73BF3D3-EBD1-455C-84C1-7FFD7CFDB72E}" type="datetimeFigureOut">
               <a:rPr lang="en-US" smtClean="0"/>
-              <a:t>6/30/2026</a:t>
+              <a:t>7/4/2026</a:t>
             </a:fld>
             <a:endParaRPr lang="en-US"/>
           </a:p>
@@ -463,7 +463,7 @@
           <a:p>
             <a:fld id="{E73BF3D3-EBD1-455C-84C1-7FFD7CFDB72E}" type="datetimeFigureOut">
               <a:rPr lang="en-US" smtClean="0"/>
-              <a:t>6/30/2026</a:t>
+              <a:t>7/4/2026</a:t>
             </a:fld>
             <a:endParaRPr lang="en-US"/>
           </a:p>
@@ -671,7 +671,7 @@
           <a:p>
             <a:fld id="{E73BF3D3-EBD1-455C-84C1-7FFD7CFDB72E}" type="datetimeFigureOut">
               <a:rPr lang="en-US" smtClean="0"/>
-              <a:t>6/30/2026</a:t>
+              <a:t>7/4/2026</a:t>
             </a:fld>
             <a:endParaRPr lang="en-US"/>
           </a:p>
@@ -869,7 +869,7 @@
           <a:p>
             <a:fld id="{E73BF3D3-EBD1-455C-84C1-7FFD7CFDB72E}" type="datetimeFigureOut">
               <a:rPr lang="en-US" smtClean="0"/>
-              <a:t>6/30/2026</a:t>
+              <a:t>7/4/2026</a:t>
             </a:fld>
             <a:endParaRPr lang="en-US"/>
           </a:p>
@@ -1144,7 +1144,7 @@
           <a:p>
             <a:fld id="{E73BF3D3-EBD1-455C-84C1-7FFD7CFDB72E}" type="datetimeFigureOut">
               <a:rPr lang="en-US" smtClean="0"/>
-              <a:t>6/30/2026</a:t>
+              <a:t>7/4/2026</a:t>
             </a:fld>
             <a:endParaRPr lang="en-US"/>
           </a:p>
@@ -1409,7 +1409,7 @@
           <a:p>
             <a:fld id="{E73BF3D3-EBD1-455C-84C1-7FFD7CFDB72E}" type="datetimeFigureOut">
               <a:rPr lang="en-US" smtClean="0"/>
-              <a:t>6/30/2026</a:t>
+              <a:t>7/4/2026</a:t>
             </a:fld>
             <a:endParaRPr lang="en-US"/>
           </a:p>
@@ -1821,7 +1821,7 @@
           <a:p>
             <a:fld id="{E73BF3D3-EBD1-455C-84C1-7FFD7CFDB72E}" type="datetimeFigureOut">
               <a:rPr lang="en-US" smtClean="0"/>
-              <a:t>6/30/2026</a:t>
+              <a:t>7/4/2026</a:t>
             </a:fld>
             <a:endParaRPr lang="en-US"/>
           </a:p>
@@ -1962,7 +1962,7 @@
           <a:p>
             <a:fld id="{E73BF3D3-EBD1-455C-84C1-7FFD7CFDB72E}" type="datetimeFigureOut">
               <a:rPr lang="en-US" smtClean="0"/>
-              <a:t>6/30/2026</a:t>
+              <a:t>7/4/2026</a:t>
             </a:fld>
             <a:endParaRPr lang="en-US"/>
           </a:p>
@@ -2075,7 +2075,7 @@
           <a:p>
             <a:fld id="{E73BF3D3-EBD1-455C-84C1-7FFD7CFDB72E}" type="datetimeFigureOut">
               <a:rPr lang="en-US" smtClean="0"/>
-              <a:t>6/30/2026</a:t>
+              <a:t>7/4/2026</a:t>
             </a:fld>
             <a:endParaRPr lang="en-US"/>
           </a:p>
@@ -2386,7 +2386,7 @@
           <a:p>
             <a:fld id="{E73BF3D3-EBD1-455C-84C1-7FFD7CFDB72E}" type="datetimeFigureOut">
               <a:rPr lang="en-US" smtClean="0"/>
-              <a:t>6/30/2026</a:t>
+              <a:t>7/4/2026</a:t>
             </a:fld>
             <a:endParaRPr lang="en-US"/>
           </a:p>
@@ -2674,7 +2674,7 @@
           <a:p>
             <a:fld id="{E73BF3D3-EBD1-455C-84C1-7FFD7CFDB72E}" type="datetimeFigureOut">
               <a:rPr lang="en-US" smtClean="0"/>
-              <a:t>6/30/2026</a:t>
+              <a:t>7/4/2026</a:t>
             </a:fld>
             <a:endParaRPr lang="en-US"/>
           </a:p>
@@ -2915,7 +2915,7 @@
           <a:p>
             <a:fld id="{E73BF3D3-EBD1-455C-84C1-7FFD7CFDB72E}" type="datetimeFigureOut">
               <a:rPr lang="en-US" smtClean="0"/>
-              <a:t>6/30/2026</a:t>
+              <a:t>7/4/2026</a:t>
             </a:fld>
             <a:endParaRPr lang="en-US"/>
           </a:p>
@@ -6072,10 +6072,10 @@
       </p:cxnSp>
       <p:sp>
         <p:nvSpPr>
-          <p:cNvPr id="39" name="TextBox 38">
-            <a:extLst>
-              <a:ext uri="{FF2B5EF4-FFF2-40B4-BE49-F238E27FC236}">
-                <a16:creationId xmlns:a16="http://schemas.microsoft.com/office/drawing/2014/main" id="{7BB4DDDD-6966-6BD5-12E5-EEA4C21BE20E}"/>
+          <p:cNvPr id="41" name="TextBox 40">
+            <a:extLst>
+              <a:ext uri="{FF2B5EF4-FFF2-40B4-BE49-F238E27FC236}">
+                <a16:creationId xmlns:a16="http://schemas.microsoft.com/office/drawing/2014/main" id="{D3C14A8F-1E78-BB95-D59C-6D370CA82E9A}"/>
               </a:ext>
             </a:extLst>
           </p:cNvPr>
@@ -6084,42 +6084,7 @@
         </p:nvSpPr>
         <p:spPr>
           <a:xfrm>
-            <a:off x="1812983" y="702686"/>
-            <a:ext cx="1546385" cy="307777"/>
-          </a:xfrm>
-          <a:prstGeom prst="rect">
-            <a:avLst/>
-          </a:prstGeom>
-          <a:noFill/>
-        </p:spPr>
-        <p:txBody>
-          <a:bodyPr wrap="none" rtlCol="0">
-            <a:spAutoFit/>
-          </a:bodyPr>
-          <a:lstStyle/>
-          <a:p>
-            <a:r>
-              <a:rPr lang="en-US" sz="1400" dirty="0"/>
-              <a:t>Exp bar is up here</a:t>
-            </a:r>
-          </a:p>
-        </p:txBody>
-      </p:sp>
-      <p:sp>
-        <p:nvSpPr>
-          <p:cNvPr id="41" name="TextBox 40">
-            <a:extLst>
-              <a:ext uri="{FF2B5EF4-FFF2-40B4-BE49-F238E27FC236}">
-                <a16:creationId xmlns:a16="http://schemas.microsoft.com/office/drawing/2014/main" id="{D3C14A8F-1E78-BB95-D59C-6D370CA82E9A}"/>
-              </a:ext>
-            </a:extLst>
-          </p:cNvPr>
-          <p:cNvSpPr txBox="1"/>
-          <p:nvPr/>
-        </p:nvSpPr>
-        <p:spPr>
-          <a:xfrm>
-            <a:off x="3803299" y="5629529"/>
+            <a:off x="4917273" y="5657029"/>
             <a:ext cx="2103461" cy="369332"/>
           </a:xfrm>
           <a:prstGeom prst="rect">
@@ -6271,7 +6236,7 @@
         </p:nvSpPr>
         <p:spPr>
           <a:xfrm>
-            <a:off x="5931202" y="5629529"/>
+            <a:off x="4529452" y="5309901"/>
             <a:ext cx="2844112" cy="369332"/>
           </a:xfrm>
           <a:prstGeom prst="rect">
@@ -6782,84 +6747,98 @@
           </a:p>
         </p:txBody>
       </p:sp>
-      <p:cxnSp>
-        <p:nvCxnSpPr>
-          <p:cNvPr id="85" name="Straight Connector 84">
-            <a:extLst>
-              <a:ext uri="{FF2B5EF4-FFF2-40B4-BE49-F238E27FC236}">
-                <a16:creationId xmlns:a16="http://schemas.microsoft.com/office/drawing/2014/main" id="{46A76CD7-AAA1-36C9-5127-E32A78EA7DC4}"/>
-              </a:ext>
-            </a:extLst>
-          </p:cNvPr>
-          <p:cNvCxnSpPr/>
+      <p:sp>
+        <p:nvSpPr>
+          <p:cNvPr id="3" name="Oval 2">
+            <a:extLst>
+              <a:ext uri="{FF2B5EF4-FFF2-40B4-BE49-F238E27FC236}">
+                <a16:creationId xmlns:a16="http://schemas.microsoft.com/office/drawing/2014/main" id="{DF807553-2303-2D7C-AFEB-63A53B0C523F}"/>
+              </a:ext>
+            </a:extLst>
+          </p:cNvPr>
+          <p:cNvSpPr/>
           <p:nvPr/>
-        </p:nvCxnSpPr>
+        </p:nvSpPr>
         <p:spPr>
           <a:xfrm>
-            <a:off x="1605949" y="439947"/>
-            <a:ext cx="8988727" cy="0"/>
-          </a:xfrm>
-          <a:prstGeom prst="line">
+            <a:off x="2580594" y="5503650"/>
+            <a:ext cx="723327" cy="526206"/>
+          </a:xfrm>
+          <a:prstGeom prst="ellipse">
             <a:avLst/>
           </a:prstGeom>
         </p:spPr>
         <p:style>
           <a:lnRef idx="2">
-            <a:schemeClr val="accent1"/>
+            <a:schemeClr val="accent1">
+              <a:shade val="15000"/>
+            </a:schemeClr>
           </a:lnRef>
-          <a:fillRef idx="0">
+          <a:fillRef idx="1">
             <a:schemeClr val="accent1"/>
           </a:fillRef>
-          <a:effectRef idx="1">
+          <a:effectRef idx="0">
             <a:schemeClr val="accent1"/>
           </a:effectRef>
           <a:fontRef idx="minor">
-            <a:schemeClr val="tx1"/>
+            <a:schemeClr val="lt1"/>
           </a:fontRef>
         </p:style>
-      </p:cxnSp>
-      <p:cxnSp>
-        <p:nvCxnSpPr>
-          <p:cNvPr id="86" name="Straight Arrow Connector 85">
-            <a:extLst>
-              <a:ext uri="{FF2B5EF4-FFF2-40B4-BE49-F238E27FC236}">
-                <a16:creationId xmlns:a16="http://schemas.microsoft.com/office/drawing/2014/main" id="{F6507631-48C6-520C-7EE8-BBA718B66490}"/>
-              </a:ext>
-            </a:extLst>
-          </p:cNvPr>
-          <p:cNvCxnSpPr>
-            <a:cxnSpLocks/>
-            <a:stCxn id="39" idx="2"/>
-          </p:cNvCxnSpPr>
+        <p:txBody>
+          <a:bodyPr rtlCol="0" anchor="ctr"/>
+          <a:lstStyle/>
+          <a:p>
+            <a:pPr algn="ctr"/>
+            <a:endParaRPr lang="en-US"/>
+          </a:p>
+        </p:txBody>
+      </p:sp>
+      <p:sp>
+        <p:nvSpPr>
+          <p:cNvPr id="6" name="Oval 5">
+            <a:extLst>
+              <a:ext uri="{FF2B5EF4-FFF2-40B4-BE49-F238E27FC236}">
+                <a16:creationId xmlns:a16="http://schemas.microsoft.com/office/drawing/2014/main" id="{7B6D1069-8776-1BCB-7711-29E3206CC455}"/>
+              </a:ext>
+            </a:extLst>
+          </p:cNvPr>
+          <p:cNvSpPr/>
           <p:nvPr/>
-        </p:nvCxnSpPr>
+        </p:nvSpPr>
         <p:spPr>
-          <a:xfrm flipH="1" flipV="1">
-            <a:off x="2580594" y="439947"/>
-            <a:ext cx="5582" cy="570516"/>
-          </a:xfrm>
-          <a:prstGeom prst="straightConnector1">
+          <a:xfrm>
+            <a:off x="9099431" y="5503641"/>
+            <a:ext cx="723327" cy="526206"/>
+          </a:xfrm>
+          <a:prstGeom prst="ellipse">
             <a:avLst/>
           </a:prstGeom>
-          <a:ln>
-            <a:tailEnd type="triangle"/>
-          </a:ln>
         </p:spPr>
         <p:style>
           <a:lnRef idx="2">
-            <a:schemeClr val="accent1"/>
+            <a:schemeClr val="accent1">
+              <a:shade val="15000"/>
+            </a:schemeClr>
           </a:lnRef>
-          <a:fillRef idx="0">
+          <a:fillRef idx="1">
             <a:schemeClr val="accent1"/>
           </a:fillRef>
-          <a:effectRef idx="1">
+          <a:effectRef idx="0">
             <a:schemeClr val="accent1"/>
           </a:effectRef>
           <a:fontRef idx="minor">
-            <a:schemeClr val="tx1"/>
+            <a:schemeClr val="lt1"/>
           </a:fontRef>
         </p:style>
-      </p:cxnSp>
+        <p:txBody>
+          <a:bodyPr rtlCol="0" anchor="ctr"/>
+          <a:lstStyle/>
+          <a:p>
+            <a:pPr algn="ctr"/>
+            <a:endParaRPr lang="en-US"/>
+          </a:p>
+        </p:txBody>
+      </p:sp>
     </p:spTree>
     <p:extLst>
       <p:ext uri="{BB962C8B-B14F-4D97-AF65-F5344CB8AC3E}">
